--- a/docs/test/golden-outputs/p2-sinsa-r3/captures/sinsa_basic.pptx
+++ b/docs/test/golden-outputs/p2-sinsa-r3/captures/sinsa_basic.pptx
@@ -12,9 +12,10 @@
     <p:sldId id="260" r:id="rId6"/>
     <p:sldId id="261" r:id="rId7"/>
     <p:sldId id="262" r:id="rId8"/>
+    <p:sldId id="263" r:id="rId9"/>
   </p:sldIdLst>
   <p:notesMasterIdLst>
-    <p:notesMasterId r:id="rId9"/>
+    <p:notesMasterId r:id="rId10"/>
   </p:notesMasterIdLst>
   <p:sldSz cx="12192000" cy="6858000"/>
   <p:notesSz cx="6858000" cy="12192000"/>
@@ -1060,6 +1061,94 @@
             <a:fld id="{F7021451-1387-4CA6-816F-3879F97B5CBC}" type="slidenum">
               <a:rPr lang="en-US"/>
               <a:t>7</a:t>
+            </a:fld>
+            <a:endParaRPr lang="en-US"/>
+          </a:p>
+        </p:txBody>
+      </p:sp>
+    </p:spTree>
+    <p:extLst>
+      <p:ext uri="{BB962C8B-B14F-4D97-AF65-F5344CB8AC3E}">
+        <p14:creationId xmlns:p14="http://schemas.microsoft.com/office/powerpoint/2010/main" val="1024086991"/>
+      </p:ext>
+    </p:extLst>
+  </p:cSld>
+  <p:clrMapOvr>
+    <a:masterClrMapping/>
+  </p:clrMapOvr>
+</p:notes>
+</file>
+
+<file path=ppt/notesSlides/notesSlide8.xml><?xml version="1.0" encoding="utf-8"?>
+<p:notes xmlns:a="http://schemas.openxmlformats.org/drawingml/2006/main" xmlns:r="http://schemas.openxmlformats.org/officeDocument/2006/relationships" xmlns:p="http://schemas.openxmlformats.org/presentationml/2006/main">
+  <p:cSld>
+    <p:spTree>
+      <p:nvGrpSpPr>
+        <p:cNvPr id="1" name=""/>
+        <p:cNvGrpSpPr/>
+        <p:nvPr/>
+      </p:nvGrpSpPr>
+      <p:grpSpPr>
+        <a:xfrm>
+          <a:off x="0" y="0"/>
+          <a:ext cx="0" cy="0"/>
+          <a:chOff x="0" y="0"/>
+          <a:chExt cx="0" cy="0"/>
+        </a:xfrm>
+      </p:grpSpPr>
+      <p:sp>
+        <p:nvSpPr>
+          <p:cNvPr id="2" name="Slide Image Placeholder 1"/>
+          <p:cNvSpPr>
+            <a:spLocks noGrp="1" noRot="1" noChangeAspect="1"/>
+          </p:cNvSpPr>
+          <p:nvPr>
+            <p:ph type="sldImg"/>
+          </p:nvPr>
+        </p:nvSpPr>
+        <p:spPr/>
+      </p:sp>
+      <p:sp>
+        <p:nvSpPr>
+          <p:cNvPr id="3" name="Notes Placeholder 2"/>
+          <p:cNvSpPr>
+            <a:spLocks noGrp="1"/>
+          </p:cNvSpPr>
+          <p:nvPr>
+            <p:ph type="body" idx="1"/>
+          </p:nvPr>
+        </p:nvSpPr>
+        <p:spPr/>
+        <p:txBody>
+          <a:bodyPr/>
+          <a:lstStyle/>
+          <a:p>
+            <a:r>
+              <a:rPr lang="en-US" dirty="0"/>
+              <a:t/>
+            </a:r>
+            <a:endParaRPr lang="en-US" dirty="0"/>
+          </a:p>
+        </p:txBody>
+      </p:sp>
+      <p:sp>
+        <p:nvSpPr>
+          <p:cNvPr id="4" name="Slide Number Placeholder 3"/>
+          <p:cNvSpPr>
+            <a:spLocks noGrp="1"/>
+          </p:cNvSpPr>
+          <p:nvPr>
+            <p:ph type="sldNum" sz="quarter" idx="10"/>
+          </p:nvPr>
+        </p:nvSpPr>
+        <p:spPr/>
+        <p:txBody>
+          <a:bodyPr/>
+          <a:lstStyle/>
+          <a:p>
+            <a:fld id="{F7021451-1387-4CA6-816F-3879F97B5CBC}" type="slidenum">
+              <a:rPr lang="en-US"/>
+              <a:t>8</a:t>
             </a:fld>
             <a:endParaRPr lang="en-US"/>
           </a:p>
@@ -2021,7 +2110,7 @@
                 <a:ea typeface="맑은 고딕" pitchFamily="34" charset="-122"/>
                 <a:cs typeface="맑은 고딕" pitchFamily="34" charset="-120"/>
               </a:rPr>
-              <a:t>2026.09.20  |  수석 자문역  |  CREDEAL 투자자문</a:t>
+              <a:t>2026.09.21  |  수석 자문역  |  CREDEAL 투자자문</a:t>
             </a:r>
             <a:endParaRPr lang="en-US" sz="900" dirty="0"/>
           </a:p>
@@ -2426,10 +2515,13 @@
           <a:lstStyle/>
           <a:p>
             <a:pPr indent="0" marL="0">
-              <a:buNone/>
-            </a:pPr>
-            <a:r>
-              <a:rPr lang="en-US" sz="1700" b="1" dirty="0">
+              <a:lnSpc>
+                <a:spcPct val="100000"/>
+              </a:lnSpc>
+              <a:buNone/>
+            </a:pPr>
+            <a:r>
+              <a:rPr lang="en-US" sz="2200" b="1" dirty="0">
                 <a:solidFill>
                   <a:srgbClr val="132A3A"/>
                 </a:solidFill>
@@ -2439,7 +2531,7 @@
               </a:rPr>
               <a:t>760억 원</a:t>
             </a:r>
-            <a:endParaRPr lang="en-US" sz="1700" dirty="0"/>
+            <a:endParaRPr lang="en-US" sz="2200" dirty="0"/>
           </a:p>
         </p:txBody>
       </p:sp>
@@ -2533,10 +2625,13 @@
           <a:lstStyle/>
           <a:p>
             <a:pPr indent="0" marL="0">
-              <a:buNone/>
-            </a:pPr>
-            <a:r>
-              <a:rPr lang="en-US" sz="1700" b="1" dirty="0">
+              <a:lnSpc>
+                <a:spcPct val="100000"/>
+              </a:lnSpc>
+              <a:buNone/>
+            </a:pPr>
+            <a:r>
+              <a:rPr lang="en-US" sz="1200" b="1" dirty="0">
                 <a:solidFill>
                   <a:srgbClr val="132A3A"/>
                 </a:solidFill>
@@ -2546,7 +2641,7 @@
               </a:rPr>
               <a:t>서울특별시 강남구 신사동 590</a:t>
             </a:r>
-            <a:endParaRPr lang="en-US" sz="1700" dirty="0"/>
+            <a:endParaRPr lang="en-US" sz="1200" dirty="0"/>
           </a:p>
         </p:txBody>
       </p:sp>
@@ -2640,10 +2735,13 @@
           <a:lstStyle/>
           <a:p>
             <a:pPr indent="0" marL="0">
-              <a:buNone/>
-            </a:pPr>
-            <a:r>
-              <a:rPr lang="en-US" sz="1700" b="1" dirty="0">
+              <a:lnSpc>
+                <a:spcPct val="100000"/>
+              </a:lnSpc>
+              <a:buNone/>
+            </a:pPr>
+            <a:r>
+              <a:rPr lang="en-US" sz="1200" b="1" dirty="0">
                 <a:solidFill>
                   <a:srgbClr val="132A3A"/>
                 </a:solidFill>
@@ -2653,7 +2751,7 @@
               </a:rPr>
               <a:t>1,061.9㎡ (321.2평)</a:t>
             </a:r>
-            <a:endParaRPr lang="en-US" sz="1700" dirty="0"/>
+            <a:endParaRPr lang="en-US" sz="1200" dirty="0"/>
           </a:p>
         </p:txBody>
       </p:sp>
@@ -2747,10 +2845,13 @@
           <a:lstStyle/>
           <a:p>
             <a:pPr indent="0" marL="0">
-              <a:buNone/>
-            </a:pPr>
-            <a:r>
-              <a:rPr lang="en-US" sz="1700" b="1" dirty="0">
+              <a:lnSpc>
+                <a:spcPct val="100000"/>
+              </a:lnSpc>
+              <a:buNone/>
+            </a:pPr>
+            <a:r>
+              <a:rPr lang="en-US" sz="1200" b="1" dirty="0">
                 <a:solidFill>
                   <a:srgbClr val="132A3A"/>
                 </a:solidFill>
@@ -2760,7 +2861,7 @@
               </a:rPr>
               <a:t>3,341.8㎡ (1,010.9평)</a:t>
             </a:r>
-            <a:endParaRPr lang="en-US" sz="1700" dirty="0"/>
+            <a:endParaRPr lang="en-US" sz="1200" dirty="0"/>
           </a:p>
         </p:txBody>
       </p:sp>
@@ -2854,10 +2955,13 @@
           <a:lstStyle/>
           <a:p>
             <a:pPr indent="0" marL="0">
-              <a:buNone/>
-            </a:pPr>
-            <a:r>
-              <a:rPr lang="en-US" sz="1700" b="1" dirty="0">
+              <a:lnSpc>
+                <a:spcPct val="100000"/>
+              </a:lnSpc>
+              <a:buNone/>
+            </a:pPr>
+            <a:r>
+              <a:rPr lang="en-US" sz="1800" b="1" dirty="0">
                 <a:solidFill>
                   <a:srgbClr val="132A3A"/>
                 </a:solidFill>
@@ -2867,7 +2971,7 @@
               </a:rPr>
               <a:t>제3종일반주거지역</a:t>
             </a:r>
-            <a:endParaRPr lang="en-US" sz="1700" dirty="0"/>
+            <a:endParaRPr lang="en-US" sz="1800" dirty="0"/>
           </a:p>
         </p:txBody>
       </p:sp>
@@ -2961,10 +3065,13 @@
           <a:lstStyle/>
           <a:p>
             <a:pPr indent="0" marL="0">
-              <a:buNone/>
-            </a:pPr>
-            <a:r>
-              <a:rPr lang="en-US" sz="1700" b="1" dirty="0">
+              <a:lnSpc>
+                <a:spcPct val="100000"/>
+              </a:lnSpc>
+              <a:buNone/>
+            </a:pPr>
+            <a:r>
+              <a:rPr lang="en-US" sz="1400" b="1" dirty="0">
                 <a:solidFill>
                   <a:srgbClr val="132A3A"/>
                 </a:solidFill>
@@ -2974,7 +3081,7 @@
               </a:rPr>
               <a:t>지하 2층 ~ 지상 6층</a:t>
             </a:r>
-            <a:endParaRPr lang="en-US" sz="1700" dirty="0"/>
+            <a:endParaRPr lang="en-US" sz="1400" dirty="0"/>
           </a:p>
         </p:txBody>
       </p:sp>
@@ -3068,10 +3175,13 @@
           <a:lstStyle/>
           <a:p>
             <a:pPr indent="0" marL="0">
-              <a:buNone/>
-            </a:pPr>
-            <a:r>
-              <a:rPr lang="en-US" sz="1700" b="1" dirty="0">
+              <a:lnSpc>
+                <a:spcPct val="100000"/>
+              </a:lnSpc>
+              <a:buNone/>
+            </a:pPr>
+            <a:r>
+              <a:rPr lang="en-US" sz="2200" b="1" dirty="0">
                 <a:solidFill>
                   <a:srgbClr val="132A3A"/>
                 </a:solidFill>
@@ -3081,7 +3191,7 @@
               </a:rPr>
               <a:t>1998년</a:t>
             </a:r>
-            <a:endParaRPr lang="en-US" sz="1700" dirty="0"/>
+            <a:endParaRPr lang="en-US" sz="2200" dirty="0"/>
           </a:p>
         </p:txBody>
       </p:sp>
@@ -3175,10 +3285,13 @@
           <a:lstStyle/>
           <a:p>
             <a:pPr indent="0" marL="0">
-              <a:buNone/>
-            </a:pPr>
-            <a:r>
-              <a:rPr lang="en-US" sz="1700" b="1" dirty="0">
+              <a:lnSpc>
+                <a:spcPct val="100000"/>
+              </a:lnSpc>
+              <a:buNone/>
+            </a:pPr>
+            <a:r>
+              <a:rPr lang="en-US" sz="1200" b="1" dirty="0">
                 <a:solidFill>
                   <a:srgbClr val="132A3A"/>
                 </a:solidFill>
@@ -3188,7 +3301,7 @@
               </a:rPr>
               <a:t>자주식 5대 / 기계식 21대 (총 26대)</a:t>
             </a:r>
-            <a:endParaRPr lang="en-US" sz="1700" dirty="0"/>
+            <a:endParaRPr lang="en-US" sz="1200" dirty="0"/>
           </a:p>
         </p:txBody>
       </p:sp>
@@ -3357,7 +3470,7 @@
                 <a:ea typeface="맑은 고딕" pitchFamily="34" charset="-122"/>
                 <a:cs typeface="맑은 고딕" pitchFamily="34" charset="-120"/>
               </a:rPr>
-              <a:t>입지 가치: 대중교통 역세권 입지, 해당 권역 업무·상업 중심지 배후 수요 확보</a:t>
+              <a:t>입지 가치: 압구정역 도보 5분 역세권 및 논현로 이면 코너 (북측 8m, 동측 6m) 접면, GBD 업무·상업 중심지 배후 수요 확보</a:t>
             </a:r>
             <a:endParaRPr lang="en-US" sz="1000" dirty="0"/>
           </a:p>
@@ -3922,7 +4035,7 @@
         <p:spPr>
           <a:xfrm>
             <a:off x="502920" y="1645920"/>
-            <a:ext cx="1920240" cy="329184"/>
+            <a:ext cx="1920240" cy="274320"/>
           </a:xfrm>
           <a:prstGeom prst="rect">
             <a:avLst/>
@@ -3941,7 +4054,7 @@
               <a:buNone/>
             </a:pPr>
             <a:r>
-              <a:rPr lang="en-US" sz="1200" dirty="0">
+              <a:rPr lang="en-US" sz="1100" dirty="0">
                 <a:solidFill>
                   <a:srgbClr val="5B6B73"/>
                 </a:solidFill>
@@ -3951,7 +4064,7 @@
               </a:rPr>
               <a:t>소재지</a:t>
             </a:r>
-            <a:endParaRPr lang="en-US" sz="1200" dirty="0"/>
+            <a:endParaRPr lang="en-US" sz="1100" dirty="0"/>
           </a:p>
         </p:txBody>
       </p:sp>
@@ -3964,7 +4077,7 @@
         <p:spPr>
           <a:xfrm>
             <a:off x="2423160" y="1645920"/>
-            <a:ext cx="4937760" cy="329184"/>
+            <a:ext cx="4937760" cy="274320"/>
           </a:xfrm>
           <a:prstGeom prst="rect">
             <a:avLst/>
@@ -3983,7 +4096,7 @@
               <a:buNone/>
             </a:pPr>
             <a:r>
-              <a:rPr lang="en-US" sz="1200" b="1" dirty="0">
+              <a:rPr lang="en-US" sz="1100" b="1" dirty="0">
                 <a:solidFill>
                   <a:srgbClr val="132A3A"/>
                 </a:solidFill>
@@ -3993,7 +4106,7 @@
               </a:rPr>
               <a:t>서울특별시 강남구 신사동 590</a:t>
             </a:r>
-            <a:endParaRPr lang="en-US" sz="1200" dirty="0"/>
+            <a:endParaRPr lang="en-US" sz="1100" dirty="0"/>
           </a:p>
         </p:txBody>
       </p:sp>
@@ -4005,7 +4118,7 @@
         </p:nvSpPr>
         <p:spPr>
           <a:xfrm>
-            <a:off x="502920" y="1975104"/>
+            <a:off x="502920" y="1920240"/>
             <a:ext cx="6858000" cy="0"/>
           </a:xfrm>
           <a:prstGeom prst="line">
@@ -4028,8 +4141,8 @@
         </p:nvSpPr>
         <p:spPr>
           <a:xfrm>
-            <a:off x="502920" y="1975104"/>
-            <a:ext cx="1920240" cy="329184"/>
+            <a:off x="502920" y="1920240"/>
+            <a:ext cx="1920240" cy="274320"/>
           </a:xfrm>
           <a:prstGeom prst="rect">
             <a:avLst/>
@@ -4048,7 +4161,7 @@
               <a:buNone/>
             </a:pPr>
             <a:r>
-              <a:rPr lang="en-US" sz="1200" dirty="0">
+              <a:rPr lang="en-US" sz="1100" dirty="0">
                 <a:solidFill>
                   <a:srgbClr val="5B6B73"/>
                 </a:solidFill>
@@ -4058,7 +4171,7 @@
               </a:rPr>
               <a:t>대지면적</a:t>
             </a:r>
-            <a:endParaRPr lang="en-US" sz="1200" dirty="0"/>
+            <a:endParaRPr lang="en-US" sz="1100" dirty="0"/>
           </a:p>
         </p:txBody>
       </p:sp>
@@ -4070,8 +4183,8 @@
         </p:nvSpPr>
         <p:spPr>
           <a:xfrm>
-            <a:off x="2423160" y="1975104"/>
-            <a:ext cx="4937760" cy="329184"/>
+            <a:off x="2423160" y="1920240"/>
+            <a:ext cx="4937760" cy="274320"/>
           </a:xfrm>
           <a:prstGeom prst="rect">
             <a:avLst/>
@@ -4090,7 +4203,7 @@
               <a:buNone/>
             </a:pPr>
             <a:r>
-              <a:rPr lang="en-US" sz="1200" b="1" dirty="0">
+              <a:rPr lang="en-US" sz="1100" b="1" dirty="0">
                 <a:solidFill>
                   <a:srgbClr val="132A3A"/>
                 </a:solidFill>
@@ -4100,7 +4213,7 @@
               </a:rPr>
               <a:t>1,061.9㎡ (321.2평)</a:t>
             </a:r>
-            <a:endParaRPr lang="en-US" sz="1200" dirty="0"/>
+            <a:endParaRPr lang="en-US" sz="1100" dirty="0"/>
           </a:p>
         </p:txBody>
       </p:sp>
@@ -4112,7 +4225,7 @@
         </p:nvSpPr>
         <p:spPr>
           <a:xfrm>
-            <a:off x="502920" y="2304288"/>
+            <a:off x="502920" y="2194560"/>
             <a:ext cx="6858000" cy="0"/>
           </a:xfrm>
           <a:prstGeom prst="line">
@@ -4135,8 +4248,8 @@
         </p:nvSpPr>
         <p:spPr>
           <a:xfrm>
-            <a:off x="502920" y="2304288"/>
-            <a:ext cx="1920240" cy="329184"/>
+            <a:off x="502920" y="2194560"/>
+            <a:ext cx="1920240" cy="274320"/>
           </a:xfrm>
           <a:prstGeom prst="rect">
             <a:avLst/>
@@ -4155,7 +4268,7 @@
               <a:buNone/>
             </a:pPr>
             <a:r>
-              <a:rPr lang="en-US" sz="1200" dirty="0">
+              <a:rPr lang="en-US" sz="1100" dirty="0">
                 <a:solidFill>
                   <a:srgbClr val="5B6B73"/>
                 </a:solidFill>
@@ -4165,7 +4278,7 @@
               </a:rPr>
               <a:t>연면적</a:t>
             </a:r>
-            <a:endParaRPr lang="en-US" sz="1200" dirty="0"/>
+            <a:endParaRPr lang="en-US" sz="1100" dirty="0"/>
           </a:p>
         </p:txBody>
       </p:sp>
@@ -4177,8 +4290,8 @@
         </p:nvSpPr>
         <p:spPr>
           <a:xfrm>
-            <a:off x="2423160" y="2304288"/>
-            <a:ext cx="4937760" cy="329184"/>
+            <a:off x="2423160" y="2194560"/>
+            <a:ext cx="4937760" cy="274320"/>
           </a:xfrm>
           <a:prstGeom prst="rect">
             <a:avLst/>
@@ -4197,7 +4310,7 @@
               <a:buNone/>
             </a:pPr>
             <a:r>
-              <a:rPr lang="en-US" sz="1200" b="1" dirty="0">
+              <a:rPr lang="en-US" sz="1100" b="1" dirty="0">
                 <a:solidFill>
                   <a:srgbClr val="132A3A"/>
                 </a:solidFill>
@@ -4207,7 +4320,7 @@
               </a:rPr>
               <a:t>3,341.8㎡ (1,010.9평)</a:t>
             </a:r>
-            <a:endParaRPr lang="en-US" sz="1200" dirty="0"/>
+            <a:endParaRPr lang="en-US" sz="1100" dirty="0"/>
           </a:p>
         </p:txBody>
       </p:sp>
@@ -4219,7 +4332,7 @@
         </p:nvSpPr>
         <p:spPr>
           <a:xfrm>
-            <a:off x="502920" y="2633472"/>
+            <a:off x="502920" y="2468880"/>
             <a:ext cx="6858000" cy="0"/>
           </a:xfrm>
           <a:prstGeom prst="line">
@@ -4242,8 +4355,8 @@
         </p:nvSpPr>
         <p:spPr>
           <a:xfrm>
-            <a:off x="502920" y="2633472"/>
-            <a:ext cx="1920240" cy="329184"/>
+            <a:off x="502920" y="2468880"/>
+            <a:ext cx="1920240" cy="274320"/>
           </a:xfrm>
           <a:prstGeom prst="rect">
             <a:avLst/>
@@ -4262,7 +4375,7 @@
               <a:buNone/>
             </a:pPr>
             <a:r>
-              <a:rPr lang="en-US" sz="1200" dirty="0">
+              <a:rPr lang="en-US" sz="1100" dirty="0">
                 <a:solidFill>
                   <a:srgbClr val="5B6B73"/>
                 </a:solidFill>
@@ -4272,7 +4385,7 @@
               </a:rPr>
               <a:t>용도지역</a:t>
             </a:r>
-            <a:endParaRPr lang="en-US" sz="1200" dirty="0"/>
+            <a:endParaRPr lang="en-US" sz="1100" dirty="0"/>
           </a:p>
         </p:txBody>
       </p:sp>
@@ -4284,8 +4397,8 @@
         </p:nvSpPr>
         <p:spPr>
           <a:xfrm>
-            <a:off x="2423160" y="2633472"/>
-            <a:ext cx="4937760" cy="329184"/>
+            <a:off x="2423160" y="2468880"/>
+            <a:ext cx="4937760" cy="274320"/>
           </a:xfrm>
           <a:prstGeom prst="rect">
             <a:avLst/>
@@ -4304,7 +4417,7 @@
               <a:buNone/>
             </a:pPr>
             <a:r>
-              <a:rPr lang="en-US" sz="1200" b="1" dirty="0">
+              <a:rPr lang="en-US" sz="1100" b="1" dirty="0">
                 <a:solidFill>
                   <a:srgbClr val="132A3A"/>
                 </a:solidFill>
@@ -4314,7 +4427,7 @@
               </a:rPr>
               <a:t>제3종일반주거지역</a:t>
             </a:r>
-            <a:endParaRPr lang="en-US" sz="1200" dirty="0"/>
+            <a:endParaRPr lang="en-US" sz="1100" dirty="0"/>
           </a:p>
         </p:txBody>
       </p:sp>
@@ -4326,7 +4439,7 @@
         </p:nvSpPr>
         <p:spPr>
           <a:xfrm>
-            <a:off x="502920" y="2962656"/>
+            <a:off x="502920" y="2743200"/>
             <a:ext cx="6858000" cy="0"/>
           </a:xfrm>
           <a:prstGeom prst="line">
@@ -4349,8 +4462,8 @@
         </p:nvSpPr>
         <p:spPr>
           <a:xfrm>
-            <a:off x="502920" y="2962656"/>
-            <a:ext cx="1920240" cy="329184"/>
+            <a:off x="502920" y="2743200"/>
+            <a:ext cx="1920240" cy="274320"/>
           </a:xfrm>
           <a:prstGeom prst="rect">
             <a:avLst/>
@@ -4369,7 +4482,7 @@
               <a:buNone/>
             </a:pPr>
             <a:r>
-              <a:rPr lang="en-US" sz="1200" dirty="0">
+              <a:rPr lang="en-US" sz="1100" dirty="0">
                 <a:solidFill>
                   <a:srgbClr val="5B6B73"/>
                 </a:solidFill>
@@ -4379,7 +4492,7 @@
               </a:rPr>
               <a:t>규모</a:t>
             </a:r>
-            <a:endParaRPr lang="en-US" sz="1200" dirty="0"/>
+            <a:endParaRPr lang="en-US" sz="1100" dirty="0"/>
           </a:p>
         </p:txBody>
       </p:sp>
@@ -4391,8 +4504,8 @@
         </p:nvSpPr>
         <p:spPr>
           <a:xfrm>
-            <a:off x="2423160" y="2962656"/>
-            <a:ext cx="4937760" cy="329184"/>
+            <a:off x="2423160" y="2743200"/>
+            <a:ext cx="4937760" cy="274320"/>
           </a:xfrm>
           <a:prstGeom prst="rect">
             <a:avLst/>
@@ -4411,7 +4524,7 @@
               <a:buNone/>
             </a:pPr>
             <a:r>
-              <a:rPr lang="en-US" sz="1200" b="1" dirty="0">
+              <a:rPr lang="en-US" sz="1100" b="1" dirty="0">
                 <a:solidFill>
                   <a:srgbClr val="132A3A"/>
                 </a:solidFill>
@@ -4421,7 +4534,7 @@
               </a:rPr>
               <a:t>지하 2층 ~ 지상 6층</a:t>
             </a:r>
-            <a:endParaRPr lang="en-US" sz="1200" dirty="0"/>
+            <a:endParaRPr lang="en-US" sz="1100" dirty="0"/>
           </a:p>
         </p:txBody>
       </p:sp>
@@ -4433,7 +4546,7 @@
         </p:nvSpPr>
         <p:spPr>
           <a:xfrm>
-            <a:off x="502920" y="3291840"/>
+            <a:off x="502920" y="3017520"/>
             <a:ext cx="6858000" cy="0"/>
           </a:xfrm>
           <a:prstGeom prst="line">
@@ -4456,8 +4569,8 @@
         </p:nvSpPr>
         <p:spPr>
           <a:xfrm>
-            <a:off x="502920" y="3291840"/>
-            <a:ext cx="1920240" cy="329184"/>
+            <a:off x="502920" y="3017520"/>
+            <a:ext cx="1920240" cy="274320"/>
           </a:xfrm>
           <a:prstGeom prst="rect">
             <a:avLst/>
@@ -4476,7 +4589,7 @@
               <a:buNone/>
             </a:pPr>
             <a:r>
-              <a:rPr lang="en-US" sz="1200" dirty="0">
+              <a:rPr lang="en-US" sz="1100" dirty="0">
                 <a:solidFill>
                   <a:srgbClr val="5B6B73"/>
                 </a:solidFill>
@@ -4486,7 +4599,7 @@
               </a:rPr>
               <a:t>준공연도</a:t>
             </a:r>
-            <a:endParaRPr lang="en-US" sz="1200" dirty="0"/>
+            <a:endParaRPr lang="en-US" sz="1100" dirty="0"/>
           </a:p>
         </p:txBody>
       </p:sp>
@@ -4498,8 +4611,8 @@
         </p:nvSpPr>
         <p:spPr>
           <a:xfrm>
-            <a:off x="2423160" y="3291840"/>
-            <a:ext cx="4937760" cy="329184"/>
+            <a:off x="2423160" y="3017520"/>
+            <a:ext cx="4937760" cy="274320"/>
           </a:xfrm>
           <a:prstGeom prst="rect">
             <a:avLst/>
@@ -4518,7 +4631,7 @@
               <a:buNone/>
             </a:pPr>
             <a:r>
-              <a:rPr lang="en-US" sz="1200" b="1" dirty="0">
+              <a:rPr lang="en-US" sz="1100" b="1" dirty="0">
                 <a:solidFill>
                   <a:srgbClr val="132A3A"/>
                 </a:solidFill>
@@ -4528,13 +4641,227 @@
               </a:rPr>
               <a:t>1998년</a:t>
             </a:r>
-            <a:endParaRPr lang="en-US" sz="1200" dirty="0"/>
+            <a:endParaRPr lang="en-US" sz="1100" dirty="0"/>
           </a:p>
         </p:txBody>
       </p:sp>
       <p:sp>
         <p:nvSpPr>
           <p:cNvPr id="24" name="Shape 22"/>
+          <p:cNvSpPr/>
+          <p:nvPr/>
+        </p:nvSpPr>
+        <p:spPr>
+          <a:xfrm>
+            <a:off x="502920" y="3291840"/>
+            <a:ext cx="6858000" cy="0"/>
+          </a:xfrm>
+          <a:prstGeom prst="line">
+            <a:avLst/>
+          </a:prstGeom>
+          <a:noFill/>
+          <a:ln w="3810">
+            <a:solidFill>
+              <a:srgbClr val="CBD5E0"/>
+            </a:solidFill>
+            <a:prstDash val="solid"/>
+          </a:ln>
+        </p:spPr>
+      </p:sp>
+      <p:sp>
+        <p:nvSpPr>
+          <p:cNvPr id="25" name="Text 23"/>
+          <p:cNvSpPr/>
+          <p:nvPr/>
+        </p:nvSpPr>
+        <p:spPr>
+          <a:xfrm>
+            <a:off x="502920" y="3291840"/>
+            <a:ext cx="1920240" cy="274320"/>
+          </a:xfrm>
+          <a:prstGeom prst="rect">
+            <a:avLst/>
+          </a:prstGeom>
+          <a:noFill/>
+          <a:ln/>
+        </p:spPr>
+        <p:txBody>
+          <a:bodyPr wrap="square" lIns="0" tIns="0" rIns="0" bIns="0" rtlCol="0" anchor="ctr"/>
+          <a:lstStyle/>
+          <a:p>
+            <a:pPr indent="0" marL="0">
+              <a:lnSpc>
+                <a:spcPct val="115000"/>
+              </a:lnSpc>
+              <a:buNone/>
+            </a:pPr>
+            <a:r>
+              <a:rPr lang="en-US" sz="1100" dirty="0">
+                <a:solidFill>
+                  <a:srgbClr val="5B6B73"/>
+                </a:solidFill>
+                <a:latin typeface="맑은 고딕" pitchFamily="34" charset="0"/>
+                <a:ea typeface="맑은 고딕" pitchFamily="34" charset="-122"/>
+                <a:cs typeface="맑은 고딕" pitchFamily="34" charset="-120"/>
+              </a:rPr>
+              <a:t>주차대수</a:t>
+            </a:r>
+            <a:endParaRPr lang="en-US" sz="1100" dirty="0"/>
+          </a:p>
+        </p:txBody>
+      </p:sp>
+      <p:sp>
+        <p:nvSpPr>
+          <p:cNvPr id="26" name="Text 24"/>
+          <p:cNvSpPr/>
+          <p:nvPr/>
+        </p:nvSpPr>
+        <p:spPr>
+          <a:xfrm>
+            <a:off x="2423160" y="3291840"/>
+            <a:ext cx="4937760" cy="274320"/>
+          </a:xfrm>
+          <a:prstGeom prst="rect">
+            <a:avLst/>
+          </a:prstGeom>
+          <a:noFill/>
+          <a:ln/>
+        </p:spPr>
+        <p:txBody>
+          <a:bodyPr wrap="square" lIns="0" tIns="0" rIns="0" bIns="0" rtlCol="0" anchor="ctr"/>
+          <a:lstStyle/>
+          <a:p>
+            <a:pPr indent="0" marL="0">
+              <a:lnSpc>
+                <a:spcPct val="115000"/>
+              </a:lnSpc>
+              <a:buNone/>
+            </a:pPr>
+            <a:r>
+              <a:rPr lang="en-US" sz="1100" b="1" dirty="0">
+                <a:solidFill>
+                  <a:srgbClr val="132A3A"/>
+                </a:solidFill>
+                <a:latin typeface="맑은 고딕" pitchFamily="34" charset="0"/>
+                <a:ea typeface="맑은 고딕" pitchFamily="34" charset="-122"/>
+                <a:cs typeface="맑은 고딕" pitchFamily="34" charset="-120"/>
+              </a:rPr>
+              <a:t>자주식 5대 / 기계식 21대 (총 26대)</a:t>
+            </a:r>
+            <a:endParaRPr lang="en-US" sz="1100" dirty="0"/>
+          </a:p>
+        </p:txBody>
+      </p:sp>
+      <p:sp>
+        <p:nvSpPr>
+          <p:cNvPr id="27" name="Shape 25"/>
+          <p:cNvSpPr/>
+          <p:nvPr/>
+        </p:nvSpPr>
+        <p:spPr>
+          <a:xfrm>
+            <a:off x="502920" y="3566160"/>
+            <a:ext cx="6858000" cy="0"/>
+          </a:xfrm>
+          <a:prstGeom prst="line">
+            <a:avLst/>
+          </a:prstGeom>
+          <a:noFill/>
+          <a:ln w="3810">
+            <a:solidFill>
+              <a:srgbClr val="CBD5E0"/>
+            </a:solidFill>
+            <a:prstDash val="solid"/>
+          </a:ln>
+        </p:spPr>
+      </p:sp>
+      <p:sp>
+        <p:nvSpPr>
+          <p:cNvPr id="28" name="Text 26"/>
+          <p:cNvSpPr/>
+          <p:nvPr/>
+        </p:nvSpPr>
+        <p:spPr>
+          <a:xfrm>
+            <a:off x="502920" y="3566160"/>
+            <a:ext cx="1920240" cy="274320"/>
+          </a:xfrm>
+          <a:prstGeom prst="rect">
+            <a:avLst/>
+          </a:prstGeom>
+          <a:noFill/>
+          <a:ln/>
+        </p:spPr>
+        <p:txBody>
+          <a:bodyPr wrap="square" lIns="0" tIns="0" rIns="0" bIns="0" rtlCol="0" anchor="ctr"/>
+          <a:lstStyle/>
+          <a:p>
+            <a:pPr indent="0" marL="0">
+              <a:lnSpc>
+                <a:spcPct val="115000"/>
+              </a:lnSpc>
+              <a:buNone/>
+            </a:pPr>
+            <a:r>
+              <a:rPr lang="en-US" sz="1100" dirty="0">
+                <a:solidFill>
+                  <a:srgbClr val="5B6B73"/>
+                </a:solidFill>
+                <a:latin typeface="맑은 고딕" pitchFamily="34" charset="0"/>
+                <a:ea typeface="맑은 고딕" pitchFamily="34" charset="-122"/>
+                <a:cs typeface="맑은 고딕" pitchFamily="34" charset="-120"/>
+              </a:rPr>
+              <a:t>승강기</a:t>
+            </a:r>
+            <a:endParaRPr lang="en-US" sz="1100" dirty="0"/>
+          </a:p>
+        </p:txBody>
+      </p:sp>
+      <p:sp>
+        <p:nvSpPr>
+          <p:cNvPr id="29" name="Text 27"/>
+          <p:cNvSpPr/>
+          <p:nvPr/>
+        </p:nvSpPr>
+        <p:spPr>
+          <a:xfrm>
+            <a:off x="2423160" y="3566160"/>
+            <a:ext cx="4937760" cy="274320"/>
+          </a:xfrm>
+          <a:prstGeom prst="rect">
+            <a:avLst/>
+          </a:prstGeom>
+          <a:noFill/>
+          <a:ln/>
+        </p:spPr>
+        <p:txBody>
+          <a:bodyPr wrap="square" lIns="0" tIns="0" rIns="0" bIns="0" rtlCol="0" anchor="ctr"/>
+          <a:lstStyle/>
+          <a:p>
+            <a:pPr indent="0" marL="0">
+              <a:lnSpc>
+                <a:spcPct val="115000"/>
+              </a:lnSpc>
+              <a:buNone/>
+            </a:pPr>
+            <a:r>
+              <a:rPr lang="en-US" sz="1100" b="1" dirty="0">
+                <a:solidFill>
+                  <a:srgbClr val="132A3A"/>
+                </a:solidFill>
+                <a:latin typeface="맑은 고딕" pitchFamily="34" charset="0"/>
+                <a:ea typeface="맑은 고딕" pitchFamily="34" charset="-122"/>
+                <a:cs typeface="맑은 고딕" pitchFamily="34" charset="-120"/>
+              </a:rPr>
+              <a:t>1대</a:t>
+            </a:r>
+            <a:endParaRPr lang="en-US" sz="1100" dirty="0"/>
+          </a:p>
+        </p:txBody>
+      </p:sp>
+      <p:sp>
+        <p:nvSpPr>
+          <p:cNvPr id="30" name="Shape 28"/>
           <p:cNvSpPr/>
           <p:nvPr/>
         </p:nvSpPr>
@@ -4559,7 +4886,7 @@
       </p:sp>
       <p:sp>
         <p:nvSpPr>
-          <p:cNvPr id="25" name="Text 23"/>
+          <p:cNvPr id="31" name="Text 29"/>
           <p:cNvSpPr/>
           <p:nvPr/>
         </p:nvSpPr>
@@ -4598,7 +4925,7 @@
       </p:sp>
       <p:sp>
         <p:nvSpPr>
-          <p:cNvPr id="26" name="Text 24"/>
+          <p:cNvPr id="32" name="Text 30"/>
           <p:cNvSpPr/>
           <p:nvPr/>
         </p:nvSpPr>
@@ -4637,7 +4964,7 @@
       </p:sp>
       <p:sp>
         <p:nvSpPr>
-          <p:cNvPr id="27" name="Shape 25"/>
+          <p:cNvPr id="33" name="Shape 31"/>
           <p:cNvSpPr/>
           <p:nvPr/>
         </p:nvSpPr>
@@ -4660,7 +4987,7 @@
       </p:sp>
       <p:sp>
         <p:nvSpPr>
-          <p:cNvPr id="28" name="Text 26"/>
+          <p:cNvPr id="34" name="Text 32"/>
           <p:cNvSpPr/>
           <p:nvPr/>
         </p:nvSpPr>
@@ -4699,7 +5026,7 @@
       </p:sp>
       <p:sp>
         <p:nvSpPr>
-          <p:cNvPr id="29" name="Text 27"/>
+          <p:cNvPr id="35" name="Text 33"/>
           <p:cNvSpPr/>
           <p:nvPr/>
         </p:nvSpPr>
@@ -4738,7 +5065,7 @@
       </p:sp>
       <p:sp>
         <p:nvSpPr>
-          <p:cNvPr id="30" name="Shape 28"/>
+          <p:cNvPr id="36" name="Shape 34"/>
           <p:cNvSpPr/>
           <p:nvPr/>
         </p:nvSpPr>
@@ -4761,7 +5088,7 @@
       </p:sp>
       <p:pic>
         <p:nvPicPr>
-          <p:cNvPr id="31" name="Image 0" descr="preencoded.png">    </p:cNvPr>
+          <p:cNvPr id="37" name="Image 0" descr="preencoded.png">    </p:cNvPr>
           <p:cNvPicPr>
             <a:picLocks noChangeAspect="1"/>
           </p:cNvPicPr>
@@ -4784,7 +5111,7 @@
       </p:pic>
       <p:sp>
         <p:nvSpPr>
-          <p:cNvPr id="32" name="Shape 29"/>
+          <p:cNvPr id="38" name="Shape 35"/>
           <p:cNvSpPr/>
           <p:nvPr/>
         </p:nvSpPr>
@@ -4806,7 +5133,7 @@
       </p:sp>
       <p:sp>
         <p:nvSpPr>
-          <p:cNvPr id="33" name="Shape 30"/>
+          <p:cNvPr id="39" name="Shape 36"/>
           <p:cNvSpPr/>
           <p:nvPr/>
         </p:nvSpPr>
@@ -4826,7 +5153,7 @@
       </p:sp>
       <p:sp>
         <p:nvSpPr>
-          <p:cNvPr id="34" name="Text 31"/>
+          <p:cNvPr id="40" name="Text 37"/>
           <p:cNvSpPr/>
           <p:nvPr/>
         </p:nvSpPr>
@@ -4865,7 +5192,7 @@
       </p:sp>
       <p:sp>
         <p:nvSpPr>
-          <p:cNvPr id="35" name="Text 32"/>
+          <p:cNvPr id="41" name="Text 38"/>
           <p:cNvSpPr/>
           <p:nvPr/>
         </p:nvSpPr>
@@ -4956,7 +5283,7 @@
       </p:sp>
       <p:sp>
         <p:nvSpPr>
-          <p:cNvPr id="36" name="Text 33"/>
+          <p:cNvPr id="42" name="Text 39"/>
           <p:cNvSpPr/>
           <p:nvPr/>
         </p:nvSpPr>
@@ -4995,7 +5322,7 @@
       </p:sp>
       <p:sp>
         <p:nvSpPr>
-          <p:cNvPr id="37" name="Text 34"/>
+          <p:cNvPr id="43" name="Text 40"/>
           <p:cNvSpPr/>
           <p:nvPr/>
         </p:nvSpPr>
@@ -5300,7 +5627,7 @@
                 <a:ea typeface="맑은 고딕" pitchFamily="34" charset="-122"/>
                 <a:cs typeface="맑은 고딕" pitchFamily="34" charset="-120"/>
               </a:rPr>
-              <a:t>대중교통</a:t>
+              <a:t>소재지</a:t>
             </a:r>
             <a:endParaRPr lang="en-US" sz="1300" dirty="0"/>
           </a:p>
@@ -5342,7 +5669,7 @@
                 <a:ea typeface="맑은 고딕" pitchFamily="34" charset="-122"/>
                 <a:cs typeface="맑은 고딕" pitchFamily="34" charset="-120"/>
               </a:rPr>
-              <a:t>인접 지하철역 역세권 (상세 확인 필요)</a:t>
+              <a:t>서울특별시 강남구 신사동 590</a:t>
             </a:r>
             <a:endParaRPr lang="en-US" sz="1300" dirty="0"/>
           </a:p>
@@ -5407,7 +5734,7 @@
                 <a:ea typeface="맑은 고딕" pitchFamily="34" charset="-122"/>
                 <a:cs typeface="맑은 고딕" pitchFamily="34" charset="-120"/>
               </a:rPr>
-              <a:t>상권권역</a:t>
+              <a:t>대중교통</a:t>
             </a:r>
             <a:endParaRPr lang="en-US" sz="1300" dirty="0"/>
           </a:p>
@@ -5449,7 +5776,7 @@
                 <a:ea typeface="맑은 고딕" pitchFamily="34" charset="-122"/>
                 <a:cs typeface="맑은 고딕" pitchFamily="34" charset="-120"/>
               </a:rPr>
-              <a:t>760억 주요 상업·업무 권역</a:t>
+              <a:t>압구정역 도보 5분 (약 450m)</a:t>
             </a:r>
             <a:endParaRPr lang="en-US" sz="1300" dirty="0"/>
           </a:p>
@@ -5463,12 +5790,333 @@
         </p:nvSpPr>
         <p:spPr>
           <a:xfrm>
-            <a:off x="5989320" y="2926080"/>
-            <a:ext cx="5571439" cy="658368"/>
+            <a:off x="5989320" y="2788920"/>
+            <a:ext cx="5571439" cy="0"/>
+          </a:xfrm>
+          <a:prstGeom prst="line">
+            <a:avLst/>
+          </a:prstGeom>
+          <a:noFill/>
+          <a:ln w="3810">
+            <a:solidFill>
+              <a:srgbClr val="CBD5E0"/>
+            </a:solidFill>
+            <a:prstDash val="solid"/>
+          </a:ln>
+        </p:spPr>
+      </p:sp>
+      <p:sp>
+        <p:nvSpPr>
+          <p:cNvPr id="14" name="Text 11"/>
+          <p:cNvSpPr/>
+          <p:nvPr/>
+        </p:nvSpPr>
+        <p:spPr>
+          <a:xfrm>
+            <a:off x="5989320" y="2788920"/>
+            <a:ext cx="1560003" cy="493776"/>
+          </a:xfrm>
+          <a:prstGeom prst="rect">
+            <a:avLst/>
+          </a:prstGeom>
+          <a:noFill/>
+          <a:ln/>
+        </p:spPr>
+        <p:txBody>
+          <a:bodyPr wrap="square" lIns="0" tIns="0" rIns="0" bIns="0" rtlCol="0" anchor="ctr"/>
+          <a:lstStyle/>
+          <a:p>
+            <a:pPr indent="0" marL="0">
+              <a:lnSpc>
+                <a:spcPct val="115000"/>
+              </a:lnSpc>
+              <a:buNone/>
+            </a:pPr>
+            <a:r>
+              <a:rPr lang="en-US" sz="1300" dirty="0">
+                <a:solidFill>
+                  <a:srgbClr val="5B6B73"/>
+                </a:solidFill>
+                <a:latin typeface="맑은 고딕" pitchFamily="34" charset="0"/>
+                <a:ea typeface="맑은 고딕" pitchFamily="34" charset="-122"/>
+                <a:cs typeface="맑은 고딕" pitchFamily="34" charset="-120"/>
+              </a:rPr>
+              <a:t>도로접면</a:t>
+            </a:r>
+            <a:endParaRPr lang="en-US" sz="1300" dirty="0"/>
+          </a:p>
+        </p:txBody>
+      </p:sp>
+      <p:sp>
+        <p:nvSpPr>
+          <p:cNvPr id="15" name="Text 12"/>
+          <p:cNvSpPr/>
+          <p:nvPr/>
+        </p:nvSpPr>
+        <p:spPr>
+          <a:xfrm>
+            <a:off x="7549323" y="2788920"/>
+            <a:ext cx="4011436" cy="493776"/>
+          </a:xfrm>
+          <a:prstGeom prst="rect">
+            <a:avLst/>
+          </a:prstGeom>
+          <a:noFill/>
+          <a:ln/>
+        </p:spPr>
+        <p:txBody>
+          <a:bodyPr wrap="square" lIns="0" tIns="0" rIns="0" bIns="0" rtlCol="0" anchor="ctr"/>
+          <a:lstStyle/>
+          <a:p>
+            <a:pPr indent="0" marL="0">
+              <a:lnSpc>
+                <a:spcPct val="115000"/>
+              </a:lnSpc>
+              <a:buNone/>
+            </a:pPr>
+            <a:r>
+              <a:rPr lang="en-US" sz="1300" b="1" dirty="0">
+                <a:solidFill>
+                  <a:srgbClr val="132A3A"/>
+                </a:solidFill>
+                <a:latin typeface="맑은 고딕" pitchFamily="34" charset="0"/>
+                <a:ea typeface="맑은 고딕" pitchFamily="34" charset="-122"/>
+                <a:cs typeface="맑은 고딕" pitchFamily="34" charset="-120"/>
+              </a:rPr>
+              <a:t>논현로 이면 코너 (북측 8m, 동측 6m)</a:t>
+            </a:r>
+            <a:endParaRPr lang="en-US" sz="1300" dirty="0"/>
+          </a:p>
+        </p:txBody>
+      </p:sp>
+      <p:sp>
+        <p:nvSpPr>
+          <p:cNvPr id="16" name="Shape 13"/>
+          <p:cNvSpPr/>
+          <p:nvPr/>
+        </p:nvSpPr>
+        <p:spPr>
+          <a:xfrm>
+            <a:off x="5989320" y="3282696"/>
+            <a:ext cx="5571439" cy="0"/>
+          </a:xfrm>
+          <a:prstGeom prst="line">
+            <a:avLst/>
+          </a:prstGeom>
+          <a:noFill/>
+          <a:ln w="3810">
+            <a:solidFill>
+              <a:srgbClr val="CBD5E0"/>
+            </a:solidFill>
+            <a:prstDash val="solid"/>
+          </a:ln>
+        </p:spPr>
+      </p:sp>
+      <p:sp>
+        <p:nvSpPr>
+          <p:cNvPr id="17" name="Text 14"/>
+          <p:cNvSpPr/>
+          <p:nvPr/>
+        </p:nvSpPr>
+        <p:spPr>
+          <a:xfrm>
+            <a:off x="5989320" y="3282696"/>
+            <a:ext cx="1560003" cy="493776"/>
+          </a:xfrm>
+          <a:prstGeom prst="rect">
+            <a:avLst/>
+          </a:prstGeom>
+          <a:noFill/>
+          <a:ln/>
+        </p:spPr>
+        <p:txBody>
+          <a:bodyPr wrap="square" lIns="0" tIns="0" rIns="0" bIns="0" rtlCol="0" anchor="ctr"/>
+          <a:lstStyle/>
+          <a:p>
+            <a:pPr indent="0" marL="0">
+              <a:lnSpc>
+                <a:spcPct val="115000"/>
+              </a:lnSpc>
+              <a:buNone/>
+            </a:pPr>
+            <a:r>
+              <a:rPr lang="en-US" sz="1300" dirty="0">
+                <a:solidFill>
+                  <a:srgbClr val="5B6B73"/>
+                </a:solidFill>
+                <a:latin typeface="맑은 고딕" pitchFamily="34" charset="0"/>
+                <a:ea typeface="맑은 고딕" pitchFamily="34" charset="-122"/>
+                <a:cs typeface="맑은 고딕" pitchFamily="34" charset="-120"/>
+              </a:rPr>
+              <a:t>상권권역</a:t>
+            </a:r>
+            <a:endParaRPr lang="en-US" sz="1300" dirty="0"/>
+          </a:p>
+        </p:txBody>
+      </p:sp>
+      <p:sp>
+        <p:nvSpPr>
+          <p:cNvPr id="18" name="Text 15"/>
+          <p:cNvSpPr/>
+          <p:nvPr/>
+        </p:nvSpPr>
+        <p:spPr>
+          <a:xfrm>
+            <a:off x="7549323" y="3282696"/>
+            <a:ext cx="4011436" cy="493776"/>
+          </a:xfrm>
+          <a:prstGeom prst="rect">
+            <a:avLst/>
+          </a:prstGeom>
+          <a:noFill/>
+          <a:ln/>
+        </p:spPr>
+        <p:txBody>
+          <a:bodyPr wrap="square" lIns="0" tIns="0" rIns="0" bIns="0" rtlCol="0" anchor="ctr"/>
+          <a:lstStyle/>
+          <a:p>
+            <a:pPr indent="0" marL="0">
+              <a:lnSpc>
+                <a:spcPct val="115000"/>
+              </a:lnSpc>
+              <a:buNone/>
+            </a:pPr>
+            <a:r>
+              <a:rPr lang="en-US" sz="1300" b="1" dirty="0">
+                <a:solidFill>
+                  <a:srgbClr val="132A3A"/>
+                </a:solidFill>
+                <a:latin typeface="맑은 고딕" pitchFamily="34" charset="0"/>
+                <a:ea typeface="맑은 고딕" pitchFamily="34" charset="-122"/>
+                <a:cs typeface="맑은 고딕" pitchFamily="34" charset="-120"/>
+              </a:rPr>
+              <a:t>GBD 주요 상업·업무 권역</a:t>
+            </a:r>
+            <a:endParaRPr lang="en-US" sz="1300" dirty="0"/>
+          </a:p>
+        </p:txBody>
+      </p:sp>
+      <p:sp>
+        <p:nvSpPr>
+          <p:cNvPr id="19" name="Shape 16"/>
+          <p:cNvSpPr/>
+          <p:nvPr/>
+        </p:nvSpPr>
+        <p:spPr>
+          <a:xfrm>
+            <a:off x="5989320" y="3776472"/>
+            <a:ext cx="5571439" cy="0"/>
+          </a:xfrm>
+          <a:prstGeom prst="line">
+            <a:avLst/>
+          </a:prstGeom>
+          <a:noFill/>
+          <a:ln w="3810">
+            <a:solidFill>
+              <a:srgbClr val="CBD5E0"/>
+            </a:solidFill>
+            <a:prstDash val="solid"/>
+          </a:ln>
+        </p:spPr>
+      </p:sp>
+      <p:sp>
+        <p:nvSpPr>
+          <p:cNvPr id="20" name="Text 17"/>
+          <p:cNvSpPr/>
+          <p:nvPr/>
+        </p:nvSpPr>
+        <p:spPr>
+          <a:xfrm>
+            <a:off x="5989320" y="3776472"/>
+            <a:ext cx="1560003" cy="493776"/>
+          </a:xfrm>
+          <a:prstGeom prst="rect">
+            <a:avLst/>
+          </a:prstGeom>
+          <a:noFill/>
+          <a:ln/>
+        </p:spPr>
+        <p:txBody>
+          <a:bodyPr wrap="square" lIns="0" tIns="0" rIns="0" bIns="0" rtlCol="0" anchor="ctr"/>
+          <a:lstStyle/>
+          <a:p>
+            <a:pPr indent="0" marL="0">
+              <a:lnSpc>
+                <a:spcPct val="115000"/>
+              </a:lnSpc>
+              <a:buNone/>
+            </a:pPr>
+            <a:r>
+              <a:rPr lang="en-US" sz="1300" dirty="0">
+                <a:solidFill>
+                  <a:srgbClr val="5B6B73"/>
+                </a:solidFill>
+                <a:latin typeface="맑은 고딕" pitchFamily="34" charset="0"/>
+                <a:ea typeface="맑은 고딕" pitchFamily="34" charset="-122"/>
+                <a:cs typeface="맑은 고딕" pitchFamily="34" charset="-120"/>
+              </a:rPr>
+              <a:t>주요시설</a:t>
+            </a:r>
+            <a:endParaRPr lang="en-US" sz="1300" dirty="0"/>
+          </a:p>
+        </p:txBody>
+      </p:sp>
+      <p:sp>
+        <p:nvSpPr>
+          <p:cNvPr id="21" name="Text 18"/>
+          <p:cNvSpPr/>
+          <p:nvPr/>
+        </p:nvSpPr>
+        <p:spPr>
+          <a:xfrm>
+            <a:off x="7549323" y="3776472"/>
+            <a:ext cx="4011436" cy="493776"/>
+          </a:xfrm>
+          <a:prstGeom prst="rect">
+            <a:avLst/>
+          </a:prstGeom>
+          <a:noFill/>
+          <a:ln/>
+        </p:spPr>
+        <p:txBody>
+          <a:bodyPr wrap="square" lIns="0" tIns="0" rIns="0" bIns="0" rtlCol="0" anchor="ctr"/>
+          <a:lstStyle/>
+          <a:p>
+            <a:pPr indent="0" marL="0">
+              <a:lnSpc>
+                <a:spcPct val="115000"/>
+              </a:lnSpc>
+              <a:buNone/>
+            </a:pPr>
+            <a:r>
+              <a:rPr lang="en-US" sz="1300" b="1" dirty="0">
+                <a:solidFill>
+                  <a:srgbClr val="132A3A"/>
+                </a:solidFill>
+                <a:latin typeface="맑은 고딕" pitchFamily="34" charset="0"/>
+                <a:ea typeface="맑은 고딕" pitchFamily="34" charset="-122"/>
+                <a:cs typeface="맑은 고딕" pitchFamily="34" charset="-120"/>
+              </a:rPr>
+              <a:t>강남을지병원사거리 도보 3분 (약 200m)</a:t>
+            </a:r>
+            <a:endParaRPr lang="en-US" sz="1300" dirty="0"/>
+          </a:p>
+        </p:txBody>
+      </p:sp>
+      <p:sp>
+        <p:nvSpPr>
+          <p:cNvPr id="22" name="Shape 19"/>
+          <p:cNvSpPr/>
+          <p:nvPr/>
+        </p:nvSpPr>
+        <p:spPr>
+          <a:xfrm>
+            <a:off x="5989320" y="4407408"/>
+            <a:ext cx="5571439" cy="1316736"/>
           </a:xfrm>
           <a:prstGeom prst="roundRect">
             <a:avLst>
-              <a:gd name="adj" fmla="val 8333"/>
+              <a:gd name="adj" fmla="val 4167"/>
             </a:avLst>
           </a:prstGeom>
           <a:solidFill>
@@ -5479,14 +6127,14 @@
       </p:sp>
       <p:sp>
         <p:nvSpPr>
-          <p:cNvPr id="14" name="Shape 11"/>
-          <p:cNvSpPr/>
-          <p:nvPr/>
-        </p:nvSpPr>
-        <p:spPr>
-          <a:xfrm>
-            <a:off x="5989320" y="2980944"/>
-            <a:ext cx="36576" cy="548640"/>
+          <p:cNvPr id="23" name="Shape 20"/>
+          <p:cNvSpPr/>
+          <p:nvPr/>
+        </p:nvSpPr>
+        <p:spPr>
+          <a:xfrm>
+            <a:off x="5989320" y="4462272"/>
+            <a:ext cx="36576" cy="1207008"/>
           </a:xfrm>
           <a:prstGeom prst="rect">
             <a:avLst/>
@@ -5499,13 +6147,13 @@
       </p:sp>
       <p:sp>
         <p:nvSpPr>
-          <p:cNvPr id="15" name="Text 12"/>
-          <p:cNvSpPr/>
-          <p:nvPr/>
-        </p:nvSpPr>
-        <p:spPr>
-          <a:xfrm>
-            <a:off x="6135624" y="3017520"/>
+          <p:cNvPr id="24" name="Text 21"/>
+          <p:cNvSpPr/>
+          <p:nvPr/>
+        </p:nvSpPr>
+        <p:spPr>
+          <a:xfrm>
+            <a:off x="6135624" y="4498848"/>
             <a:ext cx="5315407" cy="201168"/>
           </a:xfrm>
           <a:prstGeom prst="rect">
@@ -5538,14 +6186,14 @@
       </p:sp>
       <p:sp>
         <p:nvSpPr>
-          <p:cNvPr id="16" name="Text 13"/>
-          <p:cNvSpPr/>
-          <p:nvPr/>
-        </p:nvSpPr>
-        <p:spPr>
-          <a:xfrm>
-            <a:off x="6135624" y="3218688"/>
-            <a:ext cx="5315407" cy="329184"/>
+          <p:cNvPr id="25" name="Text 22"/>
+          <p:cNvSpPr/>
+          <p:nvPr/>
+        </p:nvSpPr>
+        <p:spPr>
+          <a:xfrm>
+            <a:off x="6135624" y="4700016"/>
+            <a:ext cx="5315407" cy="987552"/>
           </a:xfrm>
           <a:prstGeom prst="rect">
             <a:avLst/>
@@ -5573,15 +6221,63 @@
                 <a:ea typeface="맑은 고딕" pitchFamily="34" charset="-122"/>
                 <a:cs typeface="맑은 고딕" pitchFamily="34" charset="-120"/>
               </a:rPr>
-              <a:t>760억 배후 상권 기반 안정적 임대 수요</a:t>
+              <a:t>압구정역 도보 역세권으로 양호한 대중교통 접근성</a:t>
             </a:r>
             <a:endParaRPr lang="en-US" sz="980" dirty="0"/>
           </a:p>
-        </p:txBody>
-      </p:sp>
-      <p:sp>
-        <p:nvSpPr>
-          <p:cNvPr id="17" name="Text 14"/>
+          <a:p>
+            <a:pPr marL="342900" indent="-342900">
+              <a:lnSpc>
+                <a:spcPct val="108000"/>
+              </a:lnSpc>
+              <a:spcBef>
+                <a:spcPts val="300"/>
+              </a:spcBef>
+              <a:buSzPct val="100000"/>
+              <a:buChar char="•"/>
+            </a:pPr>
+            <a:r>
+              <a:rPr lang="en-US" sz="980" dirty="0">
+                <a:solidFill>
+                  <a:srgbClr val="2B2B2B"/>
+                </a:solidFill>
+                <a:latin typeface="맑은 고딕" pitchFamily="34" charset="0"/>
+                <a:ea typeface="맑은 고딕" pitchFamily="34" charset="-122"/>
+                <a:cs typeface="맑은 고딕" pitchFamily="34" charset="-120"/>
+              </a:rPr>
+              <a:t>논현로 이면 코너 (북측 8m, 동측 6m) 접면 차량 진출입 양호</a:t>
+            </a:r>
+            <a:endParaRPr lang="en-US" sz="980" dirty="0"/>
+          </a:p>
+          <a:p>
+            <a:pPr marL="342900" indent="-342900">
+              <a:lnSpc>
+                <a:spcPct val="108000"/>
+              </a:lnSpc>
+              <a:spcBef>
+                <a:spcPts val="300"/>
+              </a:spcBef>
+              <a:buSzPct val="100000"/>
+              <a:buChar char="•"/>
+            </a:pPr>
+            <a:r>
+              <a:rPr lang="en-US" sz="980" dirty="0">
+                <a:solidFill>
+                  <a:srgbClr val="2B2B2B"/>
+                </a:solidFill>
+                <a:latin typeface="맑은 고딕" pitchFamily="34" charset="0"/>
+                <a:ea typeface="맑은 고딕" pitchFamily="34" charset="-122"/>
+                <a:cs typeface="맑은 고딕" pitchFamily="34" charset="-120"/>
+              </a:rPr>
+              <a:t>GBD 배후 상권 기반 안정적 임대 수요</a:t>
+            </a:r>
+            <a:endParaRPr lang="en-US" sz="980" dirty="0"/>
+          </a:p>
+        </p:txBody>
+      </p:sp>
+      <p:sp>
+        <p:nvSpPr>
+          <p:cNvPr id="26" name="Text 23"/>
           <p:cNvSpPr/>
           <p:nvPr/>
         </p:nvSpPr>
@@ -5620,7 +6316,7 @@
       </p:sp>
       <p:sp>
         <p:nvSpPr>
-          <p:cNvPr id="18" name="Text 15"/>
+          <p:cNvPr id="27" name="Text 24"/>
           <p:cNvSpPr/>
           <p:nvPr/>
         </p:nvSpPr>
@@ -5859,7 +6555,7 @@
                 <a:ea typeface="맑은 고딕" pitchFamily="34" charset="-122"/>
                 <a:cs typeface="맑은 고딕" pitchFamily="34" charset="-120"/>
               </a:rPr>
-              <a:t>토지 현황</a:t>
+              <a:t>토지이용계획 · 규제 분석</a:t>
             </a:r>
             <a:endParaRPr lang="en-US" sz="1100" dirty="0"/>
           </a:p>
@@ -5874,7 +6570,7 @@
         <p:spPr>
           <a:xfrm>
             <a:off x="502920" y="1645920"/>
-            <a:ext cx="1920240" cy="402336"/>
+            <a:ext cx="1920240" cy="329184"/>
           </a:xfrm>
           <a:prstGeom prst="rect">
             <a:avLst/>
@@ -5893,7 +6589,7 @@
               <a:buNone/>
             </a:pPr>
             <a:r>
-              <a:rPr lang="en-US" sz="1350" dirty="0">
+              <a:rPr lang="en-US" sz="1200" dirty="0">
                 <a:solidFill>
                   <a:srgbClr val="5B6B73"/>
                 </a:solidFill>
@@ -5903,7 +6599,7 @@
               </a:rPr>
               <a:t>대지면적</a:t>
             </a:r>
-            <a:endParaRPr lang="en-US" sz="1350" dirty="0"/>
+            <a:endParaRPr lang="en-US" sz="1200" dirty="0"/>
           </a:p>
         </p:txBody>
       </p:sp>
@@ -5916,7 +6612,7 @@
         <p:spPr>
           <a:xfrm>
             <a:off x="2423160" y="1645920"/>
-            <a:ext cx="4937760" cy="402336"/>
+            <a:ext cx="4937760" cy="329184"/>
           </a:xfrm>
           <a:prstGeom prst="rect">
             <a:avLst/>
@@ -5935,7 +6631,7 @@
               <a:buNone/>
             </a:pPr>
             <a:r>
-              <a:rPr lang="en-US" sz="1350" b="1" dirty="0">
+              <a:rPr lang="en-US" sz="1200" b="1" dirty="0">
                 <a:solidFill>
                   <a:srgbClr val="132A3A"/>
                 </a:solidFill>
@@ -5945,7 +6641,7 @@
               </a:rPr>
               <a:t>1,061.9㎡ (321.2평)</a:t>
             </a:r>
-            <a:endParaRPr lang="en-US" sz="1350" dirty="0"/>
+            <a:endParaRPr lang="en-US" sz="1200" dirty="0"/>
           </a:p>
         </p:txBody>
       </p:sp>
@@ -5957,7 +6653,7 @@
         </p:nvSpPr>
         <p:spPr>
           <a:xfrm>
-            <a:off x="502920" y="2048256"/>
+            <a:off x="502920" y="1975104"/>
             <a:ext cx="6858000" cy="0"/>
           </a:xfrm>
           <a:prstGeom prst="line">
@@ -5980,8 +6676,8 @@
         </p:nvSpPr>
         <p:spPr>
           <a:xfrm>
-            <a:off x="502920" y="2048256"/>
-            <a:ext cx="1920240" cy="402336"/>
+            <a:off x="502920" y="1975104"/>
+            <a:ext cx="1920240" cy="329184"/>
           </a:xfrm>
           <a:prstGeom prst="rect">
             <a:avLst/>
@@ -6000,7 +6696,7 @@
               <a:buNone/>
             </a:pPr>
             <a:r>
-              <a:rPr lang="en-US" sz="1350" dirty="0">
+              <a:rPr lang="en-US" sz="1200" dirty="0">
                 <a:solidFill>
                   <a:srgbClr val="5B6B73"/>
                 </a:solidFill>
@@ -6008,9 +6704,9 @@
                 <a:ea typeface="맑은 고딕" pitchFamily="34" charset="-122"/>
                 <a:cs typeface="맑은 고딕" pitchFamily="34" charset="-120"/>
               </a:rPr>
-              <a:t>연면적</a:t>
-            </a:r>
-            <a:endParaRPr lang="en-US" sz="1350" dirty="0"/>
+              <a:t>용도지역</a:t>
+            </a:r>
+            <a:endParaRPr lang="en-US" sz="1200" dirty="0"/>
           </a:p>
         </p:txBody>
       </p:sp>
@@ -6022,8 +6718,8 @@
         </p:nvSpPr>
         <p:spPr>
           <a:xfrm>
-            <a:off x="2423160" y="2048256"/>
-            <a:ext cx="4937760" cy="402336"/>
+            <a:off x="2423160" y="1975104"/>
+            <a:ext cx="4937760" cy="329184"/>
           </a:xfrm>
           <a:prstGeom prst="rect">
             <a:avLst/>
@@ -6042,7 +6738,7 @@
               <a:buNone/>
             </a:pPr>
             <a:r>
-              <a:rPr lang="en-US" sz="1350" b="1" dirty="0">
+              <a:rPr lang="en-US" sz="1200" b="1" dirty="0">
                 <a:solidFill>
                   <a:srgbClr val="132A3A"/>
                 </a:solidFill>
@@ -6050,9 +6746,9 @@
                 <a:ea typeface="맑은 고딕" pitchFamily="34" charset="-122"/>
                 <a:cs typeface="맑은 고딕" pitchFamily="34" charset="-120"/>
               </a:rPr>
-              <a:t>3,341.8㎡ (1,010.9평)</a:t>
-            </a:r>
-            <a:endParaRPr lang="en-US" sz="1350" dirty="0"/>
+              <a:t>제3종일반주거지역</a:t>
+            </a:r>
+            <a:endParaRPr lang="en-US" sz="1200" dirty="0"/>
           </a:p>
         </p:txBody>
       </p:sp>
@@ -6064,7 +6760,7 @@
         </p:nvSpPr>
         <p:spPr>
           <a:xfrm>
-            <a:off x="502920" y="2450592"/>
+            <a:off x="502920" y="2304288"/>
             <a:ext cx="6858000" cy="0"/>
           </a:xfrm>
           <a:prstGeom prst="line">
@@ -6087,8 +6783,8 @@
         </p:nvSpPr>
         <p:spPr>
           <a:xfrm>
-            <a:off x="502920" y="2450592"/>
-            <a:ext cx="1920240" cy="402336"/>
+            <a:off x="502920" y="2304288"/>
+            <a:ext cx="1920240" cy="329184"/>
           </a:xfrm>
           <a:prstGeom prst="rect">
             <a:avLst/>
@@ -6107,7 +6803,7 @@
               <a:buNone/>
             </a:pPr>
             <a:r>
-              <a:rPr lang="en-US" sz="1350" dirty="0">
+              <a:rPr lang="en-US" sz="1200" dirty="0">
                 <a:solidFill>
                   <a:srgbClr val="5B6B73"/>
                 </a:solidFill>
@@ -6115,9 +6811,9 @@
                 <a:ea typeface="맑은 고딕" pitchFamily="34" charset="-122"/>
                 <a:cs typeface="맑은 고딕" pitchFamily="34" charset="-120"/>
               </a:rPr>
-              <a:t>용도지역</a:t>
-            </a:r>
-            <a:endParaRPr lang="en-US" sz="1350" dirty="0"/>
+              <a:t>건폐율</a:t>
+            </a:r>
+            <a:endParaRPr lang="en-US" sz="1200" dirty="0"/>
           </a:p>
         </p:txBody>
       </p:sp>
@@ -6129,8 +6825,8 @@
         </p:nvSpPr>
         <p:spPr>
           <a:xfrm>
-            <a:off x="2423160" y="2450592"/>
-            <a:ext cx="4937760" cy="402336"/>
+            <a:off x="2423160" y="2304288"/>
+            <a:ext cx="4937760" cy="329184"/>
           </a:xfrm>
           <a:prstGeom prst="rect">
             <a:avLst/>
@@ -6149,7 +6845,7 @@
               <a:buNone/>
             </a:pPr>
             <a:r>
-              <a:rPr lang="en-US" sz="1350" b="1" dirty="0">
+              <a:rPr lang="en-US" sz="1200" b="1" dirty="0">
                 <a:solidFill>
                   <a:srgbClr val="132A3A"/>
                 </a:solidFill>
@@ -6157,15 +6853,443 @@
                 <a:ea typeface="맑은 고딕" pitchFamily="34" charset="-122"/>
                 <a:cs typeface="맑은 고딕" pitchFamily="34" charset="-120"/>
               </a:rPr>
-              <a:t>제3종일반주거지역</a:t>
-            </a:r>
-            <a:endParaRPr lang="en-US" sz="1350" dirty="0"/>
+              <a:t>현행 51.3% (법정 상한 50%)</a:t>
+            </a:r>
+            <a:endParaRPr lang="en-US" sz="1200" dirty="0"/>
           </a:p>
         </p:txBody>
       </p:sp>
       <p:sp>
         <p:nvSpPr>
           <p:cNvPr id="15" name="Shape 13"/>
+          <p:cNvSpPr/>
+          <p:nvPr/>
+        </p:nvSpPr>
+        <p:spPr>
+          <a:xfrm>
+            <a:off x="502920" y="2633472"/>
+            <a:ext cx="6858000" cy="0"/>
+          </a:xfrm>
+          <a:prstGeom prst="line">
+            <a:avLst/>
+          </a:prstGeom>
+          <a:noFill/>
+          <a:ln w="3810">
+            <a:solidFill>
+              <a:srgbClr val="CBD5E0"/>
+            </a:solidFill>
+            <a:prstDash val="solid"/>
+          </a:ln>
+        </p:spPr>
+      </p:sp>
+      <p:sp>
+        <p:nvSpPr>
+          <p:cNvPr id="16" name="Text 14"/>
+          <p:cNvSpPr/>
+          <p:nvPr/>
+        </p:nvSpPr>
+        <p:spPr>
+          <a:xfrm>
+            <a:off x="502920" y="2633472"/>
+            <a:ext cx="1920240" cy="329184"/>
+          </a:xfrm>
+          <a:prstGeom prst="rect">
+            <a:avLst/>
+          </a:prstGeom>
+          <a:noFill/>
+          <a:ln/>
+        </p:spPr>
+        <p:txBody>
+          <a:bodyPr wrap="square" lIns="0" tIns="0" rIns="0" bIns="0" rtlCol="0" anchor="ctr"/>
+          <a:lstStyle/>
+          <a:p>
+            <a:pPr indent="0" marL="0">
+              <a:lnSpc>
+                <a:spcPct val="115000"/>
+              </a:lnSpc>
+              <a:buNone/>
+            </a:pPr>
+            <a:r>
+              <a:rPr lang="en-US" sz="1200" dirty="0">
+                <a:solidFill>
+                  <a:srgbClr val="5B6B73"/>
+                </a:solidFill>
+                <a:latin typeface="맑은 고딕" pitchFamily="34" charset="0"/>
+                <a:ea typeface="맑은 고딕" pitchFamily="34" charset="-122"/>
+                <a:cs typeface="맑은 고딕" pitchFamily="34" charset="-120"/>
+              </a:rPr>
+              <a:t>용적률</a:t>
+            </a:r>
+            <a:endParaRPr lang="en-US" sz="1200" dirty="0"/>
+          </a:p>
+        </p:txBody>
+      </p:sp>
+      <p:sp>
+        <p:nvSpPr>
+          <p:cNvPr id="17" name="Text 15"/>
+          <p:cNvSpPr/>
+          <p:nvPr/>
+        </p:nvSpPr>
+        <p:spPr>
+          <a:xfrm>
+            <a:off x="2423160" y="2633472"/>
+            <a:ext cx="4937760" cy="329184"/>
+          </a:xfrm>
+          <a:prstGeom prst="rect">
+            <a:avLst/>
+          </a:prstGeom>
+          <a:noFill/>
+          <a:ln/>
+        </p:spPr>
+        <p:txBody>
+          <a:bodyPr wrap="square" lIns="0" tIns="0" rIns="0" bIns="0" rtlCol="0" anchor="ctr"/>
+          <a:lstStyle/>
+          <a:p>
+            <a:pPr indent="0" marL="0">
+              <a:lnSpc>
+                <a:spcPct val="115000"/>
+              </a:lnSpc>
+              <a:buNone/>
+            </a:pPr>
+            <a:r>
+              <a:rPr lang="en-US" sz="1200" b="1" dirty="0">
+                <a:solidFill>
+                  <a:srgbClr val="132A3A"/>
+                </a:solidFill>
+                <a:latin typeface="맑은 고딕" pitchFamily="34" charset="0"/>
+                <a:ea typeface="맑은 고딕" pitchFamily="34" charset="-122"/>
+                <a:cs typeface="맑은 고딕" pitchFamily="34" charset="-120"/>
+              </a:rPr>
+              <a:t>현행 237.2% (법정 상한 250%)</a:t>
+            </a:r>
+            <a:endParaRPr lang="en-US" sz="1200" dirty="0"/>
+          </a:p>
+        </p:txBody>
+      </p:sp>
+      <p:sp>
+        <p:nvSpPr>
+          <p:cNvPr id="18" name="Shape 16"/>
+          <p:cNvSpPr/>
+          <p:nvPr/>
+        </p:nvSpPr>
+        <p:spPr>
+          <a:xfrm>
+            <a:off x="502920" y="2962656"/>
+            <a:ext cx="6858000" cy="0"/>
+          </a:xfrm>
+          <a:prstGeom prst="line">
+            <a:avLst/>
+          </a:prstGeom>
+          <a:noFill/>
+          <a:ln w="3810">
+            <a:solidFill>
+              <a:srgbClr val="CBD5E0"/>
+            </a:solidFill>
+            <a:prstDash val="solid"/>
+          </a:ln>
+        </p:spPr>
+      </p:sp>
+      <p:sp>
+        <p:nvSpPr>
+          <p:cNvPr id="19" name="Text 17"/>
+          <p:cNvSpPr/>
+          <p:nvPr/>
+        </p:nvSpPr>
+        <p:spPr>
+          <a:xfrm>
+            <a:off x="502920" y="2962656"/>
+            <a:ext cx="1920240" cy="329184"/>
+          </a:xfrm>
+          <a:prstGeom prst="rect">
+            <a:avLst/>
+          </a:prstGeom>
+          <a:noFill/>
+          <a:ln/>
+        </p:spPr>
+        <p:txBody>
+          <a:bodyPr wrap="square" lIns="0" tIns="0" rIns="0" bIns="0" rtlCol="0" anchor="ctr"/>
+          <a:lstStyle/>
+          <a:p>
+            <a:pPr indent="0" marL="0">
+              <a:lnSpc>
+                <a:spcPct val="115000"/>
+              </a:lnSpc>
+              <a:buNone/>
+            </a:pPr>
+            <a:r>
+              <a:rPr lang="en-US" sz="1200" dirty="0">
+                <a:solidFill>
+                  <a:srgbClr val="5B6B73"/>
+                </a:solidFill>
+                <a:latin typeface="맑은 고딕" pitchFamily="34" charset="0"/>
+                <a:ea typeface="맑은 고딕" pitchFamily="34" charset="-122"/>
+                <a:cs typeface="맑은 고딕" pitchFamily="34" charset="-120"/>
+              </a:rPr>
+              <a:t>도로접면</a:t>
+            </a:r>
+            <a:endParaRPr lang="en-US" sz="1200" dirty="0"/>
+          </a:p>
+        </p:txBody>
+      </p:sp>
+      <p:sp>
+        <p:nvSpPr>
+          <p:cNvPr id="20" name="Text 18"/>
+          <p:cNvSpPr/>
+          <p:nvPr/>
+        </p:nvSpPr>
+        <p:spPr>
+          <a:xfrm>
+            <a:off x="2423160" y="2962656"/>
+            <a:ext cx="4937760" cy="329184"/>
+          </a:xfrm>
+          <a:prstGeom prst="rect">
+            <a:avLst/>
+          </a:prstGeom>
+          <a:noFill/>
+          <a:ln/>
+        </p:spPr>
+        <p:txBody>
+          <a:bodyPr wrap="square" lIns="0" tIns="0" rIns="0" bIns="0" rtlCol="0" anchor="ctr"/>
+          <a:lstStyle/>
+          <a:p>
+            <a:pPr indent="0" marL="0">
+              <a:lnSpc>
+                <a:spcPct val="115000"/>
+              </a:lnSpc>
+              <a:buNone/>
+            </a:pPr>
+            <a:r>
+              <a:rPr lang="en-US" sz="1200" b="1" dirty="0">
+                <a:solidFill>
+                  <a:srgbClr val="132A3A"/>
+                </a:solidFill>
+                <a:latin typeface="맑은 고딕" pitchFamily="34" charset="0"/>
+                <a:ea typeface="맑은 고딕" pitchFamily="34" charset="-122"/>
+                <a:cs typeface="맑은 고딕" pitchFamily="34" charset="-120"/>
+              </a:rPr>
+              <a:t>논현로 이면 코너 (북측 8m, 동측 6m)</a:t>
+            </a:r>
+            <a:endParaRPr lang="en-US" sz="1200" dirty="0"/>
+          </a:p>
+        </p:txBody>
+      </p:sp>
+      <p:sp>
+        <p:nvSpPr>
+          <p:cNvPr id="21" name="Shape 19"/>
+          <p:cNvSpPr/>
+          <p:nvPr/>
+        </p:nvSpPr>
+        <p:spPr>
+          <a:xfrm>
+            <a:off x="502920" y="3291840"/>
+            <a:ext cx="6858000" cy="0"/>
+          </a:xfrm>
+          <a:prstGeom prst="line">
+            <a:avLst/>
+          </a:prstGeom>
+          <a:noFill/>
+          <a:ln w="3810">
+            <a:solidFill>
+              <a:srgbClr val="CBD5E0"/>
+            </a:solidFill>
+            <a:prstDash val="solid"/>
+          </a:ln>
+        </p:spPr>
+      </p:sp>
+      <p:sp>
+        <p:nvSpPr>
+          <p:cNvPr id="22" name="Text 20"/>
+          <p:cNvSpPr/>
+          <p:nvPr/>
+        </p:nvSpPr>
+        <p:spPr>
+          <a:xfrm>
+            <a:off x="502920" y="3291840"/>
+            <a:ext cx="1920240" cy="329184"/>
+          </a:xfrm>
+          <a:prstGeom prst="rect">
+            <a:avLst/>
+          </a:prstGeom>
+          <a:noFill/>
+          <a:ln/>
+        </p:spPr>
+        <p:txBody>
+          <a:bodyPr wrap="square" lIns="0" tIns="0" rIns="0" bIns="0" rtlCol="0" anchor="ctr"/>
+          <a:lstStyle/>
+          <a:p>
+            <a:pPr indent="0" marL="0">
+              <a:lnSpc>
+                <a:spcPct val="115000"/>
+              </a:lnSpc>
+              <a:buNone/>
+            </a:pPr>
+            <a:r>
+              <a:rPr lang="en-US" sz="1200" dirty="0">
+                <a:solidFill>
+                  <a:srgbClr val="5B6B73"/>
+                </a:solidFill>
+                <a:latin typeface="맑은 고딕" pitchFamily="34" charset="0"/>
+                <a:ea typeface="맑은 고딕" pitchFamily="34" charset="-122"/>
+                <a:cs typeface="맑은 고딕" pitchFamily="34" charset="-120"/>
+              </a:rPr>
+              <a:t>지목</a:t>
+            </a:r>
+            <a:endParaRPr lang="en-US" sz="1200" dirty="0"/>
+          </a:p>
+        </p:txBody>
+      </p:sp>
+      <p:sp>
+        <p:nvSpPr>
+          <p:cNvPr id="23" name="Text 21"/>
+          <p:cNvSpPr/>
+          <p:nvPr/>
+        </p:nvSpPr>
+        <p:spPr>
+          <a:xfrm>
+            <a:off x="2423160" y="3291840"/>
+            <a:ext cx="4937760" cy="329184"/>
+          </a:xfrm>
+          <a:prstGeom prst="rect">
+            <a:avLst/>
+          </a:prstGeom>
+          <a:noFill/>
+          <a:ln/>
+        </p:spPr>
+        <p:txBody>
+          <a:bodyPr wrap="square" lIns="0" tIns="0" rIns="0" bIns="0" rtlCol="0" anchor="ctr"/>
+          <a:lstStyle/>
+          <a:p>
+            <a:pPr indent="0" marL="0">
+              <a:lnSpc>
+                <a:spcPct val="115000"/>
+              </a:lnSpc>
+              <a:buNone/>
+            </a:pPr>
+            <a:r>
+              <a:rPr lang="en-US" sz="1200" b="1" dirty="0">
+                <a:solidFill>
+                  <a:srgbClr val="132A3A"/>
+                </a:solidFill>
+                <a:latin typeface="맑은 고딕" pitchFamily="34" charset="0"/>
+                <a:ea typeface="맑은 고딕" pitchFamily="34" charset="-122"/>
+                <a:cs typeface="맑은 고딕" pitchFamily="34" charset="-120"/>
+              </a:rPr>
+              <a:t>대</a:t>
+            </a:r>
+            <a:endParaRPr lang="en-US" sz="1200" dirty="0"/>
+          </a:p>
+        </p:txBody>
+      </p:sp>
+      <p:sp>
+        <p:nvSpPr>
+          <p:cNvPr id="24" name="Shape 22"/>
+          <p:cNvSpPr/>
+          <p:nvPr/>
+        </p:nvSpPr>
+        <p:spPr>
+          <a:xfrm>
+            <a:off x="502920" y="3621024"/>
+            <a:ext cx="6858000" cy="0"/>
+          </a:xfrm>
+          <a:prstGeom prst="line">
+            <a:avLst/>
+          </a:prstGeom>
+          <a:noFill/>
+          <a:ln w="3810">
+            <a:solidFill>
+              <a:srgbClr val="CBD5E0"/>
+            </a:solidFill>
+            <a:prstDash val="solid"/>
+          </a:ln>
+        </p:spPr>
+      </p:sp>
+      <p:sp>
+        <p:nvSpPr>
+          <p:cNvPr id="25" name="Text 23"/>
+          <p:cNvSpPr/>
+          <p:nvPr/>
+        </p:nvSpPr>
+        <p:spPr>
+          <a:xfrm>
+            <a:off x="502920" y="3621024"/>
+            <a:ext cx="1920240" cy="329184"/>
+          </a:xfrm>
+          <a:prstGeom prst="rect">
+            <a:avLst/>
+          </a:prstGeom>
+          <a:noFill/>
+          <a:ln/>
+        </p:spPr>
+        <p:txBody>
+          <a:bodyPr wrap="square" lIns="0" tIns="0" rIns="0" bIns="0" rtlCol="0" anchor="ctr"/>
+          <a:lstStyle/>
+          <a:p>
+            <a:pPr indent="0" marL="0">
+              <a:lnSpc>
+                <a:spcPct val="115000"/>
+              </a:lnSpc>
+              <a:buNone/>
+            </a:pPr>
+            <a:r>
+              <a:rPr lang="en-US" sz="1200" dirty="0">
+                <a:solidFill>
+                  <a:srgbClr val="5B6B73"/>
+                </a:solidFill>
+                <a:latin typeface="맑은 고딕" pitchFamily="34" charset="0"/>
+                <a:ea typeface="맑은 고딕" pitchFamily="34" charset="-122"/>
+                <a:cs typeface="맑은 고딕" pitchFamily="34" charset="-120"/>
+              </a:rPr>
+              <a:t>토지평당가</a:t>
+            </a:r>
+            <a:endParaRPr lang="en-US" sz="1200" dirty="0"/>
+          </a:p>
+        </p:txBody>
+      </p:sp>
+      <p:sp>
+        <p:nvSpPr>
+          <p:cNvPr id="26" name="Text 24"/>
+          <p:cNvSpPr/>
+          <p:nvPr/>
+        </p:nvSpPr>
+        <p:spPr>
+          <a:xfrm>
+            <a:off x="2423160" y="3621024"/>
+            <a:ext cx="4937760" cy="329184"/>
+          </a:xfrm>
+          <a:prstGeom prst="rect">
+            <a:avLst/>
+          </a:prstGeom>
+          <a:noFill/>
+          <a:ln/>
+        </p:spPr>
+        <p:txBody>
+          <a:bodyPr wrap="square" lIns="0" tIns="0" rIns="0" bIns="0" rtlCol="0" anchor="ctr"/>
+          <a:lstStyle/>
+          <a:p>
+            <a:pPr indent="0" marL="0">
+              <a:lnSpc>
+                <a:spcPct val="115000"/>
+              </a:lnSpc>
+              <a:buNone/>
+            </a:pPr>
+            <a:r>
+              <a:rPr lang="en-US" sz="1200" b="1" dirty="0">
+                <a:solidFill>
+                  <a:srgbClr val="132A3A"/>
+                </a:solidFill>
+                <a:latin typeface="맑은 고딕" pitchFamily="34" charset="0"/>
+                <a:ea typeface="맑은 고딕" pitchFamily="34" charset="-122"/>
+                <a:cs typeface="맑은 고딕" pitchFamily="34" charset="-120"/>
+              </a:rPr>
+              <a:t>약 23,659만 원/평</a:t>
+            </a:r>
+            <a:endParaRPr lang="en-US" sz="1200" dirty="0"/>
+          </a:p>
+        </p:txBody>
+      </p:sp>
+      <p:sp>
+        <p:nvSpPr>
+          <p:cNvPr id="27" name="Shape 25"/>
           <p:cNvSpPr/>
           <p:nvPr/>
         </p:nvSpPr>
@@ -6186,20 +7310,43 @@
           </a:ln>
         </p:spPr>
       </p:sp>
-      <p:sp>
-        <p:nvSpPr>
-          <p:cNvPr id="16" name="Shape 14"/>
-          <p:cNvSpPr/>
-          <p:nvPr/>
-        </p:nvSpPr>
+      <p:pic>
+        <p:nvPicPr>
+          <p:cNvPr id="28" name="Image 0" descr="preencoded.png">    </p:cNvPr>
+          <p:cNvPicPr>
+            <a:picLocks noChangeAspect="1"/>
+          </p:cNvPicPr>
+          <p:nvPr/>
+        </p:nvPicPr>
+        <p:blipFill>
+          <a:blip r:embed="rId1"/>
+          <a:srcRect l="0" r="0" t="0" b="0"/>
+          <a:stretch/>
+        </p:blipFill>
         <p:spPr>
           <a:xfrm>
             <a:off x="7720279" y="1645920"/>
-            <a:ext cx="3840480" cy="2103120"/>
+            <a:ext cx="3840480" cy="2926080"/>
+          </a:xfrm>
+          <a:prstGeom prst="rect">
+            <a:avLst/>
+          </a:prstGeom>
+        </p:spPr>
+      </p:pic>
+      <p:sp>
+        <p:nvSpPr>
+          <p:cNvPr id="29" name="Shape 26"/>
+          <p:cNvSpPr/>
+          <p:nvPr/>
+        </p:nvSpPr>
+        <p:spPr>
+          <a:xfrm>
+            <a:off x="7720279" y="4681728"/>
+            <a:ext cx="3840480" cy="1508760"/>
           </a:xfrm>
           <a:prstGeom prst="roundRect">
             <a:avLst>
-              <a:gd name="adj" fmla="val 2609"/>
+              <a:gd name="adj" fmla="val 3636"/>
             </a:avLst>
           </a:prstGeom>
           <a:solidFill>
@@ -6210,14 +7357,14 @@
       </p:sp>
       <p:sp>
         <p:nvSpPr>
-          <p:cNvPr id="17" name="Shape 15"/>
-          <p:cNvSpPr/>
-          <p:nvPr/>
-        </p:nvSpPr>
-        <p:spPr>
-          <a:xfrm>
-            <a:off x="7720279" y="1700784"/>
-            <a:ext cx="36576" cy="1993392"/>
+          <p:cNvPr id="30" name="Shape 27"/>
+          <p:cNvSpPr/>
+          <p:nvPr/>
+        </p:nvSpPr>
+        <p:spPr>
+          <a:xfrm>
+            <a:off x="7720279" y="4736592"/>
+            <a:ext cx="36576" cy="1399032"/>
           </a:xfrm>
           <a:prstGeom prst="rect">
             <a:avLst/>
@@ -6230,13 +7377,13 @@
       </p:sp>
       <p:sp>
         <p:nvSpPr>
-          <p:cNvPr id="18" name="Text 16"/>
-          <p:cNvSpPr/>
-          <p:nvPr/>
-        </p:nvSpPr>
-        <p:spPr>
-          <a:xfrm>
-            <a:off x="7866583" y="1737360"/>
+          <p:cNvPr id="31" name="Text 28"/>
+          <p:cNvSpPr/>
+          <p:nvPr/>
+        </p:nvSpPr>
+        <p:spPr>
+          <a:xfrm>
+            <a:off x="7866583" y="4773168"/>
             <a:ext cx="3584448" cy="201168"/>
           </a:xfrm>
           <a:prstGeom prst="rect">
@@ -6261,7 +7408,7 @@
                 <a:ea typeface="맑은 고딕" pitchFamily="34" charset="-122"/>
                 <a:cs typeface="맑은 고딕" pitchFamily="34" charset="-120"/>
               </a:rPr>
-              <a:t>토지 및 건축 규제 포인트</a:t>
+              <a:t>자산 하이라이트</a:t>
             </a:r>
             <a:endParaRPr lang="en-US" sz="1050" dirty="0"/>
           </a:p>
@@ -6269,14 +7416,14 @@
       </p:sp>
       <p:sp>
         <p:nvSpPr>
-          <p:cNvPr id="19" name="Text 17"/>
-          <p:cNvSpPr/>
-          <p:nvPr/>
-        </p:nvSpPr>
-        <p:spPr>
-          <a:xfrm>
-            <a:off x="7866583" y="1938528"/>
-            <a:ext cx="3584448" cy="1773936"/>
+          <p:cNvPr id="32" name="Text 29"/>
+          <p:cNvSpPr/>
+          <p:nvPr/>
+        </p:nvSpPr>
+        <p:spPr>
+          <a:xfrm>
+            <a:off x="7866583" y="4974336"/>
+            <a:ext cx="3584448" cy="1179576"/>
           </a:xfrm>
           <a:prstGeom prst="rect">
             <a:avLst/>
@@ -6304,235 +7451,15 @@
                 <a:ea typeface="맑은 고딕" pitchFamily="34" charset="-122"/>
                 <a:cs typeface="맑은 고딕" pitchFamily="34" charset="-120"/>
               </a:rPr>
-              <a:t>용도지역·용도지구 기준 건폐율/용적률 상한 확인</a:t>
+              <a:t>현 건폐율 51.3%, 용적률 237.2% (법정 상한: 건폐율 50%, 용적률 250%) • 제3종일반주거지역 기준 법정 상한 대비 용적률 상향 및 밸류애드 잠재력 보유 • 논현로 이면 코너 (북측 8m, 동측 6m) 접면으로 보행자 접근성 및 차량 진출입 동선 우수</a:t>
             </a:r>
             <a:endParaRPr lang="en-US" sz="980" dirty="0"/>
           </a:p>
-          <a:p>
-            <a:pPr marL="342900" indent="-342900">
-              <a:lnSpc>
-                <a:spcPct val="108000"/>
-              </a:lnSpc>
-              <a:spcBef>
-                <a:spcPts val="300"/>
-              </a:spcBef>
-              <a:buSzPct val="100000"/>
-              <a:buChar char="•"/>
-            </a:pPr>
-            <a:r>
-              <a:rPr lang="en-US" sz="980" dirty="0">
-                <a:solidFill>
-                  <a:srgbClr val="2B2B2B"/>
-                </a:solidFill>
-                <a:latin typeface="맑은 고딕" pitchFamily="34" charset="0"/>
-                <a:ea typeface="맑은 고딕" pitchFamily="34" charset="-122"/>
-                <a:cs typeface="맑은 고딕" pitchFamily="34" charset="-120"/>
-              </a:rPr>
-              <a:t>필지 형상 및 접도 조건에 따른 건축 가능 면적 검토</a:t>
-            </a:r>
-            <a:endParaRPr lang="en-US" sz="980" dirty="0"/>
-          </a:p>
-          <a:p>
-            <a:pPr marL="342900" indent="-342900">
-              <a:lnSpc>
-                <a:spcPct val="108000"/>
-              </a:lnSpc>
-              <a:spcBef>
-                <a:spcPts val="300"/>
-              </a:spcBef>
-              <a:buSzPct val="100000"/>
-              <a:buChar char="•"/>
-            </a:pPr>
-            <a:r>
-              <a:rPr lang="en-US" sz="980" dirty="0">
-                <a:solidFill>
-                  <a:srgbClr val="2B2B2B"/>
-                </a:solidFill>
-                <a:latin typeface="맑은 고딕" pitchFamily="34" charset="0"/>
-                <a:ea typeface="맑은 고딕" pitchFamily="34" charset="-122"/>
-                <a:cs typeface="맑은 고딕" pitchFamily="34" charset="-120"/>
-              </a:rPr>
-              <a:t>토지이용계획 열람 및 개발행위허가 제한 여부 확인</a:t>
-            </a:r>
-            <a:endParaRPr lang="en-US" sz="980" dirty="0"/>
-          </a:p>
-        </p:txBody>
-      </p:sp>
-      <p:sp>
-        <p:nvSpPr>
-          <p:cNvPr id="20" name="Shape 18"/>
-          <p:cNvSpPr/>
-          <p:nvPr/>
-        </p:nvSpPr>
-        <p:spPr>
-          <a:xfrm>
-            <a:off x="7720279" y="3977640"/>
-            <a:ext cx="3840480" cy="2148840"/>
-          </a:xfrm>
-          <a:prstGeom prst="roundRect">
-            <a:avLst>
-              <a:gd name="adj" fmla="val 2553"/>
-            </a:avLst>
-          </a:prstGeom>
-          <a:solidFill>
-            <a:srgbClr val="E8F4F8"/>
-          </a:solidFill>
-          <a:ln/>
-        </p:spPr>
-      </p:sp>
-      <p:sp>
-        <p:nvSpPr>
-          <p:cNvPr id="21" name="Shape 19"/>
-          <p:cNvSpPr/>
-          <p:nvPr/>
-        </p:nvSpPr>
-        <p:spPr>
-          <a:xfrm>
-            <a:off x="7720279" y="4032504"/>
-            <a:ext cx="36576" cy="2039112"/>
-          </a:xfrm>
-          <a:prstGeom prst="rect">
-            <a:avLst/>
-          </a:prstGeom>
-          <a:solidFill>
-            <a:srgbClr val="2E6E82"/>
-          </a:solidFill>
-          <a:ln/>
-        </p:spPr>
-      </p:sp>
-      <p:sp>
-        <p:nvSpPr>
-          <p:cNvPr id="22" name="Text 20"/>
-          <p:cNvSpPr/>
-          <p:nvPr/>
-        </p:nvSpPr>
-        <p:spPr>
-          <a:xfrm>
-            <a:off x="7866583" y="4069080"/>
-            <a:ext cx="3584448" cy="201168"/>
-          </a:xfrm>
-          <a:prstGeom prst="rect">
-            <a:avLst/>
-          </a:prstGeom>
-          <a:noFill/>
-          <a:ln/>
-        </p:spPr>
-        <p:txBody>
-          <a:bodyPr wrap="square" lIns="0" tIns="0" rIns="0" bIns="0" rtlCol="0" anchor="ctr"/>
-          <a:lstStyle/>
-          <a:p>
-            <a:pPr indent="0" marL="0">
-              <a:buNone/>
-            </a:pPr>
-            <a:r>
-              <a:rPr lang="en-US" sz="1050" b="1" dirty="0">
-                <a:solidFill>
-                  <a:srgbClr val="2E6E82"/>
-                </a:solidFill>
-                <a:latin typeface="맑은 고딕" pitchFamily="34" charset="0"/>
-                <a:ea typeface="맑은 고딕" pitchFamily="34" charset="-122"/>
-                <a:cs typeface="맑은 고딕" pitchFamily="34" charset="-120"/>
-              </a:rPr>
-              <a:t>권리관계 및 공적장부</a:t>
-            </a:r>
-            <a:endParaRPr lang="en-US" sz="1050" dirty="0"/>
-          </a:p>
-        </p:txBody>
-      </p:sp>
-      <p:sp>
-        <p:nvSpPr>
-          <p:cNvPr id="23" name="Text 21"/>
-          <p:cNvSpPr/>
-          <p:nvPr/>
-        </p:nvSpPr>
-        <p:spPr>
-          <a:xfrm>
-            <a:off x="7866583" y="4270248"/>
-            <a:ext cx="3584448" cy="1819656"/>
-          </a:xfrm>
-          <a:prstGeom prst="rect">
-            <a:avLst/>
-          </a:prstGeom>
-          <a:noFill/>
-          <a:ln/>
-        </p:spPr>
-        <p:txBody>
-          <a:bodyPr wrap="square" lIns="0" tIns="0" rIns="0" bIns="0" rtlCol="0" anchor="t"/>
-          <a:lstStyle/>
-          <a:p>
-            <a:pPr marL="342900" indent="-342900">
-              <a:lnSpc>
-                <a:spcPct val="108000"/>
-              </a:lnSpc>
-              <a:buSzPct val="100000"/>
-              <a:buChar char="•"/>
-            </a:pPr>
-            <a:r>
-              <a:rPr lang="en-US" sz="980" dirty="0">
-                <a:solidFill>
-                  <a:srgbClr val="2B2B2B"/>
-                </a:solidFill>
-                <a:latin typeface="맑은 고딕" pitchFamily="34" charset="0"/>
-                <a:ea typeface="맑은 고딕" pitchFamily="34" charset="-122"/>
-                <a:cs typeface="맑은 고딕" pitchFamily="34" charset="-120"/>
-              </a:rPr>
-              <a:t>등기부등본 갑구 소유권 및 을구 근저당·가압류 확인</a:t>
-            </a:r>
-            <a:endParaRPr lang="en-US" sz="980" dirty="0"/>
-          </a:p>
-          <a:p>
-            <a:pPr marL="342900" indent="-342900">
-              <a:lnSpc>
-                <a:spcPct val="108000"/>
-              </a:lnSpc>
-              <a:spcBef>
-                <a:spcPts val="300"/>
-              </a:spcBef>
-              <a:buSzPct val="100000"/>
-              <a:buChar char="•"/>
-            </a:pPr>
-            <a:r>
-              <a:rPr lang="en-US" sz="980" dirty="0">
-                <a:solidFill>
-                  <a:srgbClr val="2B2B2B"/>
-                </a:solidFill>
-                <a:latin typeface="맑은 고딕" pitchFamily="34" charset="0"/>
-                <a:ea typeface="맑은 고딕" pitchFamily="34" charset="-122"/>
-                <a:cs typeface="맑은 고딕" pitchFamily="34" charset="-120"/>
-              </a:rPr>
-              <a:t>건축물대장 기재 사항과 실물 현황 대조 점검</a:t>
-            </a:r>
-            <a:endParaRPr lang="en-US" sz="980" dirty="0"/>
-          </a:p>
-          <a:p>
-            <a:pPr marL="342900" indent="-342900">
-              <a:lnSpc>
-                <a:spcPct val="108000"/>
-              </a:lnSpc>
-              <a:spcBef>
-                <a:spcPts val="300"/>
-              </a:spcBef>
-              <a:buSzPct val="100000"/>
-              <a:buChar char="•"/>
-            </a:pPr>
-            <a:r>
-              <a:rPr lang="en-US" sz="980" dirty="0">
-                <a:solidFill>
-                  <a:srgbClr val="2B2B2B"/>
-                </a:solidFill>
-                <a:latin typeface="맑은 고딕" pitchFamily="34" charset="0"/>
-                <a:ea typeface="맑은 고딕" pitchFamily="34" charset="-122"/>
-                <a:cs typeface="맑은 고딕" pitchFamily="34" charset="-120"/>
-              </a:rPr>
-              <a:t>개별공시지가 및 실거래가 비교 분석</a:t>
-            </a:r>
-            <a:endParaRPr lang="en-US" sz="980" dirty="0"/>
-          </a:p>
-        </p:txBody>
-      </p:sp>
-      <p:sp>
-        <p:nvSpPr>
-          <p:cNvPr id="24" name="Text 22"/>
+        </p:txBody>
+      </p:sp>
+      <p:sp>
+        <p:nvSpPr>
+          <p:cNvPr id="33" name="Text 30"/>
           <p:cNvSpPr/>
           <p:nvPr/>
         </p:nvSpPr>
@@ -6571,7 +7498,7 @@
       </p:sp>
       <p:sp>
         <p:nvSpPr>
-          <p:cNvPr id="25" name="Text 23"/>
+          <p:cNvPr id="34" name="Text 31"/>
           <p:cNvSpPr/>
           <p:nvPr/>
         </p:nvSpPr>
@@ -6732,7 +7659,7 @@
                 <a:ea typeface="Arial" pitchFamily="34" charset="-122"/>
                 <a:cs typeface="Arial" pitchFamily="34" charset="-120"/>
               </a:rPr>
-              <a:t>Gallery</a:t>
+              <a:t>Cadastral</a:t>
             </a:r>
             <a:endParaRPr lang="en-US" sz="950" dirty="0"/>
           </a:p>
@@ -6771,145 +7698,182 @@
                 <a:ea typeface="맑은 고딕" pitchFamily="34" charset="-122"/>
                 <a:cs typeface="맑은 고딕" pitchFamily="34" charset="-120"/>
               </a:rPr>
-              <a:t>현장 사진</a:t>
+              <a:t>지적도</a:t>
             </a:r>
             <a:endParaRPr lang="en-US" sz="2300" dirty="0"/>
           </a:p>
         </p:txBody>
       </p:sp>
-      <p:sp>
-        <p:nvSpPr>
-          <p:cNvPr id="6" name="Shape 4"/>
-          <p:cNvSpPr/>
-          <p:nvPr/>
-        </p:nvSpPr>
-        <p:spPr>
-          <a:xfrm>
-            <a:off x="502920" y="1234440"/>
-            <a:ext cx="3600602" cy="2290572"/>
-          </a:xfrm>
-          <a:prstGeom prst="roundRect">
-            <a:avLst>
-              <a:gd name="adj" fmla="val 2395"/>
-            </a:avLst>
-          </a:prstGeom>
-          <a:solidFill>
-            <a:srgbClr val="F0F0F0"/>
-          </a:solidFill>
-          <a:ln w="6350">
+      <p:pic>
+        <p:nvPicPr>
+          <p:cNvPr id="6" name="Image 0" descr="preencoded.png">    </p:cNvPr>
+          <p:cNvPicPr>
+            <a:picLocks noChangeAspect="1"/>
+          </p:cNvPicPr>
+          <p:nvPr/>
+        </p:nvPicPr>
+        <p:blipFill>
+          <a:blip r:embed="rId1"/>
+          <a:stretch>
+            <a:fillRect/>
+          </a:stretch>
+        </p:blipFill>
+        <p:spPr>
+          <a:xfrm>
+            <a:off x="502920" y="1481328"/>
+            <a:ext cx="5120640" cy="4114800"/>
+          </a:xfrm>
+          <a:prstGeom prst="rect">
+            <a:avLst/>
+          </a:prstGeom>
+        </p:spPr>
+      </p:pic>
+      <p:sp>
+        <p:nvSpPr>
+          <p:cNvPr id="7" name="Text 4"/>
+          <p:cNvSpPr/>
+          <p:nvPr/>
+        </p:nvSpPr>
+        <p:spPr>
+          <a:xfrm>
+            <a:off x="5989320" y="1481328"/>
+            <a:ext cx="5571439" cy="237744"/>
+          </a:xfrm>
+          <a:prstGeom prst="rect">
+            <a:avLst/>
+          </a:prstGeom>
+          <a:noFill/>
+          <a:ln/>
+        </p:spPr>
+        <p:txBody>
+          <a:bodyPr wrap="square" lIns="0" tIns="0" rIns="0" bIns="0" rtlCol="0" anchor="ctr"/>
+          <a:lstStyle/>
+          <a:p>
+            <a:pPr indent="0" marL="0">
+              <a:buNone/>
+            </a:pPr>
+            <a:r>
+              <a:rPr lang="en-US" sz="1100" b="1" dirty="0">
+                <a:solidFill>
+                  <a:srgbClr val="132A3A"/>
+                </a:solidFill>
+                <a:latin typeface="맑은 고딕" pitchFamily="34" charset="0"/>
+                <a:ea typeface="맑은 고딕" pitchFamily="34" charset="-122"/>
+                <a:cs typeface="맑은 고딕" pitchFamily="34" charset="-120"/>
+              </a:rPr>
+              <a:t>연속지적도 (V-World)</a:t>
+            </a:r>
+            <a:endParaRPr lang="en-US" sz="1100" dirty="0"/>
+          </a:p>
+        </p:txBody>
+      </p:sp>
+      <p:sp>
+        <p:nvSpPr>
+          <p:cNvPr id="8" name="Text 5"/>
+          <p:cNvSpPr/>
+          <p:nvPr/>
+        </p:nvSpPr>
+        <p:spPr>
+          <a:xfrm>
+            <a:off x="5989320" y="1801368"/>
+            <a:ext cx="1560003" cy="493776"/>
+          </a:xfrm>
+          <a:prstGeom prst="rect">
+            <a:avLst/>
+          </a:prstGeom>
+          <a:noFill/>
+          <a:ln/>
+        </p:spPr>
+        <p:txBody>
+          <a:bodyPr wrap="square" lIns="0" tIns="0" rIns="0" bIns="0" rtlCol="0" anchor="ctr"/>
+          <a:lstStyle/>
+          <a:p>
+            <a:pPr indent="0" marL="0">
+              <a:lnSpc>
+                <a:spcPct val="115000"/>
+              </a:lnSpc>
+              <a:buNone/>
+            </a:pPr>
+            <a:r>
+              <a:rPr lang="en-US" sz="1300" dirty="0">
+                <a:solidFill>
+                  <a:srgbClr val="5B6B73"/>
+                </a:solidFill>
+                <a:latin typeface="맑은 고딕" pitchFamily="34" charset="0"/>
+                <a:ea typeface="맑은 고딕" pitchFamily="34" charset="-122"/>
+                <a:cs typeface="맑은 고딕" pitchFamily="34" charset="-120"/>
+              </a:rPr>
+              <a:t>대지면적</a:t>
+            </a:r>
+            <a:endParaRPr lang="en-US" sz="1300" dirty="0"/>
+          </a:p>
+        </p:txBody>
+      </p:sp>
+      <p:sp>
+        <p:nvSpPr>
+          <p:cNvPr id="9" name="Text 6"/>
+          <p:cNvSpPr/>
+          <p:nvPr/>
+        </p:nvSpPr>
+        <p:spPr>
+          <a:xfrm>
+            <a:off x="7549323" y="1801368"/>
+            <a:ext cx="4011436" cy="493776"/>
+          </a:xfrm>
+          <a:prstGeom prst="rect">
+            <a:avLst/>
+          </a:prstGeom>
+          <a:noFill/>
+          <a:ln/>
+        </p:spPr>
+        <p:txBody>
+          <a:bodyPr wrap="square" lIns="0" tIns="0" rIns="0" bIns="0" rtlCol="0" anchor="ctr"/>
+          <a:lstStyle/>
+          <a:p>
+            <a:pPr indent="0" marL="0">
+              <a:lnSpc>
+                <a:spcPct val="115000"/>
+              </a:lnSpc>
+              <a:buNone/>
+            </a:pPr>
+            <a:r>
+              <a:rPr lang="en-US" sz="1300" b="1" dirty="0">
+                <a:solidFill>
+                  <a:srgbClr val="132A3A"/>
+                </a:solidFill>
+                <a:latin typeface="맑은 고딕" pitchFamily="34" charset="0"/>
+                <a:ea typeface="맑은 고딕" pitchFamily="34" charset="-122"/>
+                <a:cs typeface="맑은 고딕" pitchFamily="34" charset="-120"/>
+              </a:rPr>
+              <a:t>1,061.9㎡ (321.2평)</a:t>
+            </a:r>
+            <a:endParaRPr lang="en-US" sz="1300" dirty="0"/>
+          </a:p>
+        </p:txBody>
+      </p:sp>
+      <p:sp>
+        <p:nvSpPr>
+          <p:cNvPr id="10" name="Shape 7"/>
+          <p:cNvSpPr/>
+          <p:nvPr/>
+        </p:nvSpPr>
+        <p:spPr>
+          <a:xfrm>
+            <a:off x="5989320" y="2295144"/>
+            <a:ext cx="5571439" cy="0"/>
+          </a:xfrm>
+          <a:prstGeom prst="line">
+            <a:avLst/>
+          </a:prstGeom>
+          <a:noFill/>
+          <a:ln w="3810">
             <a:solidFill>
-              <a:srgbClr val="E0E0E0"/>
+              <a:srgbClr val="CBD5E0"/>
             </a:solidFill>
             <a:prstDash val="solid"/>
           </a:ln>
         </p:spPr>
       </p:sp>
-      <p:pic>
-        <p:nvPicPr>
-          <p:cNvPr id="7" name="Image 0" descr="preencoded.png">    </p:cNvPr>
-          <p:cNvPicPr>
-            <a:picLocks noChangeAspect="1"/>
-          </p:cNvPicPr>
-          <p:nvPr/>
-        </p:nvPicPr>
-        <p:blipFill>
-          <a:blip r:embed="rId1"/>
-          <a:srcRect l="0" r="0" t="0" b="0"/>
-          <a:stretch/>
-        </p:blipFill>
-        <p:spPr>
-          <a:xfrm>
-            <a:off x="502920" y="1234440"/>
-            <a:ext cx="3600602" cy="2290572"/>
-          </a:xfrm>
-          <a:prstGeom prst="rect">
-            <a:avLst/>
-          </a:prstGeom>
-        </p:spPr>
-      </p:pic>
-      <p:sp>
-        <p:nvSpPr>
-          <p:cNvPr id="8" name="Shape 5"/>
-          <p:cNvSpPr/>
-          <p:nvPr/>
-        </p:nvSpPr>
-        <p:spPr>
-          <a:xfrm>
-            <a:off x="576072" y="1307592"/>
-            <a:ext cx="868680" cy="237744"/>
-          </a:xfrm>
-          <a:prstGeom prst="rect">
-            <a:avLst/>
-          </a:prstGeom>
-          <a:solidFill>
-            <a:srgbClr val="10161F">
-              <a:alpha val="80000"/>
-            </a:srgbClr>
-          </a:solidFill>
-          <a:ln/>
-        </p:spPr>
-      </p:sp>
-      <p:sp>
-        <p:nvSpPr>
-          <p:cNvPr id="9" name="Text 6"/>
-          <p:cNvSpPr/>
-          <p:nvPr/>
-        </p:nvSpPr>
-        <p:spPr>
-          <a:xfrm>
-            <a:off x="576072" y="1307592"/>
-            <a:ext cx="868680" cy="237744"/>
-          </a:xfrm>
-          <a:prstGeom prst="rect">
-            <a:avLst/>
-          </a:prstGeom>
-          <a:noFill/>
-          <a:ln/>
-        </p:spPr>
-        <p:txBody>
-          <a:bodyPr wrap="square" lIns="0" tIns="0" rIns="0" bIns="0" rtlCol="0" anchor="ctr"/>
-          <a:lstStyle/>
-          <a:p>
-            <a:pPr algn="ctr" indent="0" marL="0">
-              <a:buNone/>
-            </a:pPr>
-            <a:r>
-              <a:rPr lang="en-US" sz="900" b="1" dirty="0">
-                <a:solidFill>
-                  <a:srgbClr val="FFFFFF"/>
-                </a:solidFill>
-                <a:latin typeface="맑은 고딕" pitchFamily="34" charset="0"/>
-                <a:ea typeface="맑은 고딕" pitchFamily="34" charset="-122"/>
-                <a:cs typeface="맑은 고딕" pitchFamily="34" charset="-120"/>
-              </a:rPr>
-              <a:t>건물 외관</a:t>
-            </a:r>
-            <a:endParaRPr lang="en-US" sz="900" dirty="0"/>
-          </a:p>
-        </p:txBody>
-      </p:sp>
-      <p:sp>
-        <p:nvSpPr>
-          <p:cNvPr id="10" name="Shape 7"/>
-          <p:cNvSpPr/>
-          <p:nvPr/>
-        </p:nvSpPr>
-        <p:spPr>
-          <a:xfrm>
-            <a:off x="502920" y="3232404"/>
-            <a:ext cx="3600602" cy="292608"/>
-          </a:xfrm>
-          <a:prstGeom prst="rect">
-            <a:avLst/>
-          </a:prstGeom>
-          <a:solidFill>
-            <a:srgbClr val="000000">
-              <a:alpha val="60000"/>
-            </a:srgbClr>
-          </a:solidFill>
-          <a:ln/>
-        </p:spPr>
-      </p:sp>
       <p:sp>
         <p:nvSpPr>
           <p:cNvPr id="11" name="Text 8"/>
@@ -6918,728 +7882,341 @@
         </p:nvSpPr>
         <p:spPr>
           <a:xfrm>
-            <a:off x="612648" y="3232404"/>
-            <a:ext cx="3381146" cy="292608"/>
-          </a:xfrm>
-          <a:prstGeom prst="rect">
-            <a:avLst/>
-          </a:prstGeom>
-          <a:noFill/>
-          <a:ln/>
-        </p:spPr>
-        <p:txBody>
-          <a:bodyPr wrap="square" lIns="0" tIns="0" rIns="0" bIns="0" rtlCol="0" anchor="ctr"/>
-          <a:lstStyle/>
-          <a:p>
-            <a:pPr indent="0" marL="0">
-              <a:buNone/>
-            </a:pPr>
-            <a:r>
-              <a:rPr lang="en-US" sz="900" dirty="0">
-                <a:solidFill>
-                  <a:srgbClr val="FFFFFF"/>
-                </a:solidFill>
-                <a:latin typeface="맑은 고딕" pitchFamily="34" charset="0"/>
-                <a:ea typeface="맑은 고딕" pitchFamily="34" charset="-122"/>
-                <a:cs typeface="맑은 고딕" pitchFamily="34" charset="-120"/>
-              </a:rPr>
-              <a:t>신사동 590 ICL 빌딩 전경 및 대로변 코너 입지</a:t>
-            </a:r>
-            <a:endParaRPr lang="en-US" sz="900" dirty="0"/>
-          </a:p>
-        </p:txBody>
-      </p:sp>
-      <p:sp>
-        <p:nvSpPr>
-          <p:cNvPr id="12" name="Shape 9"/>
-          <p:cNvSpPr/>
-          <p:nvPr/>
-        </p:nvSpPr>
-        <p:spPr>
-          <a:xfrm>
-            <a:off x="4231538" y="1234440"/>
-            <a:ext cx="3600602" cy="2290572"/>
-          </a:xfrm>
-          <a:prstGeom prst="roundRect">
-            <a:avLst>
-              <a:gd name="adj" fmla="val 2395"/>
-            </a:avLst>
-          </a:prstGeom>
-          <a:solidFill>
-            <a:srgbClr val="F0F0F0"/>
-          </a:solidFill>
-          <a:ln w="6350">
+            <a:off x="5989320" y="2295144"/>
+            <a:ext cx="1560003" cy="493776"/>
+          </a:xfrm>
+          <a:prstGeom prst="rect">
+            <a:avLst/>
+          </a:prstGeom>
+          <a:noFill/>
+          <a:ln/>
+        </p:spPr>
+        <p:txBody>
+          <a:bodyPr wrap="square" lIns="0" tIns="0" rIns="0" bIns="0" rtlCol="0" anchor="ctr"/>
+          <a:lstStyle/>
+          <a:p>
+            <a:pPr indent="0" marL="0">
+              <a:lnSpc>
+                <a:spcPct val="115000"/>
+              </a:lnSpc>
+              <a:buNone/>
+            </a:pPr>
+            <a:r>
+              <a:rPr lang="en-US" sz="1300" dirty="0">
+                <a:solidFill>
+                  <a:srgbClr val="5B6B73"/>
+                </a:solidFill>
+                <a:latin typeface="맑은 고딕" pitchFamily="34" charset="0"/>
+                <a:ea typeface="맑은 고딕" pitchFamily="34" charset="-122"/>
+                <a:cs typeface="맑은 고딕" pitchFamily="34" charset="-120"/>
+              </a:rPr>
+              <a:t>용도지역</a:t>
+            </a:r>
+            <a:endParaRPr lang="en-US" sz="1300" dirty="0"/>
+          </a:p>
+        </p:txBody>
+      </p:sp>
+      <p:sp>
+        <p:nvSpPr>
+          <p:cNvPr id="12" name="Text 9"/>
+          <p:cNvSpPr/>
+          <p:nvPr/>
+        </p:nvSpPr>
+        <p:spPr>
+          <a:xfrm>
+            <a:off x="7549323" y="2295144"/>
+            <a:ext cx="4011436" cy="493776"/>
+          </a:xfrm>
+          <a:prstGeom prst="rect">
+            <a:avLst/>
+          </a:prstGeom>
+          <a:noFill/>
+          <a:ln/>
+        </p:spPr>
+        <p:txBody>
+          <a:bodyPr wrap="square" lIns="0" tIns="0" rIns="0" bIns="0" rtlCol="0" anchor="ctr"/>
+          <a:lstStyle/>
+          <a:p>
+            <a:pPr indent="0" marL="0">
+              <a:lnSpc>
+                <a:spcPct val="115000"/>
+              </a:lnSpc>
+              <a:buNone/>
+            </a:pPr>
+            <a:r>
+              <a:rPr lang="en-US" sz="1300" b="1" dirty="0">
+                <a:solidFill>
+                  <a:srgbClr val="132A3A"/>
+                </a:solidFill>
+                <a:latin typeface="맑은 고딕" pitchFamily="34" charset="0"/>
+                <a:ea typeface="맑은 고딕" pitchFamily="34" charset="-122"/>
+                <a:cs typeface="맑은 고딕" pitchFamily="34" charset="-120"/>
+              </a:rPr>
+              <a:t>제3종일반주거지역</a:t>
+            </a:r>
+            <a:endParaRPr lang="en-US" sz="1300" dirty="0"/>
+          </a:p>
+        </p:txBody>
+      </p:sp>
+      <p:sp>
+        <p:nvSpPr>
+          <p:cNvPr id="13" name="Shape 10"/>
+          <p:cNvSpPr/>
+          <p:nvPr/>
+        </p:nvSpPr>
+        <p:spPr>
+          <a:xfrm>
+            <a:off x="5989320" y="2788920"/>
+            <a:ext cx="5571439" cy="0"/>
+          </a:xfrm>
+          <a:prstGeom prst="line">
+            <a:avLst/>
+          </a:prstGeom>
+          <a:noFill/>
+          <a:ln w="3810">
             <a:solidFill>
-              <a:srgbClr val="E0E0E0"/>
+              <a:srgbClr val="CBD5E0"/>
             </a:solidFill>
             <a:prstDash val="solid"/>
           </a:ln>
         </p:spPr>
       </p:sp>
-      <p:pic>
-        <p:nvPicPr>
-          <p:cNvPr id="13" name="Image 1" descr="preencoded.png">    </p:cNvPr>
-          <p:cNvPicPr>
-            <a:picLocks noChangeAspect="1"/>
-          </p:cNvPicPr>
-          <p:nvPr/>
-        </p:nvPicPr>
-        <p:blipFill>
-          <a:blip r:embed="rId2"/>
-          <a:srcRect l="0" r="0" t="0" b="0"/>
-          <a:stretch/>
-        </p:blipFill>
-        <p:spPr>
-          <a:xfrm>
-            <a:off x="4231538" y="1234440"/>
-            <a:ext cx="3600602" cy="2290572"/>
-          </a:xfrm>
-          <a:prstGeom prst="rect">
-            <a:avLst/>
-          </a:prstGeom>
-        </p:spPr>
-      </p:pic>
-      <p:sp>
-        <p:nvSpPr>
-          <p:cNvPr id="14" name="Shape 10"/>
-          <p:cNvSpPr/>
-          <p:nvPr/>
-        </p:nvSpPr>
-        <p:spPr>
-          <a:xfrm>
-            <a:off x="4304690" y="1307592"/>
-            <a:ext cx="868680" cy="237744"/>
-          </a:xfrm>
-          <a:prstGeom prst="rect">
-            <a:avLst/>
-          </a:prstGeom>
-          <a:solidFill>
-            <a:srgbClr val="10161F">
-              <a:alpha val="80000"/>
-            </a:srgbClr>
-          </a:solidFill>
-          <a:ln/>
-        </p:spPr>
-      </p:sp>
-      <p:sp>
-        <p:nvSpPr>
-          <p:cNvPr id="15" name="Text 11"/>
-          <p:cNvSpPr/>
-          <p:nvPr/>
-        </p:nvSpPr>
-        <p:spPr>
-          <a:xfrm>
-            <a:off x="4304690" y="1307592"/>
-            <a:ext cx="868680" cy="237744"/>
-          </a:xfrm>
-          <a:prstGeom prst="rect">
-            <a:avLst/>
-          </a:prstGeom>
-          <a:noFill/>
-          <a:ln/>
-        </p:spPr>
-        <p:txBody>
-          <a:bodyPr wrap="square" lIns="0" tIns="0" rIns="0" bIns="0" rtlCol="0" anchor="ctr"/>
-          <a:lstStyle/>
-          <a:p>
-            <a:pPr algn="ctr" indent="0" marL="0">
-              <a:buNone/>
-            </a:pPr>
-            <a:r>
-              <a:rPr lang="en-US" sz="900" b="1" dirty="0">
-                <a:solidFill>
-                  <a:srgbClr val="FFFFFF"/>
-                </a:solidFill>
-                <a:latin typeface="맑은 고딕" pitchFamily="34" charset="0"/>
-                <a:ea typeface="맑은 고딕" pitchFamily="34" charset="-122"/>
-                <a:cs typeface="맑은 고딕" pitchFamily="34" charset="-120"/>
-              </a:rPr>
-              <a:t>주 출입구</a:t>
-            </a:r>
-            <a:endParaRPr lang="en-US" sz="900" dirty="0"/>
-          </a:p>
-        </p:txBody>
-      </p:sp>
-      <p:sp>
-        <p:nvSpPr>
-          <p:cNvPr id="16" name="Shape 12"/>
-          <p:cNvSpPr/>
-          <p:nvPr/>
-        </p:nvSpPr>
-        <p:spPr>
-          <a:xfrm>
-            <a:off x="4231538" y="3232404"/>
-            <a:ext cx="3600602" cy="292608"/>
-          </a:xfrm>
-          <a:prstGeom prst="rect">
-            <a:avLst/>
-          </a:prstGeom>
-          <a:solidFill>
-            <a:srgbClr val="000000">
-              <a:alpha val="60000"/>
-            </a:srgbClr>
-          </a:solidFill>
-          <a:ln/>
-        </p:spPr>
-      </p:sp>
-      <p:sp>
-        <p:nvSpPr>
-          <p:cNvPr id="17" name="Text 13"/>
-          <p:cNvSpPr/>
-          <p:nvPr/>
-        </p:nvSpPr>
-        <p:spPr>
-          <a:xfrm>
-            <a:off x="4341266" y="3232404"/>
-            <a:ext cx="3381146" cy="292608"/>
-          </a:xfrm>
-          <a:prstGeom prst="rect">
-            <a:avLst/>
-          </a:prstGeom>
-          <a:noFill/>
-          <a:ln/>
-        </p:spPr>
-        <p:txBody>
-          <a:bodyPr wrap="square" lIns="0" tIns="0" rIns="0" bIns="0" rtlCol="0" anchor="ctr"/>
-          <a:lstStyle/>
-          <a:p>
-            <a:pPr indent="0" marL="0">
-              <a:buNone/>
-            </a:pPr>
-            <a:r>
-              <a:rPr lang="en-US" sz="900" dirty="0">
-                <a:solidFill>
-                  <a:srgbClr val="FFFFFF"/>
-                </a:solidFill>
-                <a:latin typeface="맑은 고딕" pitchFamily="34" charset="0"/>
-                <a:ea typeface="맑은 고딕" pitchFamily="34" charset="-122"/>
-                <a:cs typeface="맑은 고딕" pitchFamily="34" charset="-120"/>
-              </a:rPr>
-              <a:t>지상 진입로 및 1층 전면 상가부</a:t>
-            </a:r>
-            <a:endParaRPr lang="en-US" sz="900" dirty="0"/>
-          </a:p>
-        </p:txBody>
-      </p:sp>
-      <p:sp>
-        <p:nvSpPr>
-          <p:cNvPr id="18" name="Shape 14"/>
-          <p:cNvSpPr/>
-          <p:nvPr/>
-        </p:nvSpPr>
-        <p:spPr>
-          <a:xfrm>
-            <a:off x="7960157" y="1234440"/>
-            <a:ext cx="3600602" cy="2290572"/>
-          </a:xfrm>
-          <a:prstGeom prst="roundRect">
-            <a:avLst>
-              <a:gd name="adj" fmla="val 2395"/>
-            </a:avLst>
-          </a:prstGeom>
-          <a:solidFill>
-            <a:srgbClr val="F0F0F0"/>
-          </a:solidFill>
-          <a:ln w="6350">
+      <p:sp>
+        <p:nvSpPr>
+          <p:cNvPr id="14" name="Text 11"/>
+          <p:cNvSpPr/>
+          <p:nvPr/>
+        </p:nvSpPr>
+        <p:spPr>
+          <a:xfrm>
+            <a:off x="5989320" y="2788920"/>
+            <a:ext cx="1560003" cy="493776"/>
+          </a:xfrm>
+          <a:prstGeom prst="rect">
+            <a:avLst/>
+          </a:prstGeom>
+          <a:noFill/>
+          <a:ln/>
+        </p:spPr>
+        <p:txBody>
+          <a:bodyPr wrap="square" lIns="0" tIns="0" rIns="0" bIns="0" rtlCol="0" anchor="ctr"/>
+          <a:lstStyle/>
+          <a:p>
+            <a:pPr indent="0" marL="0">
+              <a:lnSpc>
+                <a:spcPct val="115000"/>
+              </a:lnSpc>
+              <a:buNone/>
+            </a:pPr>
+            <a:r>
+              <a:rPr lang="en-US" sz="1300" dirty="0">
+                <a:solidFill>
+                  <a:srgbClr val="5B6B73"/>
+                </a:solidFill>
+                <a:latin typeface="맑은 고딕" pitchFamily="34" charset="0"/>
+                <a:ea typeface="맑은 고딕" pitchFamily="34" charset="-122"/>
+                <a:cs typeface="맑은 고딕" pitchFamily="34" charset="-120"/>
+              </a:rPr>
+              <a:t>건폐율</a:t>
+            </a:r>
+            <a:endParaRPr lang="en-US" sz="1300" dirty="0"/>
+          </a:p>
+        </p:txBody>
+      </p:sp>
+      <p:sp>
+        <p:nvSpPr>
+          <p:cNvPr id="15" name="Text 12"/>
+          <p:cNvSpPr/>
+          <p:nvPr/>
+        </p:nvSpPr>
+        <p:spPr>
+          <a:xfrm>
+            <a:off x="7549323" y="2788920"/>
+            <a:ext cx="4011436" cy="493776"/>
+          </a:xfrm>
+          <a:prstGeom prst="rect">
+            <a:avLst/>
+          </a:prstGeom>
+          <a:noFill/>
+          <a:ln/>
+        </p:spPr>
+        <p:txBody>
+          <a:bodyPr wrap="square" lIns="0" tIns="0" rIns="0" bIns="0" rtlCol="0" anchor="ctr"/>
+          <a:lstStyle/>
+          <a:p>
+            <a:pPr indent="0" marL="0">
+              <a:lnSpc>
+                <a:spcPct val="115000"/>
+              </a:lnSpc>
+              <a:buNone/>
+            </a:pPr>
+            <a:r>
+              <a:rPr lang="en-US" sz="1300" b="1" dirty="0">
+                <a:solidFill>
+                  <a:srgbClr val="132A3A"/>
+                </a:solidFill>
+                <a:latin typeface="맑은 고딕" pitchFamily="34" charset="0"/>
+                <a:ea typeface="맑은 고딕" pitchFamily="34" charset="-122"/>
+                <a:cs typeface="맑은 고딕" pitchFamily="34" charset="-120"/>
+              </a:rPr>
+              <a:t>현행 51.3% (법정 상한 50%)</a:t>
+            </a:r>
+            <a:endParaRPr lang="en-US" sz="1300" dirty="0"/>
+          </a:p>
+        </p:txBody>
+      </p:sp>
+      <p:sp>
+        <p:nvSpPr>
+          <p:cNvPr id="16" name="Shape 13"/>
+          <p:cNvSpPr/>
+          <p:nvPr/>
+        </p:nvSpPr>
+        <p:spPr>
+          <a:xfrm>
+            <a:off x="5989320" y="3282696"/>
+            <a:ext cx="5571439" cy="0"/>
+          </a:xfrm>
+          <a:prstGeom prst="line">
+            <a:avLst/>
+          </a:prstGeom>
+          <a:noFill/>
+          <a:ln w="3810">
             <a:solidFill>
-              <a:srgbClr val="E0E0E0"/>
+              <a:srgbClr val="CBD5E0"/>
             </a:solidFill>
             <a:prstDash val="solid"/>
           </a:ln>
         </p:spPr>
       </p:sp>
-      <p:pic>
-        <p:nvPicPr>
-          <p:cNvPr id="19" name="Image 2" descr="preencoded.png">    </p:cNvPr>
-          <p:cNvPicPr>
-            <a:picLocks noChangeAspect="1"/>
-          </p:cNvPicPr>
-          <p:nvPr/>
-        </p:nvPicPr>
-        <p:blipFill>
-          <a:blip r:embed="rId3"/>
-          <a:srcRect l="0" r="0" t="0" b="0"/>
-          <a:stretch/>
-        </p:blipFill>
-        <p:spPr>
-          <a:xfrm>
-            <a:off x="7960157" y="1234440"/>
-            <a:ext cx="3600602" cy="2290572"/>
-          </a:xfrm>
-          <a:prstGeom prst="rect">
-            <a:avLst/>
-          </a:prstGeom>
-        </p:spPr>
-      </p:pic>
-      <p:sp>
-        <p:nvSpPr>
-          <p:cNvPr id="20" name="Shape 15"/>
-          <p:cNvSpPr/>
-          <p:nvPr/>
-        </p:nvSpPr>
-        <p:spPr>
-          <a:xfrm>
-            <a:off x="8033309" y="1307592"/>
-            <a:ext cx="868680" cy="237744"/>
-          </a:xfrm>
-          <a:prstGeom prst="rect">
-            <a:avLst/>
-          </a:prstGeom>
-          <a:solidFill>
-            <a:srgbClr val="10161F">
-              <a:alpha val="80000"/>
-            </a:srgbClr>
-          </a:solidFill>
-          <a:ln/>
-        </p:spPr>
-      </p:sp>
-      <p:sp>
-        <p:nvSpPr>
-          <p:cNvPr id="21" name="Text 16"/>
-          <p:cNvSpPr/>
-          <p:nvPr/>
-        </p:nvSpPr>
-        <p:spPr>
-          <a:xfrm>
-            <a:off x="8033309" y="1307592"/>
-            <a:ext cx="868680" cy="237744"/>
-          </a:xfrm>
-          <a:prstGeom prst="rect">
-            <a:avLst/>
-          </a:prstGeom>
-          <a:noFill/>
-          <a:ln/>
-        </p:spPr>
-        <p:txBody>
-          <a:bodyPr wrap="square" lIns="0" tIns="0" rIns="0" bIns="0" rtlCol="0" anchor="ctr"/>
-          <a:lstStyle/>
-          <a:p>
-            <a:pPr algn="ctr" indent="0" marL="0">
-              <a:buNone/>
-            </a:pPr>
-            <a:r>
-              <a:rPr lang="en-US" sz="900" b="1" dirty="0">
-                <a:solidFill>
-                  <a:srgbClr val="FFFFFF"/>
-                </a:solidFill>
-                <a:latin typeface="맑은 고딕" pitchFamily="34" charset="0"/>
-                <a:ea typeface="맑은 고딕" pitchFamily="34" charset="-122"/>
-                <a:cs typeface="맑은 고딕" pitchFamily="34" charset="-120"/>
-              </a:rPr>
-              <a:t>실내 공간</a:t>
-            </a:r>
-            <a:endParaRPr lang="en-US" sz="900" dirty="0"/>
-          </a:p>
-        </p:txBody>
-      </p:sp>
-      <p:sp>
-        <p:nvSpPr>
-          <p:cNvPr id="22" name="Shape 17"/>
-          <p:cNvSpPr/>
-          <p:nvPr/>
-        </p:nvSpPr>
-        <p:spPr>
-          <a:xfrm>
-            <a:off x="7960157" y="3232404"/>
-            <a:ext cx="3600602" cy="292608"/>
-          </a:xfrm>
-          <a:prstGeom prst="rect">
-            <a:avLst/>
-          </a:prstGeom>
-          <a:solidFill>
-            <a:srgbClr val="000000">
-              <a:alpha val="60000"/>
-            </a:srgbClr>
-          </a:solidFill>
-          <a:ln/>
-        </p:spPr>
-      </p:sp>
-      <p:sp>
-        <p:nvSpPr>
-          <p:cNvPr id="23" name="Text 18"/>
-          <p:cNvSpPr/>
-          <p:nvPr/>
-        </p:nvSpPr>
-        <p:spPr>
-          <a:xfrm>
-            <a:off x="8069885" y="3232404"/>
-            <a:ext cx="3381146" cy="292608"/>
-          </a:xfrm>
-          <a:prstGeom prst="rect">
-            <a:avLst/>
-          </a:prstGeom>
-          <a:noFill/>
-          <a:ln/>
-        </p:spPr>
-        <p:txBody>
-          <a:bodyPr wrap="square" lIns="0" tIns="0" rIns="0" bIns="0" rtlCol="0" anchor="ctr"/>
-          <a:lstStyle/>
-          <a:p>
-            <a:pPr indent="0" marL="0">
-              <a:buNone/>
-            </a:pPr>
-            <a:r>
-              <a:rPr lang="en-US" sz="900" dirty="0">
-                <a:solidFill>
-                  <a:srgbClr val="FFFFFF"/>
-                </a:solidFill>
-                <a:latin typeface="맑은 고딕" pitchFamily="34" charset="0"/>
-                <a:ea typeface="맑은 고딕" pitchFamily="34" charset="-122"/>
-                <a:cs typeface="맑은 고딕" pitchFamily="34" charset="-120"/>
-              </a:rPr>
-              <a:t>건물 측면부 및 도로 접면</a:t>
-            </a:r>
-            <a:endParaRPr lang="en-US" sz="900" dirty="0"/>
-          </a:p>
-        </p:txBody>
-      </p:sp>
-      <p:sp>
-        <p:nvSpPr>
-          <p:cNvPr id="24" name="Shape 19"/>
-          <p:cNvSpPr/>
-          <p:nvPr/>
-        </p:nvSpPr>
-        <p:spPr>
-          <a:xfrm>
-            <a:off x="502920" y="3653028"/>
-            <a:ext cx="3600602" cy="2290572"/>
-          </a:xfrm>
-          <a:prstGeom prst="roundRect">
-            <a:avLst>
-              <a:gd name="adj" fmla="val 2395"/>
-            </a:avLst>
-          </a:prstGeom>
-          <a:solidFill>
-            <a:srgbClr val="F0F0F0"/>
-          </a:solidFill>
-          <a:ln w="6350">
-            <a:solidFill>
-              <a:srgbClr val="E0E0E0"/>
-            </a:solidFill>
-            <a:prstDash val="solid"/>
-          </a:ln>
-        </p:spPr>
-      </p:sp>
-      <p:pic>
-        <p:nvPicPr>
-          <p:cNvPr id="25" name="Image 3" descr="preencoded.png">    </p:cNvPr>
-          <p:cNvPicPr>
-            <a:picLocks noChangeAspect="1"/>
-          </p:cNvPicPr>
-          <p:nvPr/>
-        </p:nvPicPr>
-        <p:blipFill>
-          <a:blip r:embed="rId4"/>
-          <a:srcRect l="0" r="0" t="0" b="0"/>
-          <a:stretch/>
-        </p:blipFill>
-        <p:spPr>
-          <a:xfrm>
-            <a:off x="502920" y="3653028"/>
-            <a:ext cx="3600602" cy="2290572"/>
-          </a:xfrm>
-          <a:prstGeom prst="rect">
-            <a:avLst/>
-          </a:prstGeom>
-        </p:spPr>
-      </p:pic>
-      <p:sp>
-        <p:nvSpPr>
-          <p:cNvPr id="26" name="Shape 20"/>
-          <p:cNvSpPr/>
-          <p:nvPr/>
-        </p:nvSpPr>
-        <p:spPr>
-          <a:xfrm>
-            <a:off x="576072" y="3726180"/>
-            <a:ext cx="822960" cy="237744"/>
-          </a:xfrm>
-          <a:prstGeom prst="rect">
-            <a:avLst/>
-          </a:prstGeom>
-          <a:solidFill>
-            <a:srgbClr val="10161F">
-              <a:alpha val="80000"/>
-            </a:srgbClr>
-          </a:solidFill>
-          <a:ln/>
-        </p:spPr>
-      </p:sp>
-      <p:sp>
-        <p:nvSpPr>
-          <p:cNvPr id="27" name="Text 21"/>
-          <p:cNvSpPr/>
-          <p:nvPr/>
-        </p:nvSpPr>
-        <p:spPr>
-          <a:xfrm>
-            <a:off x="576072" y="3726180"/>
-            <a:ext cx="822960" cy="237744"/>
-          </a:xfrm>
-          <a:prstGeom prst="rect">
-            <a:avLst/>
-          </a:prstGeom>
-          <a:noFill/>
-          <a:ln/>
-        </p:spPr>
-        <p:txBody>
-          <a:bodyPr wrap="square" lIns="0" tIns="0" rIns="0" bIns="0" rtlCol="0" anchor="ctr"/>
-          <a:lstStyle/>
-          <a:p>
-            <a:pPr algn="ctr" indent="0" marL="0">
-              <a:buNone/>
-            </a:pPr>
-            <a:r>
-              <a:rPr lang="en-US" sz="900" b="1" dirty="0">
-                <a:solidFill>
-                  <a:srgbClr val="FFFFFF"/>
-                </a:solidFill>
-                <a:latin typeface="맑은 고딕" pitchFamily="34" charset="0"/>
-                <a:ea typeface="맑은 고딕" pitchFamily="34" charset="-122"/>
-                <a:cs typeface="맑은 고딕" pitchFamily="34" charset="-120"/>
-              </a:rPr>
-              <a:t>주차장</a:t>
-            </a:r>
-            <a:endParaRPr lang="en-US" sz="900" dirty="0"/>
-          </a:p>
-        </p:txBody>
-      </p:sp>
-      <p:sp>
-        <p:nvSpPr>
-          <p:cNvPr id="28" name="Shape 22"/>
-          <p:cNvSpPr/>
-          <p:nvPr/>
-        </p:nvSpPr>
-        <p:spPr>
-          <a:xfrm>
-            <a:off x="502920" y="5650992"/>
-            <a:ext cx="3600602" cy="292608"/>
-          </a:xfrm>
-          <a:prstGeom prst="rect">
-            <a:avLst/>
-          </a:prstGeom>
-          <a:solidFill>
-            <a:srgbClr val="000000">
-              <a:alpha val="60000"/>
-            </a:srgbClr>
-          </a:solidFill>
-          <a:ln/>
-        </p:spPr>
-      </p:sp>
-      <p:sp>
-        <p:nvSpPr>
-          <p:cNvPr id="29" name="Text 23"/>
-          <p:cNvSpPr/>
-          <p:nvPr/>
-        </p:nvSpPr>
-        <p:spPr>
-          <a:xfrm>
-            <a:off x="612648" y="5650992"/>
-            <a:ext cx="3381146" cy="292608"/>
-          </a:xfrm>
-          <a:prstGeom prst="rect">
-            <a:avLst/>
-          </a:prstGeom>
-          <a:noFill/>
-          <a:ln/>
-        </p:spPr>
-        <p:txBody>
-          <a:bodyPr wrap="square" lIns="0" tIns="0" rIns="0" bIns="0" rtlCol="0" anchor="ctr"/>
-          <a:lstStyle/>
-          <a:p>
-            <a:pPr indent="0" marL="0">
-              <a:buNone/>
-            </a:pPr>
-            <a:r>
-              <a:rPr lang="en-US" sz="900" dirty="0">
-                <a:solidFill>
-                  <a:srgbClr val="FFFFFF"/>
-                </a:solidFill>
-                <a:latin typeface="맑은 고딕" pitchFamily="34" charset="0"/>
-                <a:ea typeface="맑은 고딕" pitchFamily="34" charset="-122"/>
-                <a:cs typeface="맑은 고딕" pitchFamily="34" charset="-120"/>
-              </a:rPr>
-              <a:t>자주식/기계식 주차장 진입로 (총 26대)</a:t>
-            </a:r>
-            <a:endParaRPr lang="en-US" sz="900" dirty="0"/>
-          </a:p>
-        </p:txBody>
-      </p:sp>
-      <p:sp>
-        <p:nvSpPr>
-          <p:cNvPr id="30" name="Shape 24"/>
-          <p:cNvSpPr/>
-          <p:nvPr/>
-        </p:nvSpPr>
-        <p:spPr>
-          <a:xfrm>
-            <a:off x="4231538" y="3653028"/>
-            <a:ext cx="3600602" cy="2290572"/>
-          </a:xfrm>
-          <a:prstGeom prst="roundRect">
-            <a:avLst>
-              <a:gd name="adj" fmla="val 2395"/>
-            </a:avLst>
-          </a:prstGeom>
-          <a:solidFill>
-            <a:srgbClr val="F0F0F0"/>
-          </a:solidFill>
-          <a:ln w="6350">
-            <a:solidFill>
-              <a:srgbClr val="E0E0E0"/>
-            </a:solidFill>
-            <a:prstDash val="solid"/>
-          </a:ln>
-        </p:spPr>
-      </p:sp>
-      <p:pic>
-        <p:nvPicPr>
-          <p:cNvPr id="31" name="Image 4" descr="preencoded.png">    </p:cNvPr>
-          <p:cNvPicPr>
-            <a:picLocks noChangeAspect="1"/>
-          </p:cNvPicPr>
-          <p:nvPr/>
-        </p:nvPicPr>
-        <p:blipFill>
-          <a:blip r:embed="rId5"/>
-          <a:srcRect l="0" r="0" t="0" b="0"/>
-          <a:stretch/>
-        </p:blipFill>
-        <p:spPr>
-          <a:xfrm>
-            <a:off x="4231538" y="3653028"/>
-            <a:ext cx="3600602" cy="2290572"/>
-          </a:xfrm>
-          <a:prstGeom prst="rect">
-            <a:avLst/>
-          </a:prstGeom>
-        </p:spPr>
-      </p:pic>
-      <p:sp>
-        <p:nvSpPr>
-          <p:cNvPr id="32" name="Shape 25"/>
-          <p:cNvSpPr/>
-          <p:nvPr/>
-        </p:nvSpPr>
-        <p:spPr>
-          <a:xfrm>
-            <a:off x="4304690" y="3726180"/>
-            <a:ext cx="996696" cy="237744"/>
-          </a:xfrm>
-          <a:prstGeom prst="rect">
-            <a:avLst/>
-          </a:prstGeom>
-          <a:solidFill>
-            <a:srgbClr val="10161F">
-              <a:alpha val="80000"/>
-            </a:srgbClr>
-          </a:solidFill>
-          <a:ln/>
-        </p:spPr>
-      </p:sp>
-      <p:sp>
-        <p:nvSpPr>
-          <p:cNvPr id="33" name="Text 26"/>
-          <p:cNvSpPr/>
-          <p:nvPr/>
-        </p:nvSpPr>
-        <p:spPr>
-          <a:xfrm>
-            <a:off x="4304690" y="3726180"/>
-            <a:ext cx="996696" cy="237744"/>
-          </a:xfrm>
-          <a:prstGeom prst="rect">
-            <a:avLst/>
-          </a:prstGeom>
-          <a:noFill/>
-          <a:ln/>
-        </p:spPr>
-        <p:txBody>
-          <a:bodyPr wrap="square" lIns="0" tIns="0" rIns="0" bIns="0" rtlCol="0" anchor="ctr"/>
-          <a:lstStyle/>
-          <a:p>
-            <a:pPr algn="ctr" indent="0" marL="0">
-              <a:buNone/>
-            </a:pPr>
-            <a:r>
-              <a:rPr lang="en-US" sz="900" b="1" dirty="0">
-                <a:solidFill>
-                  <a:srgbClr val="FFFFFF"/>
-                </a:solidFill>
-                <a:latin typeface="맑은 고딕" pitchFamily="34" charset="0"/>
-                <a:ea typeface="맑은 고딕" pitchFamily="34" charset="-122"/>
-                <a:cs typeface="맑은 고딕" pitchFamily="34" charset="-120"/>
-              </a:rPr>
-              <a:t>옥상/테라스</a:t>
-            </a:r>
-            <a:endParaRPr lang="en-US" sz="900" dirty="0"/>
-          </a:p>
-        </p:txBody>
-      </p:sp>
-      <p:sp>
-        <p:nvSpPr>
-          <p:cNvPr id="34" name="Shape 27"/>
-          <p:cNvSpPr/>
-          <p:nvPr/>
-        </p:nvSpPr>
-        <p:spPr>
-          <a:xfrm>
-            <a:off x="4231538" y="5650992"/>
-            <a:ext cx="3600602" cy="292608"/>
-          </a:xfrm>
-          <a:prstGeom prst="rect">
-            <a:avLst/>
-          </a:prstGeom>
-          <a:solidFill>
-            <a:srgbClr val="000000">
-              <a:alpha val="60000"/>
-            </a:srgbClr>
-          </a:solidFill>
-          <a:ln/>
-        </p:spPr>
-      </p:sp>
-      <p:sp>
-        <p:nvSpPr>
-          <p:cNvPr id="35" name="Text 28"/>
-          <p:cNvSpPr/>
-          <p:nvPr/>
-        </p:nvSpPr>
-        <p:spPr>
-          <a:xfrm>
-            <a:off x="4341266" y="5650992"/>
-            <a:ext cx="3381146" cy="292608"/>
-          </a:xfrm>
-          <a:prstGeom prst="rect">
-            <a:avLst/>
-          </a:prstGeom>
-          <a:noFill/>
-          <a:ln/>
-        </p:spPr>
-        <p:txBody>
-          <a:bodyPr wrap="square" lIns="0" tIns="0" rIns="0" bIns="0" rtlCol="0" anchor="ctr"/>
-          <a:lstStyle/>
-          <a:p>
-            <a:pPr indent="0" marL="0">
-              <a:buNone/>
-            </a:pPr>
-            <a:r>
-              <a:rPr lang="en-US" sz="900" dirty="0">
-                <a:solidFill>
-                  <a:srgbClr val="FFFFFF"/>
-                </a:solidFill>
-                <a:latin typeface="맑은 고딕" pitchFamily="34" charset="0"/>
-                <a:ea typeface="맑은 고딕" pitchFamily="34" charset="-122"/>
-                <a:cs typeface="맑은 고딕" pitchFamily="34" charset="-120"/>
-              </a:rPr>
-              <a:t>상층부 외관 및 옥상 공간</a:t>
-            </a:r>
-            <a:endParaRPr lang="en-US" sz="900" dirty="0"/>
-          </a:p>
-        </p:txBody>
-      </p:sp>
-      <p:sp>
-        <p:nvSpPr>
-          <p:cNvPr id="36" name="Text 29"/>
+      <p:sp>
+        <p:nvSpPr>
+          <p:cNvPr id="17" name="Text 14"/>
+          <p:cNvSpPr/>
+          <p:nvPr/>
+        </p:nvSpPr>
+        <p:spPr>
+          <a:xfrm>
+            <a:off x="5989320" y="3282696"/>
+            <a:ext cx="1560003" cy="493776"/>
+          </a:xfrm>
+          <a:prstGeom prst="rect">
+            <a:avLst/>
+          </a:prstGeom>
+          <a:noFill/>
+          <a:ln/>
+        </p:spPr>
+        <p:txBody>
+          <a:bodyPr wrap="square" lIns="0" tIns="0" rIns="0" bIns="0" rtlCol="0" anchor="ctr"/>
+          <a:lstStyle/>
+          <a:p>
+            <a:pPr indent="0" marL="0">
+              <a:lnSpc>
+                <a:spcPct val="115000"/>
+              </a:lnSpc>
+              <a:buNone/>
+            </a:pPr>
+            <a:r>
+              <a:rPr lang="en-US" sz="1300" dirty="0">
+                <a:solidFill>
+                  <a:srgbClr val="5B6B73"/>
+                </a:solidFill>
+                <a:latin typeface="맑은 고딕" pitchFamily="34" charset="0"/>
+                <a:ea typeface="맑은 고딕" pitchFamily="34" charset="-122"/>
+                <a:cs typeface="맑은 고딕" pitchFamily="34" charset="-120"/>
+              </a:rPr>
+              <a:t>용적률</a:t>
+            </a:r>
+            <a:endParaRPr lang="en-US" sz="1300" dirty="0"/>
+          </a:p>
+        </p:txBody>
+      </p:sp>
+      <p:sp>
+        <p:nvSpPr>
+          <p:cNvPr id="18" name="Text 15"/>
+          <p:cNvSpPr/>
+          <p:nvPr/>
+        </p:nvSpPr>
+        <p:spPr>
+          <a:xfrm>
+            <a:off x="7549323" y="3282696"/>
+            <a:ext cx="4011436" cy="493776"/>
+          </a:xfrm>
+          <a:prstGeom prst="rect">
+            <a:avLst/>
+          </a:prstGeom>
+          <a:noFill/>
+          <a:ln/>
+        </p:spPr>
+        <p:txBody>
+          <a:bodyPr wrap="square" lIns="0" tIns="0" rIns="0" bIns="0" rtlCol="0" anchor="ctr"/>
+          <a:lstStyle/>
+          <a:p>
+            <a:pPr indent="0" marL="0">
+              <a:lnSpc>
+                <a:spcPct val="115000"/>
+              </a:lnSpc>
+              <a:buNone/>
+            </a:pPr>
+            <a:r>
+              <a:rPr lang="en-US" sz="1300" b="1" dirty="0">
+                <a:solidFill>
+                  <a:srgbClr val="132A3A"/>
+                </a:solidFill>
+                <a:latin typeface="맑은 고딕" pitchFamily="34" charset="0"/>
+                <a:ea typeface="맑은 고딕" pitchFamily="34" charset="-122"/>
+                <a:cs typeface="맑은 고딕" pitchFamily="34" charset="-120"/>
+              </a:rPr>
+              <a:t>현행 237.2% (법정 상한 250%)</a:t>
+            </a:r>
+            <a:endParaRPr lang="en-US" sz="1300" dirty="0"/>
+          </a:p>
+        </p:txBody>
+      </p:sp>
+      <p:sp>
+        <p:nvSpPr>
+          <p:cNvPr id="19" name="Text 16"/>
+          <p:cNvSpPr/>
+          <p:nvPr/>
+        </p:nvSpPr>
+        <p:spPr>
+          <a:xfrm>
+            <a:off x="5989320" y="5715000"/>
+            <a:ext cx="5571439" cy="384048"/>
+          </a:xfrm>
+          <a:prstGeom prst="rect">
+            <a:avLst/>
+          </a:prstGeom>
+          <a:noFill/>
+          <a:ln/>
+        </p:spPr>
+        <p:txBody>
+          <a:bodyPr wrap="square" lIns="0" tIns="0" rIns="0" bIns="0" rtlCol="0" anchor="ctr"/>
+          <a:lstStyle/>
+          <a:p>
+            <a:pPr indent="0" marL="0">
+              <a:lnSpc>
+                <a:spcPct val="125000"/>
+              </a:lnSpc>
+              <a:buNone/>
+            </a:pPr>
+            <a:r>
+              <a:rPr lang="en-US" sz="1100" dirty="0">
+                <a:solidFill>
+                  <a:srgbClr val="8A9AA3"/>
+                </a:solidFill>
+                <a:latin typeface="맑은 고딕" pitchFamily="34" charset="0"/>
+                <a:ea typeface="맑은 고딕" pitchFamily="34" charset="-122"/>
+                <a:cs typeface="맑은 고딕" pitchFamily="34" charset="-120"/>
+              </a:rPr>
+              <a:t>© V-World 국토교통부 | 2026</a:t>
+            </a:r>
+            <a:endParaRPr lang="en-US" sz="1100" dirty="0"/>
+          </a:p>
+        </p:txBody>
+      </p:sp>
+      <p:sp>
+        <p:nvSpPr>
+          <p:cNvPr id="20" name="Text 17"/>
           <p:cNvSpPr/>
           <p:nvPr/>
         </p:nvSpPr>
@@ -7678,7 +8255,7 @@
       </p:sp>
       <p:sp>
         <p:nvSpPr>
-          <p:cNvPr id="37" name="Text 30"/>
+          <p:cNvPr id="21" name="Text 18"/>
           <p:cNvSpPr/>
           <p:nvPr/>
         </p:nvSpPr>
@@ -7726,6 +8303,1113 @@
 <file path=ppt/slides/slide7.xml><?xml version="1.0" encoding="utf-8"?>
 <p:sld xmlns:a="http://schemas.openxmlformats.org/drawingml/2006/main" xmlns:r="http://schemas.openxmlformats.org/officeDocument/2006/relationships" xmlns:p="http://schemas.openxmlformats.org/presentationml/2006/main">
   <p:cSld name="Slide 7">
+    <p:bg>
+      <p:bgPr>
+        <a:solidFill>
+          <a:srgbClr val="FFFFFF"/>
+        </a:solidFill>
+      </p:bgPr>
+    </p:bg>
+    <p:spTree>
+      <p:nvGrpSpPr>
+        <p:cNvPr id="1" name=""/>
+        <p:cNvGrpSpPr/>
+        <p:nvPr/>
+      </p:nvGrpSpPr>
+      <p:grpSpPr>
+        <a:xfrm>
+          <a:off x="0" y="0"/>
+          <a:ext cx="0" cy="0"/>
+          <a:chOff x="0" y="0"/>
+          <a:chExt cx="0" cy="0"/>
+        </a:xfrm>
+      </p:grpSpPr>
+      <p:sp>
+        <p:nvSpPr>
+          <p:cNvPr id="2" name="Shape 0"/>
+          <p:cNvSpPr/>
+          <p:nvPr/>
+        </p:nvSpPr>
+        <p:spPr>
+          <a:xfrm>
+            <a:off x="502920" y="457200"/>
+            <a:ext cx="384048" cy="384048"/>
+          </a:xfrm>
+          <a:prstGeom prst="ellipse">
+            <a:avLst/>
+          </a:prstGeom>
+          <a:solidFill>
+            <a:srgbClr val="B8860B"/>
+          </a:solidFill>
+          <a:ln/>
+        </p:spPr>
+      </p:sp>
+      <p:sp>
+        <p:nvSpPr>
+          <p:cNvPr id="3" name="Text 1"/>
+          <p:cNvSpPr/>
+          <p:nvPr/>
+        </p:nvSpPr>
+        <p:spPr>
+          <a:xfrm>
+            <a:off x="502920" y="457200"/>
+            <a:ext cx="384048" cy="384048"/>
+          </a:xfrm>
+          <a:prstGeom prst="rect">
+            <a:avLst/>
+          </a:prstGeom>
+          <a:noFill/>
+          <a:ln/>
+        </p:spPr>
+        <p:txBody>
+          <a:bodyPr wrap="square" lIns="0" tIns="0" rIns="0" bIns="0" rtlCol="0" anchor="ctr"/>
+          <a:lstStyle/>
+          <a:p>
+            <a:pPr algn="ctr" indent="0" marL="0">
+              <a:buNone/>
+            </a:pPr>
+            <a:r>
+              <a:rPr lang="en-US" sz="1300" b="1" dirty="0">
+                <a:solidFill>
+                  <a:srgbClr val="FFFFFF"/>
+                </a:solidFill>
+                <a:latin typeface="Arial" pitchFamily="34" charset="0"/>
+                <a:ea typeface="Arial" pitchFamily="34" charset="-122"/>
+                <a:cs typeface="Arial" pitchFamily="34" charset="-120"/>
+              </a:rPr>
+              <a:t>07</a:t>
+            </a:r>
+            <a:endParaRPr lang="en-US" sz="1300" dirty="0"/>
+          </a:p>
+        </p:txBody>
+      </p:sp>
+      <p:sp>
+        <p:nvSpPr>
+          <p:cNvPr id="4" name="Text 2"/>
+          <p:cNvSpPr/>
+          <p:nvPr/>
+        </p:nvSpPr>
+        <p:spPr>
+          <a:xfrm>
+            <a:off x="1069848" y="457200"/>
+            <a:ext cx="10490911" cy="182880"/>
+          </a:xfrm>
+          <a:prstGeom prst="rect">
+            <a:avLst/>
+          </a:prstGeom>
+          <a:noFill/>
+          <a:ln/>
+        </p:spPr>
+        <p:txBody>
+          <a:bodyPr wrap="square" lIns="0" tIns="0" rIns="0" bIns="0" rtlCol="0" anchor="ctr"/>
+          <a:lstStyle/>
+          <a:p>
+            <a:pPr indent="0" marL="0">
+              <a:buNone/>
+            </a:pPr>
+            <a:r>
+              <a:rPr lang="en-US" sz="950" b="1" spc="200" kern="0" dirty="0">
+                <a:solidFill>
+                  <a:srgbClr val="B8860B"/>
+                </a:solidFill>
+                <a:latin typeface="Arial" pitchFamily="34" charset="0"/>
+                <a:ea typeface="Arial" pitchFamily="34" charset="-122"/>
+                <a:cs typeface="Arial" pitchFamily="34" charset="-120"/>
+              </a:rPr>
+              <a:t>Gallery</a:t>
+            </a:r>
+            <a:endParaRPr lang="en-US" sz="950" dirty="0"/>
+          </a:p>
+        </p:txBody>
+      </p:sp>
+      <p:sp>
+        <p:nvSpPr>
+          <p:cNvPr id="5" name="Text 3"/>
+          <p:cNvSpPr/>
+          <p:nvPr/>
+        </p:nvSpPr>
+        <p:spPr>
+          <a:xfrm>
+            <a:off x="1069848" y="640080"/>
+            <a:ext cx="10490911" cy="365760"/>
+          </a:xfrm>
+          <a:prstGeom prst="rect">
+            <a:avLst/>
+          </a:prstGeom>
+          <a:noFill/>
+          <a:ln/>
+        </p:spPr>
+        <p:txBody>
+          <a:bodyPr wrap="square" lIns="0" tIns="0" rIns="0" bIns="0" rtlCol="0" anchor="ctr"/>
+          <a:lstStyle/>
+          <a:p>
+            <a:pPr indent="0" marL="0">
+              <a:buNone/>
+            </a:pPr>
+            <a:r>
+              <a:rPr lang="en-US" sz="2300" b="1" dirty="0">
+                <a:solidFill>
+                  <a:srgbClr val="132A3A"/>
+                </a:solidFill>
+                <a:latin typeface="맑은 고딕" pitchFamily="34" charset="0"/>
+                <a:ea typeface="맑은 고딕" pitchFamily="34" charset="-122"/>
+                <a:cs typeface="맑은 고딕" pitchFamily="34" charset="-120"/>
+              </a:rPr>
+              <a:t>현장 사진</a:t>
+            </a:r>
+            <a:endParaRPr lang="en-US" sz="2300" dirty="0"/>
+          </a:p>
+        </p:txBody>
+      </p:sp>
+      <p:sp>
+        <p:nvSpPr>
+          <p:cNvPr id="6" name="Shape 4"/>
+          <p:cNvSpPr/>
+          <p:nvPr/>
+        </p:nvSpPr>
+        <p:spPr>
+          <a:xfrm>
+            <a:off x="502920" y="1234440"/>
+            <a:ext cx="3600602" cy="2290572"/>
+          </a:xfrm>
+          <a:prstGeom prst="roundRect">
+            <a:avLst>
+              <a:gd name="adj" fmla="val 2395"/>
+            </a:avLst>
+          </a:prstGeom>
+          <a:solidFill>
+            <a:srgbClr val="F0F0F0"/>
+          </a:solidFill>
+          <a:ln w="6350">
+            <a:solidFill>
+              <a:srgbClr val="E0E0E0"/>
+            </a:solidFill>
+            <a:prstDash val="solid"/>
+          </a:ln>
+        </p:spPr>
+      </p:sp>
+      <p:pic>
+        <p:nvPicPr>
+          <p:cNvPr id="7" name="Image 0" descr="preencoded.png">    </p:cNvPr>
+          <p:cNvPicPr>
+            <a:picLocks noChangeAspect="1"/>
+          </p:cNvPicPr>
+          <p:nvPr/>
+        </p:nvPicPr>
+        <p:blipFill>
+          <a:blip r:embed="rId1"/>
+          <a:srcRect l="0" r="0" t="0" b="0"/>
+          <a:stretch/>
+        </p:blipFill>
+        <p:spPr>
+          <a:xfrm>
+            <a:off x="502920" y="1234440"/>
+            <a:ext cx="3600602" cy="2290572"/>
+          </a:xfrm>
+          <a:prstGeom prst="rect">
+            <a:avLst/>
+          </a:prstGeom>
+        </p:spPr>
+      </p:pic>
+      <p:sp>
+        <p:nvSpPr>
+          <p:cNvPr id="8" name="Shape 5"/>
+          <p:cNvSpPr/>
+          <p:nvPr/>
+        </p:nvSpPr>
+        <p:spPr>
+          <a:xfrm>
+            <a:off x="576072" y="1307592"/>
+            <a:ext cx="868680" cy="237744"/>
+          </a:xfrm>
+          <a:prstGeom prst="rect">
+            <a:avLst/>
+          </a:prstGeom>
+          <a:solidFill>
+            <a:srgbClr val="10161F">
+              <a:alpha val="80000"/>
+            </a:srgbClr>
+          </a:solidFill>
+          <a:ln/>
+        </p:spPr>
+      </p:sp>
+      <p:sp>
+        <p:nvSpPr>
+          <p:cNvPr id="9" name="Text 6"/>
+          <p:cNvSpPr/>
+          <p:nvPr/>
+        </p:nvSpPr>
+        <p:spPr>
+          <a:xfrm>
+            <a:off x="576072" y="1307592"/>
+            <a:ext cx="868680" cy="237744"/>
+          </a:xfrm>
+          <a:prstGeom prst="rect">
+            <a:avLst/>
+          </a:prstGeom>
+          <a:noFill/>
+          <a:ln/>
+        </p:spPr>
+        <p:txBody>
+          <a:bodyPr wrap="square" lIns="0" tIns="0" rIns="0" bIns="0" rtlCol="0" anchor="ctr"/>
+          <a:lstStyle/>
+          <a:p>
+            <a:pPr algn="ctr" indent="0" marL="0">
+              <a:buNone/>
+            </a:pPr>
+            <a:r>
+              <a:rPr lang="en-US" sz="900" b="1" dirty="0">
+                <a:solidFill>
+                  <a:srgbClr val="FFFFFF"/>
+                </a:solidFill>
+                <a:latin typeface="맑은 고딕" pitchFamily="34" charset="0"/>
+                <a:ea typeface="맑은 고딕" pitchFamily="34" charset="-122"/>
+                <a:cs typeface="맑은 고딕" pitchFamily="34" charset="-120"/>
+              </a:rPr>
+              <a:t>건물 외관</a:t>
+            </a:r>
+            <a:endParaRPr lang="en-US" sz="900" dirty="0"/>
+          </a:p>
+        </p:txBody>
+      </p:sp>
+      <p:sp>
+        <p:nvSpPr>
+          <p:cNvPr id="10" name="Shape 7"/>
+          <p:cNvSpPr/>
+          <p:nvPr/>
+        </p:nvSpPr>
+        <p:spPr>
+          <a:xfrm>
+            <a:off x="502920" y="3232404"/>
+            <a:ext cx="3600602" cy="292608"/>
+          </a:xfrm>
+          <a:prstGeom prst="rect">
+            <a:avLst/>
+          </a:prstGeom>
+          <a:solidFill>
+            <a:srgbClr val="000000">
+              <a:alpha val="60000"/>
+            </a:srgbClr>
+          </a:solidFill>
+          <a:ln/>
+        </p:spPr>
+      </p:sp>
+      <p:sp>
+        <p:nvSpPr>
+          <p:cNvPr id="11" name="Text 8"/>
+          <p:cNvSpPr/>
+          <p:nvPr/>
+        </p:nvSpPr>
+        <p:spPr>
+          <a:xfrm>
+            <a:off x="612648" y="3232404"/>
+            <a:ext cx="3381146" cy="292608"/>
+          </a:xfrm>
+          <a:prstGeom prst="rect">
+            <a:avLst/>
+          </a:prstGeom>
+          <a:noFill/>
+          <a:ln/>
+        </p:spPr>
+        <p:txBody>
+          <a:bodyPr wrap="square" lIns="0" tIns="0" rIns="0" bIns="0" rtlCol="0" anchor="ctr"/>
+          <a:lstStyle/>
+          <a:p>
+            <a:pPr indent="0" marL="0">
+              <a:buNone/>
+            </a:pPr>
+            <a:r>
+              <a:rPr lang="en-US" sz="900" dirty="0">
+                <a:solidFill>
+                  <a:srgbClr val="FFFFFF"/>
+                </a:solidFill>
+                <a:latin typeface="맑은 고딕" pitchFamily="34" charset="0"/>
+                <a:ea typeface="맑은 고딕" pitchFamily="34" charset="-122"/>
+                <a:cs typeface="맑은 고딕" pitchFamily="34" charset="-120"/>
+              </a:rPr>
+              <a:t>신사동 590 ICL 빌딩 전경 및 대로변 코너 입지</a:t>
+            </a:r>
+            <a:endParaRPr lang="en-US" sz="900" dirty="0"/>
+          </a:p>
+        </p:txBody>
+      </p:sp>
+      <p:sp>
+        <p:nvSpPr>
+          <p:cNvPr id="12" name="Shape 9"/>
+          <p:cNvSpPr/>
+          <p:nvPr/>
+        </p:nvSpPr>
+        <p:spPr>
+          <a:xfrm>
+            <a:off x="4231538" y="1234440"/>
+            <a:ext cx="3600602" cy="2290572"/>
+          </a:xfrm>
+          <a:prstGeom prst="roundRect">
+            <a:avLst>
+              <a:gd name="adj" fmla="val 2395"/>
+            </a:avLst>
+          </a:prstGeom>
+          <a:solidFill>
+            <a:srgbClr val="F0F0F0"/>
+          </a:solidFill>
+          <a:ln w="6350">
+            <a:solidFill>
+              <a:srgbClr val="E0E0E0"/>
+            </a:solidFill>
+            <a:prstDash val="solid"/>
+          </a:ln>
+        </p:spPr>
+      </p:sp>
+      <p:pic>
+        <p:nvPicPr>
+          <p:cNvPr id="13" name="Image 1" descr="preencoded.png">    </p:cNvPr>
+          <p:cNvPicPr>
+            <a:picLocks noChangeAspect="1"/>
+          </p:cNvPicPr>
+          <p:nvPr/>
+        </p:nvPicPr>
+        <p:blipFill>
+          <a:blip r:embed="rId2"/>
+          <a:srcRect l="0" r="0" t="0" b="0"/>
+          <a:stretch/>
+        </p:blipFill>
+        <p:spPr>
+          <a:xfrm>
+            <a:off x="4231538" y="1234440"/>
+            <a:ext cx="3600602" cy="2290572"/>
+          </a:xfrm>
+          <a:prstGeom prst="rect">
+            <a:avLst/>
+          </a:prstGeom>
+        </p:spPr>
+      </p:pic>
+      <p:sp>
+        <p:nvSpPr>
+          <p:cNvPr id="14" name="Shape 10"/>
+          <p:cNvSpPr/>
+          <p:nvPr/>
+        </p:nvSpPr>
+        <p:spPr>
+          <a:xfrm>
+            <a:off x="4304690" y="1307592"/>
+            <a:ext cx="868680" cy="237744"/>
+          </a:xfrm>
+          <a:prstGeom prst="rect">
+            <a:avLst/>
+          </a:prstGeom>
+          <a:solidFill>
+            <a:srgbClr val="10161F">
+              <a:alpha val="80000"/>
+            </a:srgbClr>
+          </a:solidFill>
+          <a:ln/>
+        </p:spPr>
+      </p:sp>
+      <p:sp>
+        <p:nvSpPr>
+          <p:cNvPr id="15" name="Text 11"/>
+          <p:cNvSpPr/>
+          <p:nvPr/>
+        </p:nvSpPr>
+        <p:spPr>
+          <a:xfrm>
+            <a:off x="4304690" y="1307592"/>
+            <a:ext cx="868680" cy="237744"/>
+          </a:xfrm>
+          <a:prstGeom prst="rect">
+            <a:avLst/>
+          </a:prstGeom>
+          <a:noFill/>
+          <a:ln/>
+        </p:spPr>
+        <p:txBody>
+          <a:bodyPr wrap="square" lIns="0" tIns="0" rIns="0" bIns="0" rtlCol="0" anchor="ctr"/>
+          <a:lstStyle/>
+          <a:p>
+            <a:pPr algn="ctr" indent="0" marL="0">
+              <a:buNone/>
+            </a:pPr>
+            <a:r>
+              <a:rPr lang="en-US" sz="900" b="1" dirty="0">
+                <a:solidFill>
+                  <a:srgbClr val="FFFFFF"/>
+                </a:solidFill>
+                <a:latin typeface="맑은 고딕" pitchFamily="34" charset="0"/>
+                <a:ea typeface="맑은 고딕" pitchFamily="34" charset="-122"/>
+                <a:cs typeface="맑은 고딕" pitchFamily="34" charset="-120"/>
+              </a:rPr>
+              <a:t>주 출입구</a:t>
+            </a:r>
+            <a:endParaRPr lang="en-US" sz="900" dirty="0"/>
+          </a:p>
+        </p:txBody>
+      </p:sp>
+      <p:sp>
+        <p:nvSpPr>
+          <p:cNvPr id="16" name="Shape 12"/>
+          <p:cNvSpPr/>
+          <p:nvPr/>
+        </p:nvSpPr>
+        <p:spPr>
+          <a:xfrm>
+            <a:off x="4231538" y="3232404"/>
+            <a:ext cx="3600602" cy="292608"/>
+          </a:xfrm>
+          <a:prstGeom prst="rect">
+            <a:avLst/>
+          </a:prstGeom>
+          <a:solidFill>
+            <a:srgbClr val="000000">
+              <a:alpha val="60000"/>
+            </a:srgbClr>
+          </a:solidFill>
+          <a:ln/>
+        </p:spPr>
+      </p:sp>
+      <p:sp>
+        <p:nvSpPr>
+          <p:cNvPr id="17" name="Text 13"/>
+          <p:cNvSpPr/>
+          <p:nvPr/>
+        </p:nvSpPr>
+        <p:spPr>
+          <a:xfrm>
+            <a:off x="4341266" y="3232404"/>
+            <a:ext cx="3381146" cy="292608"/>
+          </a:xfrm>
+          <a:prstGeom prst="rect">
+            <a:avLst/>
+          </a:prstGeom>
+          <a:noFill/>
+          <a:ln/>
+        </p:spPr>
+        <p:txBody>
+          <a:bodyPr wrap="square" lIns="0" tIns="0" rIns="0" bIns="0" rtlCol="0" anchor="ctr"/>
+          <a:lstStyle/>
+          <a:p>
+            <a:pPr indent="0" marL="0">
+              <a:buNone/>
+            </a:pPr>
+            <a:r>
+              <a:rPr lang="en-US" sz="900" dirty="0">
+                <a:solidFill>
+                  <a:srgbClr val="FFFFFF"/>
+                </a:solidFill>
+                <a:latin typeface="맑은 고딕" pitchFamily="34" charset="0"/>
+                <a:ea typeface="맑은 고딕" pitchFamily="34" charset="-122"/>
+                <a:cs typeface="맑은 고딕" pitchFamily="34" charset="-120"/>
+              </a:rPr>
+              <a:t>지상 진입로 및 1층 전면 상가부</a:t>
+            </a:r>
+            <a:endParaRPr lang="en-US" sz="900" dirty="0"/>
+          </a:p>
+        </p:txBody>
+      </p:sp>
+      <p:sp>
+        <p:nvSpPr>
+          <p:cNvPr id="18" name="Shape 14"/>
+          <p:cNvSpPr/>
+          <p:nvPr/>
+        </p:nvSpPr>
+        <p:spPr>
+          <a:xfrm>
+            <a:off x="7960157" y="1234440"/>
+            <a:ext cx="3600602" cy="2290572"/>
+          </a:xfrm>
+          <a:prstGeom prst="roundRect">
+            <a:avLst>
+              <a:gd name="adj" fmla="val 2395"/>
+            </a:avLst>
+          </a:prstGeom>
+          <a:solidFill>
+            <a:srgbClr val="F0F0F0"/>
+          </a:solidFill>
+          <a:ln w="6350">
+            <a:solidFill>
+              <a:srgbClr val="E0E0E0"/>
+            </a:solidFill>
+            <a:prstDash val="solid"/>
+          </a:ln>
+        </p:spPr>
+      </p:sp>
+      <p:pic>
+        <p:nvPicPr>
+          <p:cNvPr id="19" name="Image 2" descr="preencoded.png">    </p:cNvPr>
+          <p:cNvPicPr>
+            <a:picLocks noChangeAspect="1"/>
+          </p:cNvPicPr>
+          <p:nvPr/>
+        </p:nvPicPr>
+        <p:blipFill>
+          <a:blip r:embed="rId3"/>
+          <a:srcRect l="0" r="0" t="0" b="0"/>
+          <a:stretch/>
+        </p:blipFill>
+        <p:spPr>
+          <a:xfrm>
+            <a:off x="7960157" y="1234440"/>
+            <a:ext cx="3600602" cy="2290572"/>
+          </a:xfrm>
+          <a:prstGeom prst="rect">
+            <a:avLst/>
+          </a:prstGeom>
+        </p:spPr>
+      </p:pic>
+      <p:sp>
+        <p:nvSpPr>
+          <p:cNvPr id="20" name="Shape 15"/>
+          <p:cNvSpPr/>
+          <p:nvPr/>
+        </p:nvSpPr>
+        <p:spPr>
+          <a:xfrm>
+            <a:off x="8033309" y="1307592"/>
+            <a:ext cx="868680" cy="237744"/>
+          </a:xfrm>
+          <a:prstGeom prst="rect">
+            <a:avLst/>
+          </a:prstGeom>
+          <a:solidFill>
+            <a:srgbClr val="10161F">
+              <a:alpha val="80000"/>
+            </a:srgbClr>
+          </a:solidFill>
+          <a:ln/>
+        </p:spPr>
+      </p:sp>
+      <p:sp>
+        <p:nvSpPr>
+          <p:cNvPr id="21" name="Text 16"/>
+          <p:cNvSpPr/>
+          <p:nvPr/>
+        </p:nvSpPr>
+        <p:spPr>
+          <a:xfrm>
+            <a:off x="8033309" y="1307592"/>
+            <a:ext cx="868680" cy="237744"/>
+          </a:xfrm>
+          <a:prstGeom prst="rect">
+            <a:avLst/>
+          </a:prstGeom>
+          <a:noFill/>
+          <a:ln/>
+        </p:spPr>
+        <p:txBody>
+          <a:bodyPr wrap="square" lIns="0" tIns="0" rIns="0" bIns="0" rtlCol="0" anchor="ctr"/>
+          <a:lstStyle/>
+          <a:p>
+            <a:pPr algn="ctr" indent="0" marL="0">
+              <a:buNone/>
+            </a:pPr>
+            <a:r>
+              <a:rPr lang="en-US" sz="900" b="1" dirty="0">
+                <a:solidFill>
+                  <a:srgbClr val="FFFFFF"/>
+                </a:solidFill>
+                <a:latin typeface="맑은 고딕" pitchFamily="34" charset="0"/>
+                <a:ea typeface="맑은 고딕" pitchFamily="34" charset="-122"/>
+                <a:cs typeface="맑은 고딕" pitchFamily="34" charset="-120"/>
+              </a:rPr>
+              <a:t>실내 공간</a:t>
+            </a:r>
+            <a:endParaRPr lang="en-US" sz="900" dirty="0"/>
+          </a:p>
+        </p:txBody>
+      </p:sp>
+      <p:sp>
+        <p:nvSpPr>
+          <p:cNvPr id="22" name="Shape 17"/>
+          <p:cNvSpPr/>
+          <p:nvPr/>
+        </p:nvSpPr>
+        <p:spPr>
+          <a:xfrm>
+            <a:off x="7960157" y="3232404"/>
+            <a:ext cx="3600602" cy="292608"/>
+          </a:xfrm>
+          <a:prstGeom prst="rect">
+            <a:avLst/>
+          </a:prstGeom>
+          <a:solidFill>
+            <a:srgbClr val="000000">
+              <a:alpha val="60000"/>
+            </a:srgbClr>
+          </a:solidFill>
+          <a:ln/>
+        </p:spPr>
+      </p:sp>
+      <p:sp>
+        <p:nvSpPr>
+          <p:cNvPr id="23" name="Text 18"/>
+          <p:cNvSpPr/>
+          <p:nvPr/>
+        </p:nvSpPr>
+        <p:spPr>
+          <a:xfrm>
+            <a:off x="8069885" y="3232404"/>
+            <a:ext cx="3381146" cy="292608"/>
+          </a:xfrm>
+          <a:prstGeom prst="rect">
+            <a:avLst/>
+          </a:prstGeom>
+          <a:noFill/>
+          <a:ln/>
+        </p:spPr>
+        <p:txBody>
+          <a:bodyPr wrap="square" lIns="0" tIns="0" rIns="0" bIns="0" rtlCol="0" anchor="ctr"/>
+          <a:lstStyle/>
+          <a:p>
+            <a:pPr indent="0" marL="0">
+              <a:buNone/>
+            </a:pPr>
+            <a:r>
+              <a:rPr lang="en-US" sz="900" dirty="0">
+                <a:solidFill>
+                  <a:srgbClr val="FFFFFF"/>
+                </a:solidFill>
+                <a:latin typeface="맑은 고딕" pitchFamily="34" charset="0"/>
+                <a:ea typeface="맑은 고딕" pitchFamily="34" charset="-122"/>
+                <a:cs typeface="맑은 고딕" pitchFamily="34" charset="-120"/>
+              </a:rPr>
+              <a:t>건물 측면부 및 도로 접면</a:t>
+            </a:r>
+            <a:endParaRPr lang="en-US" sz="900" dirty="0"/>
+          </a:p>
+        </p:txBody>
+      </p:sp>
+      <p:sp>
+        <p:nvSpPr>
+          <p:cNvPr id="24" name="Shape 19"/>
+          <p:cNvSpPr/>
+          <p:nvPr/>
+        </p:nvSpPr>
+        <p:spPr>
+          <a:xfrm>
+            <a:off x="502920" y="3653028"/>
+            <a:ext cx="3600602" cy="2290572"/>
+          </a:xfrm>
+          <a:prstGeom prst="roundRect">
+            <a:avLst>
+              <a:gd name="adj" fmla="val 2395"/>
+            </a:avLst>
+          </a:prstGeom>
+          <a:solidFill>
+            <a:srgbClr val="F0F0F0"/>
+          </a:solidFill>
+          <a:ln w="6350">
+            <a:solidFill>
+              <a:srgbClr val="E0E0E0"/>
+            </a:solidFill>
+            <a:prstDash val="solid"/>
+          </a:ln>
+        </p:spPr>
+      </p:sp>
+      <p:pic>
+        <p:nvPicPr>
+          <p:cNvPr id="25" name="Image 3" descr="preencoded.png">    </p:cNvPr>
+          <p:cNvPicPr>
+            <a:picLocks noChangeAspect="1"/>
+          </p:cNvPicPr>
+          <p:nvPr/>
+        </p:nvPicPr>
+        <p:blipFill>
+          <a:blip r:embed="rId4"/>
+          <a:srcRect l="0" r="0" t="0" b="0"/>
+          <a:stretch/>
+        </p:blipFill>
+        <p:spPr>
+          <a:xfrm>
+            <a:off x="502920" y="3653028"/>
+            <a:ext cx="3600602" cy="2290572"/>
+          </a:xfrm>
+          <a:prstGeom prst="rect">
+            <a:avLst/>
+          </a:prstGeom>
+        </p:spPr>
+      </p:pic>
+      <p:sp>
+        <p:nvSpPr>
+          <p:cNvPr id="26" name="Shape 20"/>
+          <p:cNvSpPr/>
+          <p:nvPr/>
+        </p:nvSpPr>
+        <p:spPr>
+          <a:xfrm>
+            <a:off x="576072" y="3726180"/>
+            <a:ext cx="822960" cy="237744"/>
+          </a:xfrm>
+          <a:prstGeom prst="rect">
+            <a:avLst/>
+          </a:prstGeom>
+          <a:solidFill>
+            <a:srgbClr val="10161F">
+              <a:alpha val="80000"/>
+            </a:srgbClr>
+          </a:solidFill>
+          <a:ln/>
+        </p:spPr>
+      </p:sp>
+      <p:sp>
+        <p:nvSpPr>
+          <p:cNvPr id="27" name="Text 21"/>
+          <p:cNvSpPr/>
+          <p:nvPr/>
+        </p:nvSpPr>
+        <p:spPr>
+          <a:xfrm>
+            <a:off x="576072" y="3726180"/>
+            <a:ext cx="822960" cy="237744"/>
+          </a:xfrm>
+          <a:prstGeom prst="rect">
+            <a:avLst/>
+          </a:prstGeom>
+          <a:noFill/>
+          <a:ln/>
+        </p:spPr>
+        <p:txBody>
+          <a:bodyPr wrap="square" lIns="0" tIns="0" rIns="0" bIns="0" rtlCol="0" anchor="ctr"/>
+          <a:lstStyle/>
+          <a:p>
+            <a:pPr algn="ctr" indent="0" marL="0">
+              <a:buNone/>
+            </a:pPr>
+            <a:r>
+              <a:rPr lang="en-US" sz="900" b="1" dirty="0">
+                <a:solidFill>
+                  <a:srgbClr val="FFFFFF"/>
+                </a:solidFill>
+                <a:latin typeface="맑은 고딕" pitchFamily="34" charset="0"/>
+                <a:ea typeface="맑은 고딕" pitchFamily="34" charset="-122"/>
+                <a:cs typeface="맑은 고딕" pitchFamily="34" charset="-120"/>
+              </a:rPr>
+              <a:t>주차장</a:t>
+            </a:r>
+            <a:endParaRPr lang="en-US" sz="900" dirty="0"/>
+          </a:p>
+        </p:txBody>
+      </p:sp>
+      <p:sp>
+        <p:nvSpPr>
+          <p:cNvPr id="28" name="Shape 22"/>
+          <p:cNvSpPr/>
+          <p:nvPr/>
+        </p:nvSpPr>
+        <p:spPr>
+          <a:xfrm>
+            <a:off x="502920" y="5650992"/>
+            <a:ext cx="3600602" cy="292608"/>
+          </a:xfrm>
+          <a:prstGeom prst="rect">
+            <a:avLst/>
+          </a:prstGeom>
+          <a:solidFill>
+            <a:srgbClr val="000000">
+              <a:alpha val="60000"/>
+            </a:srgbClr>
+          </a:solidFill>
+          <a:ln/>
+        </p:spPr>
+      </p:sp>
+      <p:sp>
+        <p:nvSpPr>
+          <p:cNvPr id="29" name="Text 23"/>
+          <p:cNvSpPr/>
+          <p:nvPr/>
+        </p:nvSpPr>
+        <p:spPr>
+          <a:xfrm>
+            <a:off x="612648" y="5650992"/>
+            <a:ext cx="3381146" cy="292608"/>
+          </a:xfrm>
+          <a:prstGeom prst="rect">
+            <a:avLst/>
+          </a:prstGeom>
+          <a:noFill/>
+          <a:ln/>
+        </p:spPr>
+        <p:txBody>
+          <a:bodyPr wrap="square" lIns="0" tIns="0" rIns="0" bIns="0" rtlCol="0" anchor="ctr"/>
+          <a:lstStyle/>
+          <a:p>
+            <a:pPr indent="0" marL="0">
+              <a:buNone/>
+            </a:pPr>
+            <a:r>
+              <a:rPr lang="en-US" sz="900" dirty="0">
+                <a:solidFill>
+                  <a:srgbClr val="FFFFFF"/>
+                </a:solidFill>
+                <a:latin typeface="맑은 고딕" pitchFamily="34" charset="0"/>
+                <a:ea typeface="맑은 고딕" pitchFamily="34" charset="-122"/>
+                <a:cs typeface="맑은 고딕" pitchFamily="34" charset="-120"/>
+              </a:rPr>
+              <a:t>자주식/기계식 주차장 진입로 (총 26대)</a:t>
+            </a:r>
+            <a:endParaRPr lang="en-US" sz="900" dirty="0"/>
+          </a:p>
+        </p:txBody>
+      </p:sp>
+      <p:sp>
+        <p:nvSpPr>
+          <p:cNvPr id="30" name="Shape 24"/>
+          <p:cNvSpPr/>
+          <p:nvPr/>
+        </p:nvSpPr>
+        <p:spPr>
+          <a:xfrm>
+            <a:off x="4231538" y="3653028"/>
+            <a:ext cx="3600602" cy="2290572"/>
+          </a:xfrm>
+          <a:prstGeom prst="roundRect">
+            <a:avLst>
+              <a:gd name="adj" fmla="val 2395"/>
+            </a:avLst>
+          </a:prstGeom>
+          <a:solidFill>
+            <a:srgbClr val="F0F0F0"/>
+          </a:solidFill>
+          <a:ln w="6350">
+            <a:solidFill>
+              <a:srgbClr val="E0E0E0"/>
+            </a:solidFill>
+            <a:prstDash val="solid"/>
+          </a:ln>
+        </p:spPr>
+      </p:sp>
+      <p:pic>
+        <p:nvPicPr>
+          <p:cNvPr id="31" name="Image 4" descr="preencoded.png">    </p:cNvPr>
+          <p:cNvPicPr>
+            <a:picLocks noChangeAspect="1"/>
+          </p:cNvPicPr>
+          <p:nvPr/>
+        </p:nvPicPr>
+        <p:blipFill>
+          <a:blip r:embed="rId5"/>
+          <a:srcRect l="0" r="0" t="0" b="0"/>
+          <a:stretch/>
+        </p:blipFill>
+        <p:spPr>
+          <a:xfrm>
+            <a:off x="4231538" y="3653028"/>
+            <a:ext cx="3600602" cy="2290572"/>
+          </a:xfrm>
+          <a:prstGeom prst="rect">
+            <a:avLst/>
+          </a:prstGeom>
+        </p:spPr>
+      </p:pic>
+      <p:sp>
+        <p:nvSpPr>
+          <p:cNvPr id="32" name="Shape 25"/>
+          <p:cNvSpPr/>
+          <p:nvPr/>
+        </p:nvSpPr>
+        <p:spPr>
+          <a:xfrm>
+            <a:off x="4304690" y="3726180"/>
+            <a:ext cx="996696" cy="237744"/>
+          </a:xfrm>
+          <a:prstGeom prst="rect">
+            <a:avLst/>
+          </a:prstGeom>
+          <a:solidFill>
+            <a:srgbClr val="10161F">
+              <a:alpha val="80000"/>
+            </a:srgbClr>
+          </a:solidFill>
+          <a:ln/>
+        </p:spPr>
+      </p:sp>
+      <p:sp>
+        <p:nvSpPr>
+          <p:cNvPr id="33" name="Text 26"/>
+          <p:cNvSpPr/>
+          <p:nvPr/>
+        </p:nvSpPr>
+        <p:spPr>
+          <a:xfrm>
+            <a:off x="4304690" y="3726180"/>
+            <a:ext cx="996696" cy="237744"/>
+          </a:xfrm>
+          <a:prstGeom prst="rect">
+            <a:avLst/>
+          </a:prstGeom>
+          <a:noFill/>
+          <a:ln/>
+        </p:spPr>
+        <p:txBody>
+          <a:bodyPr wrap="square" lIns="0" tIns="0" rIns="0" bIns="0" rtlCol="0" anchor="ctr"/>
+          <a:lstStyle/>
+          <a:p>
+            <a:pPr algn="ctr" indent="0" marL="0">
+              <a:buNone/>
+            </a:pPr>
+            <a:r>
+              <a:rPr lang="en-US" sz="900" b="1" dirty="0">
+                <a:solidFill>
+                  <a:srgbClr val="FFFFFF"/>
+                </a:solidFill>
+                <a:latin typeface="맑은 고딕" pitchFamily="34" charset="0"/>
+                <a:ea typeface="맑은 고딕" pitchFamily="34" charset="-122"/>
+                <a:cs typeface="맑은 고딕" pitchFamily="34" charset="-120"/>
+              </a:rPr>
+              <a:t>옥상/테라스</a:t>
+            </a:r>
+            <a:endParaRPr lang="en-US" sz="900" dirty="0"/>
+          </a:p>
+        </p:txBody>
+      </p:sp>
+      <p:sp>
+        <p:nvSpPr>
+          <p:cNvPr id="34" name="Shape 27"/>
+          <p:cNvSpPr/>
+          <p:nvPr/>
+        </p:nvSpPr>
+        <p:spPr>
+          <a:xfrm>
+            <a:off x="4231538" y="5650992"/>
+            <a:ext cx="3600602" cy="292608"/>
+          </a:xfrm>
+          <a:prstGeom prst="rect">
+            <a:avLst/>
+          </a:prstGeom>
+          <a:solidFill>
+            <a:srgbClr val="000000">
+              <a:alpha val="60000"/>
+            </a:srgbClr>
+          </a:solidFill>
+          <a:ln/>
+        </p:spPr>
+      </p:sp>
+      <p:sp>
+        <p:nvSpPr>
+          <p:cNvPr id="35" name="Text 28"/>
+          <p:cNvSpPr/>
+          <p:nvPr/>
+        </p:nvSpPr>
+        <p:spPr>
+          <a:xfrm>
+            <a:off x="4341266" y="5650992"/>
+            <a:ext cx="3381146" cy="292608"/>
+          </a:xfrm>
+          <a:prstGeom prst="rect">
+            <a:avLst/>
+          </a:prstGeom>
+          <a:noFill/>
+          <a:ln/>
+        </p:spPr>
+        <p:txBody>
+          <a:bodyPr wrap="square" lIns="0" tIns="0" rIns="0" bIns="0" rtlCol="0" anchor="ctr"/>
+          <a:lstStyle/>
+          <a:p>
+            <a:pPr indent="0" marL="0">
+              <a:buNone/>
+            </a:pPr>
+            <a:r>
+              <a:rPr lang="en-US" sz="900" dirty="0">
+                <a:solidFill>
+                  <a:srgbClr val="FFFFFF"/>
+                </a:solidFill>
+                <a:latin typeface="맑은 고딕" pitchFamily="34" charset="0"/>
+                <a:ea typeface="맑은 고딕" pitchFamily="34" charset="-122"/>
+                <a:cs typeface="맑은 고딕" pitchFamily="34" charset="-120"/>
+              </a:rPr>
+              <a:t>상층부 외관 및 옥상 공간</a:t>
+            </a:r>
+            <a:endParaRPr lang="en-US" sz="900" dirty="0"/>
+          </a:p>
+        </p:txBody>
+      </p:sp>
+      <p:sp>
+        <p:nvSpPr>
+          <p:cNvPr id="36" name="Text 29"/>
+          <p:cNvSpPr/>
+          <p:nvPr/>
+        </p:nvSpPr>
+        <p:spPr>
+          <a:xfrm>
+            <a:off x="502920" y="6382512"/>
+            <a:ext cx="7315200" cy="219456"/>
+          </a:xfrm>
+          <a:prstGeom prst="rect">
+            <a:avLst/>
+          </a:prstGeom>
+          <a:noFill/>
+          <a:ln/>
+        </p:spPr>
+        <p:txBody>
+          <a:bodyPr wrap="square" lIns="0" tIns="0" rIns="0" bIns="0" rtlCol="0" anchor="ctr"/>
+          <a:lstStyle/>
+          <a:p>
+            <a:pPr indent="0" marL="0">
+              <a:buNone/>
+            </a:pPr>
+            <a:r>
+              <a:rPr lang="en-US" sz="800" dirty="0">
+                <a:solidFill>
+                  <a:srgbClr val="5B6B73"/>
+                </a:solidFill>
+                <a:latin typeface="맑은 고딕" pitchFamily="34" charset="0"/>
+                <a:ea typeface="맑은 고딕" pitchFamily="34" charset="-122"/>
+                <a:cs typeface="맑은 고딕" pitchFamily="34" charset="-120"/>
+              </a:rPr>
+              <a:t>CRE DEAL   |   IM-SINSA-590</a:t>
+            </a:r>
+            <a:endParaRPr lang="en-US" sz="800" dirty="0"/>
+          </a:p>
+        </p:txBody>
+      </p:sp>
+      <p:sp>
+        <p:nvSpPr>
+          <p:cNvPr id="37" name="Text 30"/>
+          <p:cNvSpPr/>
+          <p:nvPr/>
+        </p:nvSpPr>
+        <p:spPr>
+          <a:xfrm>
+            <a:off x="10774375" y="6382512"/>
+            <a:ext cx="914400" cy="219456"/>
+          </a:xfrm>
+          <a:prstGeom prst="rect">
+            <a:avLst/>
+          </a:prstGeom>
+          <a:noFill/>
+          <a:ln/>
+        </p:spPr>
+        <p:txBody>
+          <a:bodyPr wrap="square" lIns="0" tIns="0" rIns="0" bIns="0" rtlCol="0" anchor="ctr"/>
+          <a:lstStyle/>
+          <a:p>
+            <a:pPr algn="r" indent="0" marL="0">
+              <a:buNone/>
+            </a:pPr>
+            <a:r>
+              <a:rPr lang="en-US" sz="900" b="1" dirty="0">
+                <a:solidFill>
+                  <a:srgbClr val="B8860B"/>
+                </a:solidFill>
+                <a:latin typeface="Arial" pitchFamily="34" charset="0"/>
+                <a:ea typeface="Arial" pitchFamily="34" charset="-122"/>
+                <a:cs typeface="Arial" pitchFamily="34" charset="-120"/>
+              </a:rPr>
+              <a:t>7</a:t>
+            </a:r>
+            <a:endParaRPr lang="en-US" sz="900" dirty="0"/>
+          </a:p>
+        </p:txBody>
+      </p:sp>
+    </p:spTree>
+  </p:cSld>
+  <p:clrMapOvr>
+    <a:masterClrMapping/>
+  </p:clrMapOvr>
+</p:sld>
+</file>
+
+<file path=ppt/slides/slide8.xml><?xml version="1.0" encoding="utf-8"?>
+<p:sld xmlns:a="http://schemas.openxmlformats.org/drawingml/2006/main" xmlns:r="http://schemas.openxmlformats.org/officeDocument/2006/relationships" xmlns:p="http://schemas.openxmlformats.org/presentationml/2006/main">
+  <p:cSld name="Slide 8">
     <p:bg>
       <p:bgPr>
         <a:solidFill>
@@ -7800,7 +9484,7 @@
                 <a:ea typeface="Arial" pitchFamily="34" charset="-122"/>
                 <a:cs typeface="Arial" pitchFamily="34" charset="-120"/>
               </a:rPr>
-              <a:t>07</a:t>
+              <a:t>08</a:t>
             </a:r>
             <a:endParaRPr lang="en-US" sz="1300" dirty="0"/>
           </a:p>
@@ -9395,7 +11079,7 @@
                 <a:ea typeface="Arial" pitchFamily="34" charset="-122"/>
                 <a:cs typeface="Arial" pitchFamily="34" charset="-120"/>
               </a:rPr>
-              <a:t>7</a:t>
+              <a:t>8</a:t>
             </a:r>
             <a:endParaRPr lang="en-US" sz="900" dirty="0"/>
           </a:p>

--- a/docs/test/golden-outputs/p2-sinsa-r3/captures/sinsa_basic.pptx
+++ b/docs/test/golden-outputs/p2-sinsa-r3/captures/sinsa_basic.pptx
@@ -12,10 +12,9 @@
     <p:sldId id="260" r:id="rId6"/>
     <p:sldId id="261" r:id="rId7"/>
     <p:sldId id="262" r:id="rId8"/>
-    <p:sldId id="263" r:id="rId9"/>
   </p:sldIdLst>
   <p:notesMasterIdLst>
-    <p:notesMasterId r:id="rId10"/>
+    <p:notesMasterId r:id="rId9"/>
   </p:notesMasterIdLst>
   <p:sldSz cx="12192000" cy="6858000"/>
   <p:notesSz cx="6858000" cy="12192000"/>
@@ -1061,94 +1060,6 @@
             <a:fld id="{F7021451-1387-4CA6-816F-3879F97B5CBC}" type="slidenum">
               <a:rPr lang="en-US"/>
               <a:t>7</a:t>
-            </a:fld>
-            <a:endParaRPr lang="en-US"/>
-          </a:p>
-        </p:txBody>
-      </p:sp>
-    </p:spTree>
-    <p:extLst>
-      <p:ext uri="{BB962C8B-B14F-4D97-AF65-F5344CB8AC3E}">
-        <p14:creationId xmlns:p14="http://schemas.microsoft.com/office/powerpoint/2010/main" val="1024086991"/>
-      </p:ext>
-    </p:extLst>
-  </p:cSld>
-  <p:clrMapOvr>
-    <a:masterClrMapping/>
-  </p:clrMapOvr>
-</p:notes>
-</file>
-
-<file path=ppt/notesSlides/notesSlide8.xml><?xml version="1.0" encoding="utf-8"?>
-<p:notes xmlns:a="http://schemas.openxmlformats.org/drawingml/2006/main" xmlns:r="http://schemas.openxmlformats.org/officeDocument/2006/relationships" xmlns:p="http://schemas.openxmlformats.org/presentationml/2006/main">
-  <p:cSld>
-    <p:spTree>
-      <p:nvGrpSpPr>
-        <p:cNvPr id="1" name=""/>
-        <p:cNvGrpSpPr/>
-        <p:nvPr/>
-      </p:nvGrpSpPr>
-      <p:grpSpPr>
-        <a:xfrm>
-          <a:off x="0" y="0"/>
-          <a:ext cx="0" cy="0"/>
-          <a:chOff x="0" y="0"/>
-          <a:chExt cx="0" cy="0"/>
-        </a:xfrm>
-      </p:grpSpPr>
-      <p:sp>
-        <p:nvSpPr>
-          <p:cNvPr id="2" name="Slide Image Placeholder 1"/>
-          <p:cNvSpPr>
-            <a:spLocks noGrp="1" noRot="1" noChangeAspect="1"/>
-          </p:cNvSpPr>
-          <p:nvPr>
-            <p:ph type="sldImg"/>
-          </p:nvPr>
-        </p:nvSpPr>
-        <p:spPr/>
-      </p:sp>
-      <p:sp>
-        <p:nvSpPr>
-          <p:cNvPr id="3" name="Notes Placeholder 2"/>
-          <p:cNvSpPr>
-            <a:spLocks noGrp="1"/>
-          </p:cNvSpPr>
-          <p:nvPr>
-            <p:ph type="body" idx="1"/>
-          </p:nvPr>
-        </p:nvSpPr>
-        <p:spPr/>
-        <p:txBody>
-          <a:bodyPr/>
-          <a:lstStyle/>
-          <a:p>
-            <a:r>
-              <a:rPr lang="en-US" dirty="0"/>
-              <a:t/>
-            </a:r>
-            <a:endParaRPr lang="en-US" dirty="0"/>
-          </a:p>
-        </p:txBody>
-      </p:sp>
-      <p:sp>
-        <p:nvSpPr>
-          <p:cNvPr id="4" name="Slide Number Placeholder 3"/>
-          <p:cNvSpPr>
-            <a:spLocks noGrp="1"/>
-          </p:cNvSpPr>
-          <p:nvPr>
-            <p:ph type="sldNum" sz="quarter" idx="10"/>
-          </p:nvPr>
-        </p:nvSpPr>
-        <p:spPr/>
-        <p:txBody>
-          <a:bodyPr/>
-          <a:lstStyle/>
-          <a:p>
-            <a:fld id="{F7021451-1387-4CA6-816F-3879F97B5CBC}" type="slidenum">
-              <a:rPr lang="en-US"/>
-              <a:t>8</a:t>
             </a:fld>
             <a:endParaRPr lang="en-US"/>
           </a:p>
@@ -5600,7 +5511,7 @@
         <p:spPr>
           <a:xfrm>
             <a:off x="5989320" y="1801368"/>
-            <a:ext cx="1560003" cy="493776"/>
+            <a:ext cx="1560003" cy="347472"/>
           </a:xfrm>
           <a:prstGeom prst="rect">
             <a:avLst/>
@@ -5619,7 +5530,7 @@
               <a:buNone/>
             </a:pPr>
             <a:r>
-              <a:rPr lang="en-US" sz="1300" dirty="0">
+              <a:rPr lang="en-US" sz="1150" dirty="0">
                 <a:solidFill>
                   <a:srgbClr val="5B6B73"/>
                 </a:solidFill>
@@ -5629,7 +5540,7 @@
               </a:rPr>
               <a:t>소재지</a:t>
             </a:r>
-            <a:endParaRPr lang="en-US" sz="1300" dirty="0"/>
+            <a:endParaRPr lang="en-US" sz="1150" dirty="0"/>
           </a:p>
         </p:txBody>
       </p:sp>
@@ -5642,7 +5553,7 @@
         <p:spPr>
           <a:xfrm>
             <a:off x="7549323" y="1801368"/>
-            <a:ext cx="4011436" cy="493776"/>
+            <a:ext cx="4011436" cy="347472"/>
           </a:xfrm>
           <a:prstGeom prst="rect">
             <a:avLst/>
@@ -5661,7 +5572,7 @@
               <a:buNone/>
             </a:pPr>
             <a:r>
-              <a:rPr lang="en-US" sz="1300" b="1" dirty="0">
+              <a:rPr lang="en-US" sz="1150" b="1" dirty="0">
                 <a:solidFill>
                   <a:srgbClr val="132A3A"/>
                 </a:solidFill>
@@ -5671,7 +5582,7 @@
               </a:rPr>
               <a:t>서울특별시 강남구 신사동 590</a:t>
             </a:r>
-            <a:endParaRPr lang="en-US" sz="1300" dirty="0"/>
+            <a:endParaRPr lang="en-US" sz="1150" dirty="0"/>
           </a:p>
         </p:txBody>
       </p:sp>
@@ -5683,7 +5594,7 @@
         </p:nvSpPr>
         <p:spPr>
           <a:xfrm>
-            <a:off x="5989320" y="2295144"/>
+            <a:off x="5989320" y="2148840"/>
             <a:ext cx="5571439" cy="0"/>
           </a:xfrm>
           <a:prstGeom prst="line">
@@ -5706,8 +5617,8 @@
         </p:nvSpPr>
         <p:spPr>
           <a:xfrm>
-            <a:off x="5989320" y="2295144"/>
-            <a:ext cx="1560003" cy="493776"/>
+            <a:off x="5989320" y="2148840"/>
+            <a:ext cx="1560003" cy="347472"/>
           </a:xfrm>
           <a:prstGeom prst="rect">
             <a:avLst/>
@@ -5726,7 +5637,7 @@
               <a:buNone/>
             </a:pPr>
             <a:r>
-              <a:rPr lang="en-US" sz="1300" dirty="0">
+              <a:rPr lang="en-US" sz="1150" dirty="0">
                 <a:solidFill>
                   <a:srgbClr val="5B6B73"/>
                 </a:solidFill>
@@ -5736,7 +5647,7 @@
               </a:rPr>
               <a:t>대중교통</a:t>
             </a:r>
-            <a:endParaRPr lang="en-US" sz="1300" dirty="0"/>
+            <a:endParaRPr lang="en-US" sz="1150" dirty="0"/>
           </a:p>
         </p:txBody>
       </p:sp>
@@ -5748,8 +5659,8 @@
         </p:nvSpPr>
         <p:spPr>
           <a:xfrm>
-            <a:off x="7549323" y="2295144"/>
-            <a:ext cx="4011436" cy="493776"/>
+            <a:off x="7549323" y="2148840"/>
+            <a:ext cx="4011436" cy="347472"/>
           </a:xfrm>
           <a:prstGeom prst="rect">
             <a:avLst/>
@@ -5768,7 +5679,7 @@
               <a:buNone/>
             </a:pPr>
             <a:r>
-              <a:rPr lang="en-US" sz="1300" b="1" dirty="0">
+              <a:rPr lang="en-US" sz="1150" b="1" dirty="0">
                 <a:solidFill>
                   <a:srgbClr val="132A3A"/>
                 </a:solidFill>
@@ -5778,7 +5689,7 @@
               </a:rPr>
               <a:t>압구정역 도보 5분 (약 450m)</a:t>
             </a:r>
-            <a:endParaRPr lang="en-US" sz="1300" dirty="0"/>
+            <a:endParaRPr lang="en-US" sz="1150" dirty="0"/>
           </a:p>
         </p:txBody>
       </p:sp>
@@ -5790,7 +5701,7 @@
         </p:nvSpPr>
         <p:spPr>
           <a:xfrm>
-            <a:off x="5989320" y="2788920"/>
+            <a:off x="5989320" y="2496312"/>
             <a:ext cx="5571439" cy="0"/>
           </a:xfrm>
           <a:prstGeom prst="line">
@@ -5813,8 +5724,8 @@
         </p:nvSpPr>
         <p:spPr>
           <a:xfrm>
-            <a:off x="5989320" y="2788920"/>
-            <a:ext cx="1560003" cy="493776"/>
+            <a:off x="5989320" y="2496312"/>
+            <a:ext cx="1560003" cy="347472"/>
           </a:xfrm>
           <a:prstGeom prst="rect">
             <a:avLst/>
@@ -5833,7 +5744,7 @@
               <a:buNone/>
             </a:pPr>
             <a:r>
-              <a:rPr lang="en-US" sz="1300" dirty="0">
+              <a:rPr lang="en-US" sz="1150" dirty="0">
                 <a:solidFill>
                   <a:srgbClr val="5B6B73"/>
                 </a:solidFill>
@@ -5843,7 +5754,7 @@
               </a:rPr>
               <a:t>도로접면</a:t>
             </a:r>
-            <a:endParaRPr lang="en-US" sz="1300" dirty="0"/>
+            <a:endParaRPr lang="en-US" sz="1150" dirty="0"/>
           </a:p>
         </p:txBody>
       </p:sp>
@@ -5855,8 +5766,8 @@
         </p:nvSpPr>
         <p:spPr>
           <a:xfrm>
-            <a:off x="7549323" y="2788920"/>
-            <a:ext cx="4011436" cy="493776"/>
+            <a:off x="7549323" y="2496312"/>
+            <a:ext cx="4011436" cy="347472"/>
           </a:xfrm>
           <a:prstGeom prst="rect">
             <a:avLst/>
@@ -5875,7 +5786,7 @@
               <a:buNone/>
             </a:pPr>
             <a:r>
-              <a:rPr lang="en-US" sz="1300" b="1" dirty="0">
+              <a:rPr lang="en-US" sz="1150" b="1" dirty="0">
                 <a:solidFill>
                   <a:srgbClr val="132A3A"/>
                 </a:solidFill>
@@ -5885,7 +5796,7 @@
               </a:rPr>
               <a:t>논현로 이면 코너 (북측 8m, 동측 6m)</a:t>
             </a:r>
-            <a:endParaRPr lang="en-US" sz="1300" dirty="0"/>
+            <a:endParaRPr lang="en-US" sz="1150" dirty="0"/>
           </a:p>
         </p:txBody>
       </p:sp>
@@ -5897,7 +5808,7 @@
         </p:nvSpPr>
         <p:spPr>
           <a:xfrm>
-            <a:off x="5989320" y="3282696"/>
+            <a:off x="5989320" y="2843784"/>
             <a:ext cx="5571439" cy="0"/>
           </a:xfrm>
           <a:prstGeom prst="line">
@@ -5920,8 +5831,8 @@
         </p:nvSpPr>
         <p:spPr>
           <a:xfrm>
-            <a:off x="5989320" y="3282696"/>
-            <a:ext cx="1560003" cy="493776"/>
+            <a:off x="5989320" y="2843784"/>
+            <a:ext cx="1560003" cy="347472"/>
           </a:xfrm>
           <a:prstGeom prst="rect">
             <a:avLst/>
@@ -5940,7 +5851,7 @@
               <a:buNone/>
             </a:pPr>
             <a:r>
-              <a:rPr lang="en-US" sz="1300" dirty="0">
+              <a:rPr lang="en-US" sz="1150" dirty="0">
                 <a:solidFill>
                   <a:srgbClr val="5B6B73"/>
                 </a:solidFill>
@@ -5950,7 +5861,7 @@
               </a:rPr>
               <a:t>상권권역</a:t>
             </a:r>
-            <a:endParaRPr lang="en-US" sz="1300" dirty="0"/>
+            <a:endParaRPr lang="en-US" sz="1150" dirty="0"/>
           </a:p>
         </p:txBody>
       </p:sp>
@@ -5962,8 +5873,8 @@
         </p:nvSpPr>
         <p:spPr>
           <a:xfrm>
-            <a:off x="7549323" y="3282696"/>
-            <a:ext cx="4011436" cy="493776"/>
+            <a:off x="7549323" y="2843784"/>
+            <a:ext cx="4011436" cy="347472"/>
           </a:xfrm>
           <a:prstGeom prst="rect">
             <a:avLst/>
@@ -5982,7 +5893,7 @@
               <a:buNone/>
             </a:pPr>
             <a:r>
-              <a:rPr lang="en-US" sz="1300" b="1" dirty="0">
+              <a:rPr lang="en-US" sz="1150" b="1" dirty="0">
                 <a:solidFill>
                   <a:srgbClr val="132A3A"/>
                 </a:solidFill>
@@ -5992,7 +5903,7 @@
               </a:rPr>
               <a:t>GBD 주요 상업·업무 권역</a:t>
             </a:r>
-            <a:endParaRPr lang="en-US" sz="1300" dirty="0"/>
+            <a:endParaRPr lang="en-US" sz="1150" dirty="0"/>
           </a:p>
         </p:txBody>
       </p:sp>
@@ -6004,7 +5915,7 @@
         </p:nvSpPr>
         <p:spPr>
           <a:xfrm>
-            <a:off x="5989320" y="3776472"/>
+            <a:off x="5989320" y="3191256"/>
             <a:ext cx="5571439" cy="0"/>
           </a:xfrm>
           <a:prstGeom prst="line">
@@ -6027,8 +5938,8 @@
         </p:nvSpPr>
         <p:spPr>
           <a:xfrm>
-            <a:off x="5989320" y="3776472"/>
-            <a:ext cx="1560003" cy="493776"/>
+            <a:off x="5989320" y="3191256"/>
+            <a:ext cx="1560003" cy="347472"/>
           </a:xfrm>
           <a:prstGeom prst="rect">
             <a:avLst/>
@@ -6047,7 +5958,7 @@
               <a:buNone/>
             </a:pPr>
             <a:r>
-              <a:rPr lang="en-US" sz="1300" dirty="0">
+              <a:rPr lang="en-US" sz="1150" dirty="0">
                 <a:solidFill>
                   <a:srgbClr val="5B6B73"/>
                 </a:solidFill>
@@ -6057,7 +5968,7 @@
               </a:rPr>
               <a:t>주요시설</a:t>
             </a:r>
-            <a:endParaRPr lang="en-US" sz="1300" dirty="0"/>
+            <a:endParaRPr lang="en-US" sz="1150" dirty="0"/>
           </a:p>
         </p:txBody>
       </p:sp>
@@ -6069,8 +5980,8 @@
         </p:nvSpPr>
         <p:spPr>
           <a:xfrm>
-            <a:off x="7549323" y="3776472"/>
-            <a:ext cx="4011436" cy="493776"/>
+            <a:off x="7549323" y="3191256"/>
+            <a:ext cx="4011436" cy="347472"/>
           </a:xfrm>
           <a:prstGeom prst="rect">
             <a:avLst/>
@@ -6089,7 +6000,7 @@
               <a:buNone/>
             </a:pPr>
             <a:r>
-              <a:rPr lang="en-US" sz="1300" b="1" dirty="0">
+              <a:rPr lang="en-US" sz="1150" b="1" dirty="0">
                 <a:solidFill>
                   <a:srgbClr val="132A3A"/>
                 </a:solidFill>
@@ -6099,7 +6010,7 @@
               </a:rPr>
               <a:t>강남을지병원사거리 도보 3분 (약 200m)</a:t>
             </a:r>
-            <a:endParaRPr lang="en-US" sz="1300" dirty="0"/>
+            <a:endParaRPr lang="en-US" sz="1150" dirty="0"/>
           </a:p>
         </p:txBody>
       </p:sp>
@@ -6111,7 +6022,7 @@
         </p:nvSpPr>
         <p:spPr>
           <a:xfrm>
-            <a:off x="5989320" y="4407408"/>
+            <a:off x="5989320" y="3648456"/>
             <a:ext cx="5571439" cy="1316736"/>
           </a:xfrm>
           <a:prstGeom prst="roundRect">
@@ -6133,7 +6044,7 @@
         </p:nvSpPr>
         <p:spPr>
           <a:xfrm>
-            <a:off x="5989320" y="4462272"/>
+            <a:off x="5989320" y="3703320"/>
             <a:ext cx="36576" cy="1207008"/>
           </a:xfrm>
           <a:prstGeom prst="rect">
@@ -6153,7 +6064,7 @@
         </p:nvSpPr>
         <p:spPr>
           <a:xfrm>
-            <a:off x="6135624" y="4498848"/>
+            <a:off x="6135624" y="3739896"/>
             <a:ext cx="5315407" cy="201168"/>
           </a:xfrm>
           <a:prstGeom prst="rect">
@@ -6192,7 +6103,7 @@
         </p:nvSpPr>
         <p:spPr>
           <a:xfrm>
-            <a:off x="6135624" y="4700016"/>
+            <a:off x="6135624" y="3941064"/>
             <a:ext cx="5315407" cy="987552"/>
           </a:xfrm>
           <a:prstGeom prst="rect">
@@ -6477,7 +6388,7 @@
                 <a:ea typeface="Arial" pitchFamily="34" charset="-122"/>
                 <a:cs typeface="Arial" pitchFamily="34" charset="-120"/>
               </a:rPr>
-              <a:t>토지 정보</a:t>
+              <a:t>Land &amp; Cadastral</a:t>
             </a:r>
             <a:endParaRPr lang="en-US" sz="950" dirty="0"/>
           </a:p>
@@ -6522,16 +6433,40 @@
           </a:p>
         </p:txBody>
       </p:sp>
-      <p:sp>
-        <p:nvSpPr>
-          <p:cNvPr id="6" name="Text 4"/>
-          <p:cNvSpPr/>
-          <p:nvPr/>
-        </p:nvSpPr>
-        <p:spPr>
-          <a:xfrm>
-            <a:off x="502920" y="1371600"/>
-            <a:ext cx="6858000" cy="237744"/>
+      <p:pic>
+        <p:nvPicPr>
+          <p:cNvPr id="6" name="Image 0" descr="preencoded.png">    </p:cNvPr>
+          <p:cNvPicPr>
+            <a:picLocks noChangeAspect="1"/>
+          </p:cNvPicPr>
+          <p:nvPr/>
+        </p:nvPicPr>
+        <p:blipFill>
+          <a:blip r:embed="rId1"/>
+          <a:stretch>
+            <a:fillRect/>
+          </a:stretch>
+        </p:blipFill>
+        <p:spPr>
+          <a:xfrm>
+            <a:off x="502920" y="1481328"/>
+            <a:ext cx="5120640" cy="4114800"/>
+          </a:xfrm>
+          <a:prstGeom prst="rect">
+            <a:avLst/>
+          </a:prstGeom>
+        </p:spPr>
+      </p:pic>
+      <p:sp>
+        <p:nvSpPr>
+          <p:cNvPr id="7" name="Text 4"/>
+          <p:cNvSpPr/>
+          <p:nvPr/>
+        </p:nvSpPr>
+        <p:spPr>
+          <a:xfrm>
+            <a:off x="5989320" y="1481328"/>
+            <a:ext cx="5571439" cy="237744"/>
           </a:xfrm>
           <a:prstGeom prst="rect">
             <a:avLst/>
@@ -6563,14 +6498,14 @@
       </p:sp>
       <p:sp>
         <p:nvSpPr>
-          <p:cNvPr id="7" name="Text 5"/>
-          <p:cNvSpPr/>
-          <p:nvPr/>
-        </p:nvSpPr>
-        <p:spPr>
-          <a:xfrm>
-            <a:off x="502920" y="1645920"/>
-            <a:ext cx="1920240" cy="329184"/>
+          <p:cNvPr id="8" name="Text 5"/>
+          <p:cNvSpPr/>
+          <p:nvPr/>
+        </p:nvSpPr>
+        <p:spPr>
+          <a:xfrm>
+            <a:off x="5989320" y="1801368"/>
+            <a:ext cx="1560003" cy="347472"/>
           </a:xfrm>
           <a:prstGeom prst="rect">
             <a:avLst/>
@@ -6589,7 +6524,7 @@
               <a:buNone/>
             </a:pPr>
             <a:r>
-              <a:rPr lang="en-US" sz="1200" dirty="0">
+              <a:rPr lang="en-US" sz="1150" dirty="0">
                 <a:solidFill>
                   <a:srgbClr val="5B6B73"/>
                 </a:solidFill>
@@ -6599,20 +6534,20 @@
               </a:rPr>
               <a:t>대지면적</a:t>
             </a:r>
-            <a:endParaRPr lang="en-US" sz="1200" dirty="0"/>
-          </a:p>
-        </p:txBody>
-      </p:sp>
-      <p:sp>
-        <p:nvSpPr>
-          <p:cNvPr id="8" name="Text 6"/>
-          <p:cNvSpPr/>
-          <p:nvPr/>
-        </p:nvSpPr>
-        <p:spPr>
-          <a:xfrm>
-            <a:off x="2423160" y="1645920"/>
-            <a:ext cx="4937760" cy="329184"/>
+            <a:endParaRPr lang="en-US" sz="1150" dirty="0"/>
+          </a:p>
+        </p:txBody>
+      </p:sp>
+      <p:sp>
+        <p:nvSpPr>
+          <p:cNvPr id="9" name="Text 6"/>
+          <p:cNvSpPr/>
+          <p:nvPr/>
+        </p:nvSpPr>
+        <p:spPr>
+          <a:xfrm>
+            <a:off x="7549323" y="1801368"/>
+            <a:ext cx="4011436" cy="347472"/>
           </a:xfrm>
           <a:prstGeom prst="rect">
             <a:avLst/>
@@ -6631,7 +6566,7 @@
               <a:buNone/>
             </a:pPr>
             <a:r>
-              <a:rPr lang="en-US" sz="1200" b="1" dirty="0">
+              <a:rPr lang="en-US" sz="1150" b="1" dirty="0">
                 <a:solidFill>
                   <a:srgbClr val="132A3A"/>
                 </a:solidFill>
@@ -6641,20 +6576,20 @@
               </a:rPr>
               <a:t>1,061.9㎡ (321.2평)</a:t>
             </a:r>
-            <a:endParaRPr lang="en-US" sz="1200" dirty="0"/>
-          </a:p>
-        </p:txBody>
-      </p:sp>
-      <p:sp>
-        <p:nvSpPr>
-          <p:cNvPr id="9" name="Shape 7"/>
-          <p:cNvSpPr/>
-          <p:nvPr/>
-        </p:nvSpPr>
-        <p:spPr>
-          <a:xfrm>
-            <a:off x="502920" y="1975104"/>
-            <a:ext cx="6858000" cy="0"/>
+            <a:endParaRPr lang="en-US" sz="1150" dirty="0"/>
+          </a:p>
+        </p:txBody>
+      </p:sp>
+      <p:sp>
+        <p:nvSpPr>
+          <p:cNvPr id="10" name="Shape 7"/>
+          <p:cNvSpPr/>
+          <p:nvPr/>
+        </p:nvSpPr>
+        <p:spPr>
+          <a:xfrm>
+            <a:off x="5989320" y="2148840"/>
+            <a:ext cx="5571439" cy="0"/>
           </a:xfrm>
           <a:prstGeom prst="line">
             <a:avLst/>
@@ -6670,14 +6605,14 @@
       </p:sp>
       <p:sp>
         <p:nvSpPr>
-          <p:cNvPr id="10" name="Text 8"/>
-          <p:cNvSpPr/>
-          <p:nvPr/>
-        </p:nvSpPr>
-        <p:spPr>
-          <a:xfrm>
-            <a:off x="502920" y="1975104"/>
-            <a:ext cx="1920240" cy="329184"/>
+          <p:cNvPr id="11" name="Text 8"/>
+          <p:cNvSpPr/>
+          <p:nvPr/>
+        </p:nvSpPr>
+        <p:spPr>
+          <a:xfrm>
+            <a:off x="5989320" y="2148840"/>
+            <a:ext cx="1560003" cy="347472"/>
           </a:xfrm>
           <a:prstGeom prst="rect">
             <a:avLst/>
@@ -6696,7 +6631,7 @@
               <a:buNone/>
             </a:pPr>
             <a:r>
-              <a:rPr lang="en-US" sz="1200" dirty="0">
+              <a:rPr lang="en-US" sz="1150" dirty="0">
                 <a:solidFill>
                   <a:srgbClr val="5B6B73"/>
                 </a:solidFill>
@@ -6706,20 +6641,20 @@
               </a:rPr>
               <a:t>용도지역</a:t>
             </a:r>
-            <a:endParaRPr lang="en-US" sz="1200" dirty="0"/>
-          </a:p>
-        </p:txBody>
-      </p:sp>
-      <p:sp>
-        <p:nvSpPr>
-          <p:cNvPr id="11" name="Text 9"/>
-          <p:cNvSpPr/>
-          <p:nvPr/>
-        </p:nvSpPr>
-        <p:spPr>
-          <a:xfrm>
-            <a:off x="2423160" y="1975104"/>
-            <a:ext cx="4937760" cy="329184"/>
+            <a:endParaRPr lang="en-US" sz="1150" dirty="0"/>
+          </a:p>
+        </p:txBody>
+      </p:sp>
+      <p:sp>
+        <p:nvSpPr>
+          <p:cNvPr id="12" name="Text 9"/>
+          <p:cNvSpPr/>
+          <p:nvPr/>
+        </p:nvSpPr>
+        <p:spPr>
+          <a:xfrm>
+            <a:off x="7549323" y="2148840"/>
+            <a:ext cx="4011436" cy="347472"/>
           </a:xfrm>
           <a:prstGeom prst="rect">
             <a:avLst/>
@@ -6738,7 +6673,7 @@
               <a:buNone/>
             </a:pPr>
             <a:r>
-              <a:rPr lang="en-US" sz="1200" b="1" dirty="0">
+              <a:rPr lang="en-US" sz="1150" b="1" dirty="0">
                 <a:solidFill>
                   <a:srgbClr val="132A3A"/>
                 </a:solidFill>
@@ -6748,20 +6683,20 @@
               </a:rPr>
               <a:t>제3종일반주거지역</a:t>
             </a:r>
-            <a:endParaRPr lang="en-US" sz="1200" dirty="0"/>
-          </a:p>
-        </p:txBody>
-      </p:sp>
-      <p:sp>
-        <p:nvSpPr>
-          <p:cNvPr id="12" name="Shape 10"/>
-          <p:cNvSpPr/>
-          <p:nvPr/>
-        </p:nvSpPr>
-        <p:spPr>
-          <a:xfrm>
-            <a:off x="502920" y="2304288"/>
-            <a:ext cx="6858000" cy="0"/>
+            <a:endParaRPr lang="en-US" sz="1150" dirty="0"/>
+          </a:p>
+        </p:txBody>
+      </p:sp>
+      <p:sp>
+        <p:nvSpPr>
+          <p:cNvPr id="13" name="Shape 10"/>
+          <p:cNvSpPr/>
+          <p:nvPr/>
+        </p:nvSpPr>
+        <p:spPr>
+          <a:xfrm>
+            <a:off x="5989320" y="2496312"/>
+            <a:ext cx="5571439" cy="0"/>
           </a:xfrm>
           <a:prstGeom prst="line">
             <a:avLst/>
@@ -6777,14 +6712,14 @@
       </p:sp>
       <p:sp>
         <p:nvSpPr>
-          <p:cNvPr id="13" name="Text 11"/>
-          <p:cNvSpPr/>
-          <p:nvPr/>
-        </p:nvSpPr>
-        <p:spPr>
-          <a:xfrm>
-            <a:off x="502920" y="2304288"/>
-            <a:ext cx="1920240" cy="329184"/>
+          <p:cNvPr id="14" name="Text 11"/>
+          <p:cNvSpPr/>
+          <p:nvPr/>
+        </p:nvSpPr>
+        <p:spPr>
+          <a:xfrm>
+            <a:off x="5989320" y="2496312"/>
+            <a:ext cx="1560003" cy="347472"/>
           </a:xfrm>
           <a:prstGeom prst="rect">
             <a:avLst/>
@@ -6803,7 +6738,7 @@
               <a:buNone/>
             </a:pPr>
             <a:r>
-              <a:rPr lang="en-US" sz="1200" dirty="0">
+              <a:rPr lang="en-US" sz="1150" dirty="0">
                 <a:solidFill>
                   <a:srgbClr val="5B6B73"/>
                 </a:solidFill>
@@ -6813,20 +6748,20 @@
               </a:rPr>
               <a:t>건폐율</a:t>
             </a:r>
-            <a:endParaRPr lang="en-US" sz="1200" dirty="0"/>
-          </a:p>
-        </p:txBody>
-      </p:sp>
-      <p:sp>
-        <p:nvSpPr>
-          <p:cNvPr id="14" name="Text 12"/>
-          <p:cNvSpPr/>
-          <p:nvPr/>
-        </p:nvSpPr>
-        <p:spPr>
-          <a:xfrm>
-            <a:off x="2423160" y="2304288"/>
-            <a:ext cx="4937760" cy="329184"/>
+            <a:endParaRPr lang="en-US" sz="1150" dirty="0"/>
+          </a:p>
+        </p:txBody>
+      </p:sp>
+      <p:sp>
+        <p:nvSpPr>
+          <p:cNvPr id="15" name="Text 12"/>
+          <p:cNvSpPr/>
+          <p:nvPr/>
+        </p:nvSpPr>
+        <p:spPr>
+          <a:xfrm>
+            <a:off x="7549323" y="2496312"/>
+            <a:ext cx="4011436" cy="347472"/>
           </a:xfrm>
           <a:prstGeom prst="rect">
             <a:avLst/>
@@ -6845,7 +6780,7 @@
               <a:buNone/>
             </a:pPr>
             <a:r>
-              <a:rPr lang="en-US" sz="1200" b="1" dirty="0">
+              <a:rPr lang="en-US" sz="1150" b="1" dirty="0">
                 <a:solidFill>
                   <a:srgbClr val="132A3A"/>
                 </a:solidFill>
@@ -6855,20 +6790,20 @@
               </a:rPr>
               <a:t>현행 51.3% (법정 상한 50%)</a:t>
             </a:r>
-            <a:endParaRPr lang="en-US" sz="1200" dirty="0"/>
-          </a:p>
-        </p:txBody>
-      </p:sp>
-      <p:sp>
-        <p:nvSpPr>
-          <p:cNvPr id="15" name="Shape 13"/>
-          <p:cNvSpPr/>
-          <p:nvPr/>
-        </p:nvSpPr>
-        <p:spPr>
-          <a:xfrm>
-            <a:off x="502920" y="2633472"/>
-            <a:ext cx="6858000" cy="0"/>
+            <a:endParaRPr lang="en-US" sz="1150" dirty="0"/>
+          </a:p>
+        </p:txBody>
+      </p:sp>
+      <p:sp>
+        <p:nvSpPr>
+          <p:cNvPr id="16" name="Shape 13"/>
+          <p:cNvSpPr/>
+          <p:nvPr/>
+        </p:nvSpPr>
+        <p:spPr>
+          <a:xfrm>
+            <a:off x="5989320" y="2843784"/>
+            <a:ext cx="5571439" cy="0"/>
           </a:xfrm>
           <a:prstGeom prst="line">
             <a:avLst/>
@@ -6884,14 +6819,14 @@
       </p:sp>
       <p:sp>
         <p:nvSpPr>
-          <p:cNvPr id="16" name="Text 14"/>
-          <p:cNvSpPr/>
-          <p:nvPr/>
-        </p:nvSpPr>
-        <p:spPr>
-          <a:xfrm>
-            <a:off x="502920" y="2633472"/>
-            <a:ext cx="1920240" cy="329184"/>
+          <p:cNvPr id="17" name="Text 14"/>
+          <p:cNvSpPr/>
+          <p:nvPr/>
+        </p:nvSpPr>
+        <p:spPr>
+          <a:xfrm>
+            <a:off x="5989320" y="2843784"/>
+            <a:ext cx="1560003" cy="347472"/>
           </a:xfrm>
           <a:prstGeom prst="rect">
             <a:avLst/>
@@ -6910,7 +6845,7 @@
               <a:buNone/>
             </a:pPr>
             <a:r>
-              <a:rPr lang="en-US" sz="1200" dirty="0">
+              <a:rPr lang="en-US" sz="1150" dirty="0">
                 <a:solidFill>
                   <a:srgbClr val="5B6B73"/>
                 </a:solidFill>
@@ -6920,20 +6855,20 @@
               </a:rPr>
               <a:t>용적률</a:t>
             </a:r>
-            <a:endParaRPr lang="en-US" sz="1200" dirty="0"/>
-          </a:p>
-        </p:txBody>
-      </p:sp>
-      <p:sp>
-        <p:nvSpPr>
-          <p:cNvPr id="17" name="Text 15"/>
-          <p:cNvSpPr/>
-          <p:nvPr/>
-        </p:nvSpPr>
-        <p:spPr>
-          <a:xfrm>
-            <a:off x="2423160" y="2633472"/>
-            <a:ext cx="4937760" cy="329184"/>
+            <a:endParaRPr lang="en-US" sz="1150" dirty="0"/>
+          </a:p>
+        </p:txBody>
+      </p:sp>
+      <p:sp>
+        <p:nvSpPr>
+          <p:cNvPr id="18" name="Text 15"/>
+          <p:cNvSpPr/>
+          <p:nvPr/>
+        </p:nvSpPr>
+        <p:spPr>
+          <a:xfrm>
+            <a:off x="7549323" y="2843784"/>
+            <a:ext cx="4011436" cy="347472"/>
           </a:xfrm>
           <a:prstGeom prst="rect">
             <a:avLst/>
@@ -6952,7 +6887,7 @@
               <a:buNone/>
             </a:pPr>
             <a:r>
-              <a:rPr lang="en-US" sz="1200" b="1" dirty="0">
+              <a:rPr lang="en-US" sz="1150" b="1" dirty="0">
                 <a:solidFill>
                   <a:srgbClr val="132A3A"/>
                 </a:solidFill>
@@ -6962,20 +6897,20 @@
               </a:rPr>
               <a:t>현행 237.2% (법정 상한 250%)</a:t>
             </a:r>
-            <a:endParaRPr lang="en-US" sz="1200" dirty="0"/>
-          </a:p>
-        </p:txBody>
-      </p:sp>
-      <p:sp>
-        <p:nvSpPr>
-          <p:cNvPr id="18" name="Shape 16"/>
-          <p:cNvSpPr/>
-          <p:nvPr/>
-        </p:nvSpPr>
-        <p:spPr>
-          <a:xfrm>
-            <a:off x="502920" y="2962656"/>
-            <a:ext cx="6858000" cy="0"/>
+            <a:endParaRPr lang="en-US" sz="1150" dirty="0"/>
+          </a:p>
+        </p:txBody>
+      </p:sp>
+      <p:sp>
+        <p:nvSpPr>
+          <p:cNvPr id="19" name="Shape 16"/>
+          <p:cNvSpPr/>
+          <p:nvPr/>
+        </p:nvSpPr>
+        <p:spPr>
+          <a:xfrm>
+            <a:off x="5989320" y="3191256"/>
+            <a:ext cx="5571439" cy="0"/>
           </a:xfrm>
           <a:prstGeom prst="line">
             <a:avLst/>
@@ -6991,14 +6926,14 @@
       </p:sp>
       <p:sp>
         <p:nvSpPr>
-          <p:cNvPr id="19" name="Text 17"/>
-          <p:cNvSpPr/>
-          <p:nvPr/>
-        </p:nvSpPr>
-        <p:spPr>
-          <a:xfrm>
-            <a:off x="502920" y="2962656"/>
-            <a:ext cx="1920240" cy="329184"/>
+          <p:cNvPr id="20" name="Text 17"/>
+          <p:cNvSpPr/>
+          <p:nvPr/>
+        </p:nvSpPr>
+        <p:spPr>
+          <a:xfrm>
+            <a:off x="5989320" y="3191256"/>
+            <a:ext cx="1560003" cy="347472"/>
           </a:xfrm>
           <a:prstGeom prst="rect">
             <a:avLst/>
@@ -7017,7 +6952,7 @@
               <a:buNone/>
             </a:pPr>
             <a:r>
-              <a:rPr lang="en-US" sz="1200" dirty="0">
+              <a:rPr lang="en-US" sz="1150" dirty="0">
                 <a:solidFill>
                   <a:srgbClr val="5B6B73"/>
                 </a:solidFill>
@@ -7027,20 +6962,20 @@
               </a:rPr>
               <a:t>도로접면</a:t>
             </a:r>
-            <a:endParaRPr lang="en-US" sz="1200" dirty="0"/>
-          </a:p>
-        </p:txBody>
-      </p:sp>
-      <p:sp>
-        <p:nvSpPr>
-          <p:cNvPr id="20" name="Text 18"/>
-          <p:cNvSpPr/>
-          <p:nvPr/>
-        </p:nvSpPr>
-        <p:spPr>
-          <a:xfrm>
-            <a:off x="2423160" y="2962656"/>
-            <a:ext cx="4937760" cy="329184"/>
+            <a:endParaRPr lang="en-US" sz="1150" dirty="0"/>
+          </a:p>
+        </p:txBody>
+      </p:sp>
+      <p:sp>
+        <p:nvSpPr>
+          <p:cNvPr id="21" name="Text 18"/>
+          <p:cNvSpPr/>
+          <p:nvPr/>
+        </p:nvSpPr>
+        <p:spPr>
+          <a:xfrm>
+            <a:off x="7549323" y="3191256"/>
+            <a:ext cx="4011436" cy="347472"/>
           </a:xfrm>
           <a:prstGeom prst="rect">
             <a:avLst/>
@@ -7059,7 +6994,7 @@
               <a:buNone/>
             </a:pPr>
             <a:r>
-              <a:rPr lang="en-US" sz="1200" b="1" dirty="0">
+              <a:rPr lang="en-US" sz="1150" b="1" dirty="0">
                 <a:solidFill>
                   <a:srgbClr val="132A3A"/>
                 </a:solidFill>
@@ -7069,20 +7004,20 @@
               </a:rPr>
               <a:t>논현로 이면 코너 (북측 8m, 동측 6m)</a:t>
             </a:r>
-            <a:endParaRPr lang="en-US" sz="1200" dirty="0"/>
-          </a:p>
-        </p:txBody>
-      </p:sp>
-      <p:sp>
-        <p:nvSpPr>
-          <p:cNvPr id="21" name="Shape 19"/>
-          <p:cNvSpPr/>
-          <p:nvPr/>
-        </p:nvSpPr>
-        <p:spPr>
-          <a:xfrm>
-            <a:off x="502920" y="3291840"/>
-            <a:ext cx="6858000" cy="0"/>
+            <a:endParaRPr lang="en-US" sz="1150" dirty="0"/>
+          </a:p>
+        </p:txBody>
+      </p:sp>
+      <p:sp>
+        <p:nvSpPr>
+          <p:cNvPr id="22" name="Shape 19"/>
+          <p:cNvSpPr/>
+          <p:nvPr/>
+        </p:nvSpPr>
+        <p:spPr>
+          <a:xfrm>
+            <a:off x="5989320" y="3538728"/>
+            <a:ext cx="5571439" cy="0"/>
           </a:xfrm>
           <a:prstGeom prst="line">
             <a:avLst/>
@@ -7098,14 +7033,14 @@
       </p:sp>
       <p:sp>
         <p:nvSpPr>
-          <p:cNvPr id="22" name="Text 20"/>
-          <p:cNvSpPr/>
-          <p:nvPr/>
-        </p:nvSpPr>
-        <p:spPr>
-          <a:xfrm>
-            <a:off x="502920" y="3291840"/>
-            <a:ext cx="1920240" cy="329184"/>
+          <p:cNvPr id="23" name="Text 20"/>
+          <p:cNvSpPr/>
+          <p:nvPr/>
+        </p:nvSpPr>
+        <p:spPr>
+          <a:xfrm>
+            <a:off x="5989320" y="3538728"/>
+            <a:ext cx="1560003" cy="347472"/>
           </a:xfrm>
           <a:prstGeom prst="rect">
             <a:avLst/>
@@ -7124,7 +7059,7 @@
               <a:buNone/>
             </a:pPr>
             <a:r>
-              <a:rPr lang="en-US" sz="1200" dirty="0">
+              <a:rPr lang="en-US" sz="1150" dirty="0">
                 <a:solidFill>
                   <a:srgbClr val="5B6B73"/>
                 </a:solidFill>
@@ -7134,20 +7069,20 @@
               </a:rPr>
               <a:t>지목</a:t>
             </a:r>
-            <a:endParaRPr lang="en-US" sz="1200" dirty="0"/>
-          </a:p>
-        </p:txBody>
-      </p:sp>
-      <p:sp>
-        <p:nvSpPr>
-          <p:cNvPr id="23" name="Text 21"/>
-          <p:cNvSpPr/>
-          <p:nvPr/>
-        </p:nvSpPr>
-        <p:spPr>
-          <a:xfrm>
-            <a:off x="2423160" y="3291840"/>
-            <a:ext cx="4937760" cy="329184"/>
+            <a:endParaRPr lang="en-US" sz="1150" dirty="0"/>
+          </a:p>
+        </p:txBody>
+      </p:sp>
+      <p:sp>
+        <p:nvSpPr>
+          <p:cNvPr id="24" name="Text 21"/>
+          <p:cNvSpPr/>
+          <p:nvPr/>
+        </p:nvSpPr>
+        <p:spPr>
+          <a:xfrm>
+            <a:off x="7549323" y="3538728"/>
+            <a:ext cx="4011436" cy="347472"/>
           </a:xfrm>
           <a:prstGeom prst="rect">
             <a:avLst/>
@@ -7166,7 +7101,7 @@
               <a:buNone/>
             </a:pPr>
             <a:r>
-              <a:rPr lang="en-US" sz="1200" b="1" dirty="0">
+              <a:rPr lang="en-US" sz="1150" b="1" dirty="0">
                 <a:solidFill>
                   <a:srgbClr val="132A3A"/>
                 </a:solidFill>
@@ -7176,20 +7111,20 @@
               </a:rPr>
               <a:t>대</a:t>
             </a:r>
-            <a:endParaRPr lang="en-US" sz="1200" dirty="0"/>
-          </a:p>
-        </p:txBody>
-      </p:sp>
-      <p:sp>
-        <p:nvSpPr>
-          <p:cNvPr id="24" name="Shape 22"/>
-          <p:cNvSpPr/>
-          <p:nvPr/>
-        </p:nvSpPr>
-        <p:spPr>
-          <a:xfrm>
-            <a:off x="502920" y="3621024"/>
-            <a:ext cx="6858000" cy="0"/>
+            <a:endParaRPr lang="en-US" sz="1150" dirty="0"/>
+          </a:p>
+        </p:txBody>
+      </p:sp>
+      <p:sp>
+        <p:nvSpPr>
+          <p:cNvPr id="25" name="Shape 22"/>
+          <p:cNvSpPr/>
+          <p:nvPr/>
+        </p:nvSpPr>
+        <p:spPr>
+          <a:xfrm>
+            <a:off x="5989320" y="3886200"/>
+            <a:ext cx="5571439" cy="0"/>
           </a:xfrm>
           <a:prstGeom prst="line">
             <a:avLst/>
@@ -7205,14 +7140,14 @@
       </p:sp>
       <p:sp>
         <p:nvSpPr>
-          <p:cNvPr id="25" name="Text 23"/>
-          <p:cNvSpPr/>
-          <p:nvPr/>
-        </p:nvSpPr>
-        <p:spPr>
-          <a:xfrm>
-            <a:off x="502920" y="3621024"/>
-            <a:ext cx="1920240" cy="329184"/>
+          <p:cNvPr id="26" name="Text 23"/>
+          <p:cNvSpPr/>
+          <p:nvPr/>
+        </p:nvSpPr>
+        <p:spPr>
+          <a:xfrm>
+            <a:off x="5989320" y="3886200"/>
+            <a:ext cx="1560003" cy="347472"/>
           </a:xfrm>
           <a:prstGeom prst="rect">
             <a:avLst/>
@@ -7231,7 +7166,7 @@
               <a:buNone/>
             </a:pPr>
             <a:r>
-              <a:rPr lang="en-US" sz="1200" dirty="0">
+              <a:rPr lang="en-US" sz="1150" dirty="0">
                 <a:solidFill>
                   <a:srgbClr val="5B6B73"/>
                 </a:solidFill>
@@ -7241,20 +7176,20 @@
               </a:rPr>
               <a:t>토지평당가</a:t>
             </a:r>
-            <a:endParaRPr lang="en-US" sz="1200" dirty="0"/>
-          </a:p>
-        </p:txBody>
-      </p:sp>
-      <p:sp>
-        <p:nvSpPr>
-          <p:cNvPr id="26" name="Text 24"/>
-          <p:cNvSpPr/>
-          <p:nvPr/>
-        </p:nvSpPr>
-        <p:spPr>
-          <a:xfrm>
-            <a:off x="2423160" y="3621024"/>
-            <a:ext cx="4937760" cy="329184"/>
+            <a:endParaRPr lang="en-US" sz="1150" dirty="0"/>
+          </a:p>
+        </p:txBody>
+      </p:sp>
+      <p:sp>
+        <p:nvSpPr>
+          <p:cNvPr id="27" name="Text 24"/>
+          <p:cNvSpPr/>
+          <p:nvPr/>
+        </p:nvSpPr>
+        <p:spPr>
+          <a:xfrm>
+            <a:off x="7549323" y="3886200"/>
+            <a:ext cx="4011436" cy="347472"/>
           </a:xfrm>
           <a:prstGeom prst="rect">
             <a:avLst/>
@@ -7273,7 +7208,7 @@
               <a:buNone/>
             </a:pPr>
             <a:r>
-              <a:rPr lang="en-US" sz="1200" b="1" dirty="0">
+              <a:rPr lang="en-US" sz="1150" b="1" dirty="0">
                 <a:solidFill>
                   <a:srgbClr val="132A3A"/>
                 </a:solidFill>
@@ -7283,70 +7218,24 @@
               </a:rPr>
               <a:t>약 23,659만 원/평</a:t>
             </a:r>
-            <a:endParaRPr lang="en-US" sz="1200" dirty="0"/>
-          </a:p>
-        </p:txBody>
-      </p:sp>
-      <p:sp>
-        <p:nvSpPr>
-          <p:cNvPr id="27" name="Shape 25"/>
-          <p:cNvSpPr/>
-          <p:nvPr/>
-        </p:nvSpPr>
-        <p:spPr>
-          <a:xfrm>
-            <a:off x="7540600" y="1371600"/>
-            <a:ext cx="0" cy="4754880"/>
-          </a:xfrm>
-          <a:prstGeom prst="line">
-            <a:avLst/>
-          </a:prstGeom>
-          <a:noFill/>
-          <a:ln w="8890">
-            <a:solidFill>
-              <a:srgbClr val="B8860B"/>
-            </a:solidFill>
-            <a:prstDash val="solid"/>
-          </a:ln>
-        </p:spPr>
-      </p:sp>
-      <p:pic>
-        <p:nvPicPr>
-          <p:cNvPr id="28" name="Image 0" descr="preencoded.png">    </p:cNvPr>
-          <p:cNvPicPr>
-            <a:picLocks noChangeAspect="1"/>
-          </p:cNvPicPr>
-          <p:nvPr/>
-        </p:nvPicPr>
-        <p:blipFill>
-          <a:blip r:embed="rId1"/>
-          <a:srcRect l="0" r="0" t="0" b="0"/>
-          <a:stretch/>
-        </p:blipFill>
-        <p:spPr>
-          <a:xfrm>
-            <a:off x="7720279" y="1645920"/>
-            <a:ext cx="3840480" cy="2926080"/>
-          </a:xfrm>
-          <a:prstGeom prst="rect">
-            <a:avLst/>
-          </a:prstGeom>
-        </p:spPr>
-      </p:pic>
-      <p:sp>
-        <p:nvSpPr>
-          <p:cNvPr id="29" name="Shape 26"/>
-          <p:cNvSpPr/>
-          <p:nvPr/>
-        </p:nvSpPr>
-        <p:spPr>
-          <a:xfrm>
-            <a:off x="7720279" y="4681728"/>
-            <a:ext cx="3840480" cy="1508760"/>
+            <a:endParaRPr lang="en-US" sz="1150" dirty="0"/>
+          </a:p>
+        </p:txBody>
+      </p:sp>
+      <p:sp>
+        <p:nvSpPr>
+          <p:cNvPr id="28" name="Shape 25"/>
+          <p:cNvSpPr/>
+          <p:nvPr/>
+        </p:nvSpPr>
+        <p:spPr>
+          <a:xfrm>
+            <a:off x="5989320" y="4343400"/>
+            <a:ext cx="5571439" cy="1234440"/>
           </a:xfrm>
           <a:prstGeom prst="roundRect">
             <a:avLst>
-              <a:gd name="adj" fmla="val 3636"/>
+              <a:gd name="adj" fmla="val 4444"/>
             </a:avLst>
           </a:prstGeom>
           <a:solidFill>
@@ -7357,14 +7246,14 @@
       </p:sp>
       <p:sp>
         <p:nvSpPr>
-          <p:cNvPr id="30" name="Shape 27"/>
-          <p:cNvSpPr/>
-          <p:nvPr/>
-        </p:nvSpPr>
-        <p:spPr>
-          <a:xfrm>
-            <a:off x="7720279" y="4736592"/>
-            <a:ext cx="36576" cy="1399032"/>
+          <p:cNvPr id="29" name="Shape 26"/>
+          <p:cNvSpPr/>
+          <p:nvPr/>
+        </p:nvSpPr>
+        <p:spPr>
+          <a:xfrm>
+            <a:off x="5989320" y="4398264"/>
+            <a:ext cx="36576" cy="1124712"/>
           </a:xfrm>
           <a:prstGeom prst="rect">
             <a:avLst/>
@@ -7377,53 +7266,53 @@
       </p:sp>
       <p:sp>
         <p:nvSpPr>
+          <p:cNvPr id="30" name="Text 27"/>
+          <p:cNvSpPr/>
+          <p:nvPr/>
+        </p:nvSpPr>
+        <p:spPr>
+          <a:xfrm>
+            <a:off x="6135624" y="4434840"/>
+            <a:ext cx="5315407" cy="201168"/>
+          </a:xfrm>
+          <a:prstGeom prst="rect">
+            <a:avLst/>
+          </a:prstGeom>
+          <a:noFill/>
+          <a:ln/>
+        </p:spPr>
+        <p:txBody>
+          <a:bodyPr wrap="square" lIns="0" tIns="0" rIns="0" bIns="0" rtlCol="0" anchor="ctr"/>
+          <a:lstStyle/>
+          <a:p>
+            <a:pPr indent="0" marL="0">
+              <a:buNone/>
+            </a:pPr>
+            <a:r>
+              <a:rPr lang="en-US" sz="1050" b="1" dirty="0">
+                <a:solidFill>
+                  <a:srgbClr val="2E6E82"/>
+                </a:solidFill>
+                <a:latin typeface="맑은 고딕" pitchFamily="34" charset="0"/>
+                <a:ea typeface="맑은 고딕" pitchFamily="34" charset="-122"/>
+                <a:cs typeface="맑은 고딕" pitchFamily="34" charset="-120"/>
+              </a:rPr>
+              <a:t>토지 규제 및 공법 분석</a:t>
+            </a:r>
+            <a:endParaRPr lang="en-US" sz="1050" dirty="0"/>
+          </a:p>
+        </p:txBody>
+      </p:sp>
+      <p:sp>
+        <p:nvSpPr>
           <p:cNvPr id="31" name="Text 28"/>
           <p:cNvSpPr/>
           <p:nvPr/>
         </p:nvSpPr>
         <p:spPr>
           <a:xfrm>
-            <a:off x="7866583" y="4773168"/>
-            <a:ext cx="3584448" cy="201168"/>
-          </a:xfrm>
-          <a:prstGeom prst="rect">
-            <a:avLst/>
-          </a:prstGeom>
-          <a:noFill/>
-          <a:ln/>
-        </p:spPr>
-        <p:txBody>
-          <a:bodyPr wrap="square" lIns="0" tIns="0" rIns="0" bIns="0" rtlCol="0" anchor="ctr"/>
-          <a:lstStyle/>
-          <a:p>
-            <a:pPr indent="0" marL="0">
-              <a:buNone/>
-            </a:pPr>
-            <a:r>
-              <a:rPr lang="en-US" sz="1050" b="1" dirty="0">
-                <a:solidFill>
-                  <a:srgbClr val="2E6E82"/>
-                </a:solidFill>
-                <a:latin typeface="맑은 고딕" pitchFamily="34" charset="0"/>
-                <a:ea typeface="맑은 고딕" pitchFamily="34" charset="-122"/>
-                <a:cs typeface="맑은 고딕" pitchFamily="34" charset="-120"/>
-              </a:rPr>
-              <a:t>자산 하이라이트</a:t>
-            </a:r>
-            <a:endParaRPr lang="en-US" sz="1050" dirty="0"/>
-          </a:p>
-        </p:txBody>
-      </p:sp>
-      <p:sp>
-        <p:nvSpPr>
-          <p:cNvPr id="32" name="Text 29"/>
-          <p:cNvSpPr/>
-          <p:nvPr/>
-        </p:nvSpPr>
-        <p:spPr>
-          <a:xfrm>
-            <a:off x="7866583" y="4974336"/>
-            <a:ext cx="3584448" cy="1179576"/>
+            <a:off x="6135624" y="4636008"/>
+            <a:ext cx="5315407" cy="905256"/>
           </a:xfrm>
           <a:prstGeom prst="rect">
             <a:avLst/>
@@ -7451,9 +7340,99 @@
                 <a:ea typeface="맑은 고딕" pitchFamily="34" charset="-122"/>
                 <a:cs typeface="맑은 고딕" pitchFamily="34" charset="-120"/>
               </a:rPr>
-              <a:t>현 건폐율 51.3%, 용적률 237.2% (법정 상한: 건폐율 50%, 용적률 250%) • 제3종일반주거지역 기준 법정 상한 대비 용적률 상향 및 밸류애드 잠재력 보유 • 논현로 이면 코너 (북측 8m, 동측 6m) 접면으로 보행자 접근성 및 차량 진출입 동선 우수</a:t>
+              <a:t>현 건폐율 51.3%, 용적률 237.2% (법정 상한: 건폐율 50%, 용적률 250%)</a:t>
             </a:r>
             <a:endParaRPr lang="en-US" sz="980" dirty="0"/>
+          </a:p>
+          <a:p>
+            <a:pPr marL="342900" indent="-342900">
+              <a:lnSpc>
+                <a:spcPct val="108000"/>
+              </a:lnSpc>
+              <a:spcBef>
+                <a:spcPts val="300"/>
+              </a:spcBef>
+              <a:buSzPct val="100000"/>
+              <a:buChar char="•"/>
+            </a:pPr>
+            <a:r>
+              <a:rPr lang="en-US" sz="980" dirty="0">
+                <a:solidFill>
+                  <a:srgbClr val="2B2B2B"/>
+                </a:solidFill>
+                <a:latin typeface="맑은 고딕" pitchFamily="34" charset="0"/>
+                <a:ea typeface="맑은 고딕" pitchFamily="34" charset="-122"/>
+                <a:cs typeface="맑은 고딕" pitchFamily="34" charset="-120"/>
+              </a:rPr>
+              <a:t>제3종일반주거지역 기준 법정 상한 대비 용적률 상향 및 밸류애드 잠재력 보유</a:t>
+            </a:r>
+            <a:endParaRPr lang="en-US" sz="980" dirty="0"/>
+          </a:p>
+          <a:p>
+            <a:pPr marL="342900" indent="-342900">
+              <a:lnSpc>
+                <a:spcPct val="108000"/>
+              </a:lnSpc>
+              <a:spcBef>
+                <a:spcPts val="300"/>
+              </a:spcBef>
+              <a:buSzPct val="100000"/>
+              <a:buChar char="•"/>
+            </a:pPr>
+            <a:r>
+              <a:rPr lang="en-US" sz="980" dirty="0">
+                <a:solidFill>
+                  <a:srgbClr val="2B2B2B"/>
+                </a:solidFill>
+                <a:latin typeface="맑은 고딕" pitchFamily="34" charset="0"/>
+                <a:ea typeface="맑은 고딕" pitchFamily="34" charset="-122"/>
+                <a:cs typeface="맑은 고딕" pitchFamily="34" charset="-120"/>
+              </a:rPr>
+              <a:t>논현로 이면 코너 (북측 8m, 동측 6m) 접면으로 보행자 접근성 및 차량 진출입 동선 우수</a:t>
+            </a:r>
+            <a:endParaRPr lang="en-US" sz="980" dirty="0"/>
+          </a:p>
+        </p:txBody>
+      </p:sp>
+      <p:sp>
+        <p:nvSpPr>
+          <p:cNvPr id="32" name="Text 29"/>
+          <p:cNvSpPr/>
+          <p:nvPr/>
+        </p:nvSpPr>
+        <p:spPr>
+          <a:xfrm>
+            <a:off x="5989320" y="5715000"/>
+            <a:ext cx="5571439" cy="384048"/>
+          </a:xfrm>
+          <a:prstGeom prst="rect">
+            <a:avLst/>
+          </a:prstGeom>
+          <a:noFill/>
+          <a:ln/>
+        </p:spPr>
+        <p:txBody>
+          <a:bodyPr wrap="square" lIns="0" tIns="0" rIns="0" bIns="0" rtlCol="0" anchor="ctr"/>
+          <a:lstStyle/>
+          <a:p>
+            <a:pPr indent="0" marL="0">
+              <a:lnSpc>
+                <a:spcPct val="125000"/>
+              </a:lnSpc>
+              <a:buNone/>
+            </a:pPr>
+            <a:r>
+              <a:rPr lang="en-US" sz="1100" dirty="0">
+                <a:solidFill>
+                  <a:srgbClr val="8A9AA3"/>
+                </a:solidFill>
+                <a:latin typeface="맑은 고딕" pitchFamily="34" charset="0"/>
+                <a:ea typeface="맑은 고딕" pitchFamily="34" charset="-122"/>
+                <a:cs typeface="맑은 고딕" pitchFamily="34" charset="-120"/>
+              </a:rPr>
+              <a:t>© V-World 국토교통부 | 2026</a:t>
+            </a:r>
+            <a:endParaRPr lang="en-US" sz="1100" dirty="0"/>
           </a:p>
         </p:txBody>
       </p:sp>
@@ -7659,7 +7638,7 @@
                 <a:ea typeface="Arial" pitchFamily="34" charset="-122"/>
                 <a:cs typeface="Arial" pitchFamily="34" charset="-120"/>
               </a:rPr>
-              <a:t>Cadastral</a:t>
+              <a:t>Gallery</a:t>
             </a:r>
             <a:endParaRPr lang="en-US" sz="950" dirty="0"/>
           </a:p>
@@ -7698,15 +7677,42 @@
                 <a:ea typeface="맑은 고딕" pitchFamily="34" charset="-122"/>
                 <a:cs typeface="맑은 고딕" pitchFamily="34" charset="-120"/>
               </a:rPr>
-              <a:t>지적도</a:t>
+              <a:t>현장 사진</a:t>
             </a:r>
             <a:endParaRPr lang="en-US" sz="2300" dirty="0"/>
           </a:p>
         </p:txBody>
+      </p:sp>
+      <p:sp>
+        <p:nvSpPr>
+          <p:cNvPr id="6" name="Shape 4"/>
+          <p:cNvSpPr/>
+          <p:nvPr/>
+        </p:nvSpPr>
+        <p:spPr>
+          <a:xfrm>
+            <a:off x="502920" y="1234440"/>
+            <a:ext cx="3600602" cy="2290572"/>
+          </a:xfrm>
+          <a:prstGeom prst="roundRect">
+            <a:avLst>
+              <a:gd name="adj" fmla="val 2395"/>
+            </a:avLst>
+          </a:prstGeom>
+          <a:solidFill>
+            <a:srgbClr val="F0F0F0"/>
+          </a:solidFill>
+          <a:ln w="6350">
+            <a:solidFill>
+              <a:srgbClr val="E0E0E0"/>
+            </a:solidFill>
+            <a:prstDash val="solid"/>
+          </a:ln>
+        </p:spPr>
       </p:sp>
       <p:pic>
         <p:nvPicPr>
-          <p:cNvPr id="6" name="Image 0" descr="preencoded.png">    </p:cNvPr>
+          <p:cNvPr id="7" name="Image 0" descr="preencoded.png">    </p:cNvPr>
           <p:cNvPicPr>
             <a:picLocks noChangeAspect="1"/>
           </p:cNvPicPr>
@@ -7714,14 +7720,13 @@
         </p:nvPicPr>
         <p:blipFill>
           <a:blip r:embed="rId1"/>
-          <a:stretch>
-            <a:fillRect/>
-          </a:stretch>
+          <a:srcRect l="0" r="0" t="0" b="0"/>
+          <a:stretch/>
         </p:blipFill>
         <p:spPr>
           <a:xfrm>
-            <a:off x="502920" y="1481328"/>
-            <a:ext cx="5120640" cy="4114800"/>
+            <a:off x="502920" y="1234440"/>
+            <a:ext cx="3600602" cy="2290572"/>
           </a:xfrm>
           <a:prstGeom prst="rect">
             <a:avLst/>
@@ -7730,84 +7735,25 @@
       </p:pic>
       <p:sp>
         <p:nvSpPr>
-          <p:cNvPr id="7" name="Text 4"/>
-          <p:cNvSpPr/>
-          <p:nvPr/>
-        </p:nvSpPr>
-        <p:spPr>
-          <a:xfrm>
-            <a:off x="5989320" y="1481328"/>
-            <a:ext cx="5571439" cy="237744"/>
-          </a:xfrm>
-          <a:prstGeom prst="rect">
-            <a:avLst/>
-          </a:prstGeom>
-          <a:noFill/>
-          <a:ln/>
-        </p:spPr>
-        <p:txBody>
-          <a:bodyPr wrap="square" lIns="0" tIns="0" rIns="0" bIns="0" rtlCol="0" anchor="ctr"/>
-          <a:lstStyle/>
-          <a:p>
-            <a:pPr indent="0" marL="0">
-              <a:buNone/>
-            </a:pPr>
-            <a:r>
-              <a:rPr lang="en-US" sz="1100" b="1" dirty="0">
-                <a:solidFill>
-                  <a:srgbClr val="132A3A"/>
-                </a:solidFill>
-                <a:latin typeface="맑은 고딕" pitchFamily="34" charset="0"/>
-                <a:ea typeface="맑은 고딕" pitchFamily="34" charset="-122"/>
-                <a:cs typeface="맑은 고딕" pitchFamily="34" charset="-120"/>
-              </a:rPr>
-              <a:t>연속지적도 (V-World)</a:t>
-            </a:r>
-            <a:endParaRPr lang="en-US" sz="1100" dirty="0"/>
-          </a:p>
-        </p:txBody>
-      </p:sp>
-      <p:sp>
-        <p:nvSpPr>
-          <p:cNvPr id="8" name="Text 5"/>
-          <p:cNvSpPr/>
-          <p:nvPr/>
-        </p:nvSpPr>
-        <p:spPr>
-          <a:xfrm>
-            <a:off x="5989320" y="1801368"/>
-            <a:ext cx="1560003" cy="493776"/>
-          </a:xfrm>
-          <a:prstGeom prst="rect">
-            <a:avLst/>
-          </a:prstGeom>
-          <a:noFill/>
-          <a:ln/>
-        </p:spPr>
-        <p:txBody>
-          <a:bodyPr wrap="square" lIns="0" tIns="0" rIns="0" bIns="0" rtlCol="0" anchor="ctr"/>
-          <a:lstStyle/>
-          <a:p>
-            <a:pPr indent="0" marL="0">
-              <a:lnSpc>
-                <a:spcPct val="115000"/>
-              </a:lnSpc>
-              <a:buNone/>
-            </a:pPr>
-            <a:r>
-              <a:rPr lang="en-US" sz="1300" dirty="0">
-                <a:solidFill>
-                  <a:srgbClr val="5B6B73"/>
-                </a:solidFill>
-                <a:latin typeface="맑은 고딕" pitchFamily="34" charset="0"/>
-                <a:ea typeface="맑은 고딕" pitchFamily="34" charset="-122"/>
-                <a:cs typeface="맑은 고딕" pitchFamily="34" charset="-120"/>
-              </a:rPr>
-              <a:t>대지면적</a:t>
-            </a:r>
-            <a:endParaRPr lang="en-US" sz="1300" dirty="0"/>
-          </a:p>
-        </p:txBody>
+          <p:cNvPr id="8" name="Shape 5"/>
+          <p:cNvSpPr/>
+          <p:nvPr/>
+        </p:nvSpPr>
+        <p:spPr>
+          <a:xfrm>
+            <a:off x="576072" y="1307592"/>
+            <a:ext cx="868680" cy="237744"/>
+          </a:xfrm>
+          <a:prstGeom prst="rect">
+            <a:avLst/>
+          </a:prstGeom>
+          <a:solidFill>
+            <a:srgbClr val="10161F">
+              <a:alpha val="80000"/>
+            </a:srgbClr>
+          </a:solidFill>
+          <a:ln/>
+        </p:spPr>
       </p:sp>
       <p:sp>
         <p:nvSpPr>
@@ -7817,37 +7763,34 @@
         </p:nvSpPr>
         <p:spPr>
           <a:xfrm>
-            <a:off x="7549323" y="1801368"/>
-            <a:ext cx="4011436" cy="493776"/>
-          </a:xfrm>
-          <a:prstGeom prst="rect">
-            <a:avLst/>
-          </a:prstGeom>
-          <a:noFill/>
-          <a:ln/>
-        </p:spPr>
-        <p:txBody>
-          <a:bodyPr wrap="square" lIns="0" tIns="0" rIns="0" bIns="0" rtlCol="0" anchor="ctr"/>
-          <a:lstStyle/>
-          <a:p>
-            <a:pPr indent="0" marL="0">
-              <a:lnSpc>
-                <a:spcPct val="115000"/>
-              </a:lnSpc>
-              <a:buNone/>
-            </a:pPr>
-            <a:r>
-              <a:rPr lang="en-US" sz="1300" b="1" dirty="0">
-                <a:solidFill>
-                  <a:srgbClr val="132A3A"/>
-                </a:solidFill>
-                <a:latin typeface="맑은 고딕" pitchFamily="34" charset="0"/>
-                <a:ea typeface="맑은 고딕" pitchFamily="34" charset="-122"/>
-                <a:cs typeface="맑은 고딕" pitchFamily="34" charset="-120"/>
-              </a:rPr>
-              <a:t>1,061.9㎡ (321.2평)</a:t>
-            </a:r>
-            <a:endParaRPr lang="en-US" sz="1300" dirty="0"/>
+            <a:off x="576072" y="1307592"/>
+            <a:ext cx="868680" cy="237744"/>
+          </a:xfrm>
+          <a:prstGeom prst="rect">
+            <a:avLst/>
+          </a:prstGeom>
+          <a:noFill/>
+          <a:ln/>
+        </p:spPr>
+        <p:txBody>
+          <a:bodyPr wrap="square" lIns="0" tIns="0" rIns="0" bIns="0" rtlCol="0" anchor="ctr"/>
+          <a:lstStyle/>
+          <a:p>
+            <a:pPr algn="ctr" indent="0" marL="0">
+              <a:buNone/>
+            </a:pPr>
+            <a:r>
+              <a:rPr lang="en-US" sz="900" b="1" dirty="0">
+                <a:solidFill>
+                  <a:srgbClr val="FFFFFF"/>
+                </a:solidFill>
+                <a:latin typeface="맑은 고딕" pitchFamily="34" charset="0"/>
+                <a:ea typeface="맑은 고딕" pitchFamily="34" charset="-122"/>
+                <a:cs typeface="맑은 고딕" pitchFamily="34" charset="-120"/>
+              </a:rPr>
+              <a:t>건물 외관</a:t>
+            </a:r>
+            <a:endParaRPr lang="en-US" sz="900" dirty="0"/>
           </a:p>
         </p:txBody>
       </p:sp>
@@ -7859,364 +7802,750 @@
         </p:nvSpPr>
         <p:spPr>
           <a:xfrm>
-            <a:off x="5989320" y="2295144"/>
-            <a:ext cx="5571439" cy="0"/>
-          </a:xfrm>
-          <a:prstGeom prst="line">
-            <a:avLst/>
-          </a:prstGeom>
-          <a:noFill/>
-          <a:ln w="3810">
+            <a:off x="502920" y="3232404"/>
+            <a:ext cx="3600602" cy="292608"/>
+          </a:xfrm>
+          <a:prstGeom prst="rect">
+            <a:avLst/>
+          </a:prstGeom>
+          <a:solidFill>
+            <a:srgbClr val="000000">
+              <a:alpha val="60000"/>
+            </a:srgbClr>
+          </a:solidFill>
+          <a:ln/>
+        </p:spPr>
+      </p:sp>
+      <p:sp>
+        <p:nvSpPr>
+          <p:cNvPr id="11" name="Text 8"/>
+          <p:cNvSpPr/>
+          <p:nvPr/>
+        </p:nvSpPr>
+        <p:spPr>
+          <a:xfrm>
+            <a:off x="612648" y="3232404"/>
+            <a:ext cx="3381146" cy="292608"/>
+          </a:xfrm>
+          <a:prstGeom prst="rect">
+            <a:avLst/>
+          </a:prstGeom>
+          <a:noFill/>
+          <a:ln/>
+        </p:spPr>
+        <p:txBody>
+          <a:bodyPr wrap="square" lIns="0" tIns="0" rIns="0" bIns="0" rtlCol="0" anchor="ctr"/>
+          <a:lstStyle/>
+          <a:p>
+            <a:pPr indent="0" marL="0">
+              <a:buNone/>
+            </a:pPr>
+            <a:r>
+              <a:rPr lang="en-US" sz="900" dirty="0">
+                <a:solidFill>
+                  <a:srgbClr val="FFFFFF"/>
+                </a:solidFill>
+                <a:latin typeface="맑은 고딕" pitchFamily="34" charset="0"/>
+                <a:ea typeface="맑은 고딕" pitchFamily="34" charset="-122"/>
+                <a:cs typeface="맑은 고딕" pitchFamily="34" charset="-120"/>
+              </a:rPr>
+              <a:t>신사동 590 ICL 빌딩 전경 및 대로변 코너 입지</a:t>
+            </a:r>
+            <a:endParaRPr lang="en-US" sz="900" dirty="0"/>
+          </a:p>
+        </p:txBody>
+      </p:sp>
+      <p:sp>
+        <p:nvSpPr>
+          <p:cNvPr id="12" name="Shape 9"/>
+          <p:cNvSpPr/>
+          <p:nvPr/>
+        </p:nvSpPr>
+        <p:spPr>
+          <a:xfrm>
+            <a:off x="4231538" y="1234440"/>
+            <a:ext cx="3600602" cy="2290572"/>
+          </a:xfrm>
+          <a:prstGeom prst="roundRect">
+            <a:avLst>
+              <a:gd name="adj" fmla="val 2395"/>
+            </a:avLst>
+          </a:prstGeom>
+          <a:solidFill>
+            <a:srgbClr val="F0F0F0"/>
+          </a:solidFill>
+          <a:ln w="6350">
             <a:solidFill>
-              <a:srgbClr val="CBD5E0"/>
+              <a:srgbClr val="E0E0E0"/>
             </a:solidFill>
             <a:prstDash val="solid"/>
           </a:ln>
         </p:spPr>
       </p:sp>
-      <p:sp>
-        <p:nvSpPr>
-          <p:cNvPr id="11" name="Text 8"/>
-          <p:cNvSpPr/>
-          <p:nvPr/>
-        </p:nvSpPr>
-        <p:spPr>
-          <a:xfrm>
-            <a:off x="5989320" y="2295144"/>
-            <a:ext cx="1560003" cy="493776"/>
-          </a:xfrm>
-          <a:prstGeom prst="rect">
-            <a:avLst/>
-          </a:prstGeom>
-          <a:noFill/>
-          <a:ln/>
-        </p:spPr>
-        <p:txBody>
-          <a:bodyPr wrap="square" lIns="0" tIns="0" rIns="0" bIns="0" rtlCol="0" anchor="ctr"/>
-          <a:lstStyle/>
-          <a:p>
-            <a:pPr indent="0" marL="0">
-              <a:lnSpc>
-                <a:spcPct val="115000"/>
-              </a:lnSpc>
-              <a:buNone/>
-            </a:pPr>
-            <a:r>
-              <a:rPr lang="en-US" sz="1300" dirty="0">
-                <a:solidFill>
-                  <a:srgbClr val="5B6B73"/>
-                </a:solidFill>
-                <a:latin typeface="맑은 고딕" pitchFamily="34" charset="0"/>
-                <a:ea typeface="맑은 고딕" pitchFamily="34" charset="-122"/>
-                <a:cs typeface="맑은 고딕" pitchFamily="34" charset="-120"/>
-              </a:rPr>
-              <a:t>용도지역</a:t>
-            </a:r>
-            <a:endParaRPr lang="en-US" sz="1300" dirty="0"/>
-          </a:p>
-        </p:txBody>
-      </p:sp>
-      <p:sp>
-        <p:nvSpPr>
-          <p:cNvPr id="12" name="Text 9"/>
-          <p:cNvSpPr/>
-          <p:nvPr/>
-        </p:nvSpPr>
-        <p:spPr>
-          <a:xfrm>
-            <a:off x="7549323" y="2295144"/>
-            <a:ext cx="4011436" cy="493776"/>
-          </a:xfrm>
-          <a:prstGeom prst="rect">
-            <a:avLst/>
-          </a:prstGeom>
-          <a:noFill/>
-          <a:ln/>
-        </p:spPr>
-        <p:txBody>
-          <a:bodyPr wrap="square" lIns="0" tIns="0" rIns="0" bIns="0" rtlCol="0" anchor="ctr"/>
-          <a:lstStyle/>
-          <a:p>
-            <a:pPr indent="0" marL="0">
-              <a:lnSpc>
-                <a:spcPct val="115000"/>
-              </a:lnSpc>
-              <a:buNone/>
-            </a:pPr>
-            <a:r>
-              <a:rPr lang="en-US" sz="1300" b="1" dirty="0">
-                <a:solidFill>
-                  <a:srgbClr val="132A3A"/>
-                </a:solidFill>
-                <a:latin typeface="맑은 고딕" pitchFamily="34" charset="0"/>
-                <a:ea typeface="맑은 고딕" pitchFamily="34" charset="-122"/>
-                <a:cs typeface="맑은 고딕" pitchFamily="34" charset="-120"/>
-              </a:rPr>
-              <a:t>제3종일반주거지역</a:t>
-            </a:r>
-            <a:endParaRPr lang="en-US" sz="1300" dirty="0"/>
-          </a:p>
-        </p:txBody>
-      </p:sp>
-      <p:sp>
-        <p:nvSpPr>
-          <p:cNvPr id="13" name="Shape 10"/>
-          <p:cNvSpPr/>
-          <p:nvPr/>
-        </p:nvSpPr>
-        <p:spPr>
-          <a:xfrm>
-            <a:off x="5989320" y="2788920"/>
-            <a:ext cx="5571439" cy="0"/>
-          </a:xfrm>
-          <a:prstGeom prst="line">
-            <a:avLst/>
-          </a:prstGeom>
-          <a:noFill/>
-          <a:ln w="3810">
+      <p:pic>
+        <p:nvPicPr>
+          <p:cNvPr id="13" name="Image 1" descr="preencoded.png">    </p:cNvPr>
+          <p:cNvPicPr>
+            <a:picLocks noChangeAspect="1"/>
+          </p:cNvPicPr>
+          <p:nvPr/>
+        </p:nvPicPr>
+        <p:blipFill>
+          <a:blip r:embed="rId2"/>
+          <a:srcRect l="0" r="0" t="0" b="0"/>
+          <a:stretch/>
+        </p:blipFill>
+        <p:spPr>
+          <a:xfrm>
+            <a:off x="4231538" y="1234440"/>
+            <a:ext cx="3600602" cy="2290572"/>
+          </a:xfrm>
+          <a:prstGeom prst="rect">
+            <a:avLst/>
+          </a:prstGeom>
+        </p:spPr>
+      </p:pic>
+      <p:sp>
+        <p:nvSpPr>
+          <p:cNvPr id="14" name="Shape 10"/>
+          <p:cNvSpPr/>
+          <p:nvPr/>
+        </p:nvSpPr>
+        <p:spPr>
+          <a:xfrm>
+            <a:off x="4304690" y="1307592"/>
+            <a:ext cx="868680" cy="237744"/>
+          </a:xfrm>
+          <a:prstGeom prst="rect">
+            <a:avLst/>
+          </a:prstGeom>
+          <a:solidFill>
+            <a:srgbClr val="10161F">
+              <a:alpha val="80000"/>
+            </a:srgbClr>
+          </a:solidFill>
+          <a:ln/>
+        </p:spPr>
+      </p:sp>
+      <p:sp>
+        <p:nvSpPr>
+          <p:cNvPr id="15" name="Text 11"/>
+          <p:cNvSpPr/>
+          <p:nvPr/>
+        </p:nvSpPr>
+        <p:spPr>
+          <a:xfrm>
+            <a:off x="4304690" y="1307592"/>
+            <a:ext cx="868680" cy="237744"/>
+          </a:xfrm>
+          <a:prstGeom prst="rect">
+            <a:avLst/>
+          </a:prstGeom>
+          <a:noFill/>
+          <a:ln/>
+        </p:spPr>
+        <p:txBody>
+          <a:bodyPr wrap="square" lIns="0" tIns="0" rIns="0" bIns="0" rtlCol="0" anchor="ctr"/>
+          <a:lstStyle/>
+          <a:p>
+            <a:pPr algn="ctr" indent="0" marL="0">
+              <a:buNone/>
+            </a:pPr>
+            <a:r>
+              <a:rPr lang="en-US" sz="900" b="1" dirty="0">
+                <a:solidFill>
+                  <a:srgbClr val="FFFFFF"/>
+                </a:solidFill>
+                <a:latin typeface="맑은 고딕" pitchFamily="34" charset="0"/>
+                <a:ea typeface="맑은 고딕" pitchFamily="34" charset="-122"/>
+                <a:cs typeface="맑은 고딕" pitchFamily="34" charset="-120"/>
+              </a:rPr>
+              <a:t>주 출입구</a:t>
+            </a:r>
+            <a:endParaRPr lang="en-US" sz="900" dirty="0"/>
+          </a:p>
+        </p:txBody>
+      </p:sp>
+      <p:sp>
+        <p:nvSpPr>
+          <p:cNvPr id="16" name="Shape 12"/>
+          <p:cNvSpPr/>
+          <p:nvPr/>
+        </p:nvSpPr>
+        <p:spPr>
+          <a:xfrm>
+            <a:off x="4231538" y="3232404"/>
+            <a:ext cx="3600602" cy="292608"/>
+          </a:xfrm>
+          <a:prstGeom prst="rect">
+            <a:avLst/>
+          </a:prstGeom>
+          <a:solidFill>
+            <a:srgbClr val="000000">
+              <a:alpha val="60000"/>
+            </a:srgbClr>
+          </a:solidFill>
+          <a:ln/>
+        </p:spPr>
+      </p:sp>
+      <p:sp>
+        <p:nvSpPr>
+          <p:cNvPr id="17" name="Text 13"/>
+          <p:cNvSpPr/>
+          <p:nvPr/>
+        </p:nvSpPr>
+        <p:spPr>
+          <a:xfrm>
+            <a:off x="4341266" y="3232404"/>
+            <a:ext cx="3381146" cy="292608"/>
+          </a:xfrm>
+          <a:prstGeom prst="rect">
+            <a:avLst/>
+          </a:prstGeom>
+          <a:noFill/>
+          <a:ln/>
+        </p:spPr>
+        <p:txBody>
+          <a:bodyPr wrap="square" lIns="0" tIns="0" rIns="0" bIns="0" rtlCol="0" anchor="ctr"/>
+          <a:lstStyle/>
+          <a:p>
+            <a:pPr indent="0" marL="0">
+              <a:buNone/>
+            </a:pPr>
+            <a:r>
+              <a:rPr lang="en-US" sz="900" dirty="0">
+                <a:solidFill>
+                  <a:srgbClr val="FFFFFF"/>
+                </a:solidFill>
+                <a:latin typeface="맑은 고딕" pitchFamily="34" charset="0"/>
+                <a:ea typeface="맑은 고딕" pitchFamily="34" charset="-122"/>
+                <a:cs typeface="맑은 고딕" pitchFamily="34" charset="-120"/>
+              </a:rPr>
+              <a:t>지상 진입로 및 1층 전면 상가부</a:t>
+            </a:r>
+            <a:endParaRPr lang="en-US" sz="900" dirty="0"/>
+          </a:p>
+        </p:txBody>
+      </p:sp>
+      <p:sp>
+        <p:nvSpPr>
+          <p:cNvPr id="18" name="Shape 14"/>
+          <p:cNvSpPr/>
+          <p:nvPr/>
+        </p:nvSpPr>
+        <p:spPr>
+          <a:xfrm>
+            <a:off x="7960157" y="1234440"/>
+            <a:ext cx="3600602" cy="2290572"/>
+          </a:xfrm>
+          <a:prstGeom prst="roundRect">
+            <a:avLst>
+              <a:gd name="adj" fmla="val 2395"/>
+            </a:avLst>
+          </a:prstGeom>
+          <a:solidFill>
+            <a:srgbClr val="F0F0F0"/>
+          </a:solidFill>
+          <a:ln w="6350">
             <a:solidFill>
-              <a:srgbClr val="CBD5E0"/>
+              <a:srgbClr val="E0E0E0"/>
             </a:solidFill>
             <a:prstDash val="solid"/>
           </a:ln>
         </p:spPr>
       </p:sp>
-      <p:sp>
-        <p:nvSpPr>
-          <p:cNvPr id="14" name="Text 11"/>
-          <p:cNvSpPr/>
-          <p:nvPr/>
-        </p:nvSpPr>
-        <p:spPr>
-          <a:xfrm>
-            <a:off x="5989320" y="2788920"/>
-            <a:ext cx="1560003" cy="493776"/>
-          </a:xfrm>
-          <a:prstGeom prst="rect">
-            <a:avLst/>
-          </a:prstGeom>
-          <a:noFill/>
-          <a:ln/>
-        </p:spPr>
-        <p:txBody>
-          <a:bodyPr wrap="square" lIns="0" tIns="0" rIns="0" bIns="0" rtlCol="0" anchor="ctr"/>
-          <a:lstStyle/>
-          <a:p>
-            <a:pPr indent="0" marL="0">
-              <a:lnSpc>
-                <a:spcPct val="115000"/>
-              </a:lnSpc>
-              <a:buNone/>
-            </a:pPr>
-            <a:r>
-              <a:rPr lang="en-US" sz="1300" dirty="0">
-                <a:solidFill>
-                  <a:srgbClr val="5B6B73"/>
-                </a:solidFill>
-                <a:latin typeface="맑은 고딕" pitchFamily="34" charset="0"/>
-                <a:ea typeface="맑은 고딕" pitchFamily="34" charset="-122"/>
-                <a:cs typeface="맑은 고딕" pitchFamily="34" charset="-120"/>
-              </a:rPr>
-              <a:t>건폐율</a:t>
-            </a:r>
-            <a:endParaRPr lang="en-US" sz="1300" dirty="0"/>
-          </a:p>
-        </p:txBody>
-      </p:sp>
-      <p:sp>
-        <p:nvSpPr>
-          <p:cNvPr id="15" name="Text 12"/>
-          <p:cNvSpPr/>
-          <p:nvPr/>
-        </p:nvSpPr>
-        <p:spPr>
-          <a:xfrm>
-            <a:off x="7549323" y="2788920"/>
-            <a:ext cx="4011436" cy="493776"/>
-          </a:xfrm>
-          <a:prstGeom prst="rect">
-            <a:avLst/>
-          </a:prstGeom>
-          <a:noFill/>
-          <a:ln/>
-        </p:spPr>
-        <p:txBody>
-          <a:bodyPr wrap="square" lIns="0" tIns="0" rIns="0" bIns="0" rtlCol="0" anchor="ctr"/>
-          <a:lstStyle/>
-          <a:p>
-            <a:pPr indent="0" marL="0">
-              <a:lnSpc>
-                <a:spcPct val="115000"/>
-              </a:lnSpc>
-              <a:buNone/>
-            </a:pPr>
-            <a:r>
-              <a:rPr lang="en-US" sz="1300" b="1" dirty="0">
-                <a:solidFill>
-                  <a:srgbClr val="132A3A"/>
-                </a:solidFill>
-                <a:latin typeface="맑은 고딕" pitchFamily="34" charset="0"/>
-                <a:ea typeface="맑은 고딕" pitchFamily="34" charset="-122"/>
-                <a:cs typeface="맑은 고딕" pitchFamily="34" charset="-120"/>
-              </a:rPr>
-              <a:t>현행 51.3% (법정 상한 50%)</a:t>
-            </a:r>
-            <a:endParaRPr lang="en-US" sz="1300" dirty="0"/>
-          </a:p>
-        </p:txBody>
-      </p:sp>
-      <p:sp>
-        <p:nvSpPr>
-          <p:cNvPr id="16" name="Shape 13"/>
-          <p:cNvSpPr/>
-          <p:nvPr/>
-        </p:nvSpPr>
-        <p:spPr>
-          <a:xfrm>
-            <a:off x="5989320" y="3282696"/>
-            <a:ext cx="5571439" cy="0"/>
-          </a:xfrm>
-          <a:prstGeom prst="line">
-            <a:avLst/>
-          </a:prstGeom>
-          <a:noFill/>
-          <a:ln w="3810">
+      <p:pic>
+        <p:nvPicPr>
+          <p:cNvPr id="19" name="Image 2" descr="preencoded.png">    </p:cNvPr>
+          <p:cNvPicPr>
+            <a:picLocks noChangeAspect="1"/>
+          </p:cNvPicPr>
+          <p:nvPr/>
+        </p:nvPicPr>
+        <p:blipFill>
+          <a:blip r:embed="rId3"/>
+          <a:srcRect l="0" r="0" t="0" b="0"/>
+          <a:stretch/>
+        </p:blipFill>
+        <p:spPr>
+          <a:xfrm>
+            <a:off x="7960157" y="1234440"/>
+            <a:ext cx="3600602" cy="2290572"/>
+          </a:xfrm>
+          <a:prstGeom prst="rect">
+            <a:avLst/>
+          </a:prstGeom>
+        </p:spPr>
+      </p:pic>
+      <p:sp>
+        <p:nvSpPr>
+          <p:cNvPr id="20" name="Shape 15"/>
+          <p:cNvSpPr/>
+          <p:nvPr/>
+        </p:nvSpPr>
+        <p:spPr>
+          <a:xfrm>
+            <a:off x="8033309" y="1307592"/>
+            <a:ext cx="868680" cy="237744"/>
+          </a:xfrm>
+          <a:prstGeom prst="rect">
+            <a:avLst/>
+          </a:prstGeom>
+          <a:solidFill>
+            <a:srgbClr val="10161F">
+              <a:alpha val="80000"/>
+            </a:srgbClr>
+          </a:solidFill>
+          <a:ln/>
+        </p:spPr>
+      </p:sp>
+      <p:sp>
+        <p:nvSpPr>
+          <p:cNvPr id="21" name="Text 16"/>
+          <p:cNvSpPr/>
+          <p:nvPr/>
+        </p:nvSpPr>
+        <p:spPr>
+          <a:xfrm>
+            <a:off x="8033309" y="1307592"/>
+            <a:ext cx="868680" cy="237744"/>
+          </a:xfrm>
+          <a:prstGeom prst="rect">
+            <a:avLst/>
+          </a:prstGeom>
+          <a:noFill/>
+          <a:ln/>
+        </p:spPr>
+        <p:txBody>
+          <a:bodyPr wrap="square" lIns="0" tIns="0" rIns="0" bIns="0" rtlCol="0" anchor="ctr"/>
+          <a:lstStyle/>
+          <a:p>
+            <a:pPr algn="ctr" indent="0" marL="0">
+              <a:buNone/>
+            </a:pPr>
+            <a:r>
+              <a:rPr lang="en-US" sz="900" b="1" dirty="0">
+                <a:solidFill>
+                  <a:srgbClr val="FFFFFF"/>
+                </a:solidFill>
+                <a:latin typeface="맑은 고딕" pitchFamily="34" charset="0"/>
+                <a:ea typeface="맑은 고딕" pitchFamily="34" charset="-122"/>
+                <a:cs typeface="맑은 고딕" pitchFamily="34" charset="-120"/>
+              </a:rPr>
+              <a:t>실내 공간</a:t>
+            </a:r>
+            <a:endParaRPr lang="en-US" sz="900" dirty="0"/>
+          </a:p>
+        </p:txBody>
+      </p:sp>
+      <p:sp>
+        <p:nvSpPr>
+          <p:cNvPr id="22" name="Shape 17"/>
+          <p:cNvSpPr/>
+          <p:nvPr/>
+        </p:nvSpPr>
+        <p:spPr>
+          <a:xfrm>
+            <a:off x="7960157" y="3232404"/>
+            <a:ext cx="3600602" cy="292608"/>
+          </a:xfrm>
+          <a:prstGeom prst="rect">
+            <a:avLst/>
+          </a:prstGeom>
+          <a:solidFill>
+            <a:srgbClr val="000000">
+              <a:alpha val="60000"/>
+            </a:srgbClr>
+          </a:solidFill>
+          <a:ln/>
+        </p:spPr>
+      </p:sp>
+      <p:sp>
+        <p:nvSpPr>
+          <p:cNvPr id="23" name="Text 18"/>
+          <p:cNvSpPr/>
+          <p:nvPr/>
+        </p:nvSpPr>
+        <p:spPr>
+          <a:xfrm>
+            <a:off x="8069885" y="3232404"/>
+            <a:ext cx="3381146" cy="292608"/>
+          </a:xfrm>
+          <a:prstGeom prst="rect">
+            <a:avLst/>
+          </a:prstGeom>
+          <a:noFill/>
+          <a:ln/>
+        </p:spPr>
+        <p:txBody>
+          <a:bodyPr wrap="square" lIns="0" tIns="0" rIns="0" bIns="0" rtlCol="0" anchor="ctr"/>
+          <a:lstStyle/>
+          <a:p>
+            <a:pPr indent="0" marL="0">
+              <a:buNone/>
+            </a:pPr>
+            <a:r>
+              <a:rPr lang="en-US" sz="900" dirty="0">
+                <a:solidFill>
+                  <a:srgbClr val="FFFFFF"/>
+                </a:solidFill>
+                <a:latin typeface="맑은 고딕" pitchFamily="34" charset="0"/>
+                <a:ea typeface="맑은 고딕" pitchFamily="34" charset="-122"/>
+                <a:cs typeface="맑은 고딕" pitchFamily="34" charset="-120"/>
+              </a:rPr>
+              <a:t>건물 측면부 및 도로 접면</a:t>
+            </a:r>
+            <a:endParaRPr lang="en-US" sz="900" dirty="0"/>
+          </a:p>
+        </p:txBody>
+      </p:sp>
+      <p:sp>
+        <p:nvSpPr>
+          <p:cNvPr id="24" name="Shape 19"/>
+          <p:cNvSpPr/>
+          <p:nvPr/>
+        </p:nvSpPr>
+        <p:spPr>
+          <a:xfrm>
+            <a:off x="502920" y="3653028"/>
+            <a:ext cx="3600602" cy="2290572"/>
+          </a:xfrm>
+          <a:prstGeom prst="roundRect">
+            <a:avLst>
+              <a:gd name="adj" fmla="val 2395"/>
+            </a:avLst>
+          </a:prstGeom>
+          <a:solidFill>
+            <a:srgbClr val="F0F0F0"/>
+          </a:solidFill>
+          <a:ln w="6350">
             <a:solidFill>
-              <a:srgbClr val="CBD5E0"/>
+              <a:srgbClr val="E0E0E0"/>
             </a:solidFill>
             <a:prstDash val="solid"/>
           </a:ln>
         </p:spPr>
       </p:sp>
-      <p:sp>
-        <p:nvSpPr>
-          <p:cNvPr id="17" name="Text 14"/>
-          <p:cNvSpPr/>
-          <p:nvPr/>
-        </p:nvSpPr>
-        <p:spPr>
-          <a:xfrm>
-            <a:off x="5989320" y="3282696"/>
-            <a:ext cx="1560003" cy="493776"/>
-          </a:xfrm>
-          <a:prstGeom prst="rect">
-            <a:avLst/>
-          </a:prstGeom>
-          <a:noFill/>
-          <a:ln/>
-        </p:spPr>
-        <p:txBody>
-          <a:bodyPr wrap="square" lIns="0" tIns="0" rIns="0" bIns="0" rtlCol="0" anchor="ctr"/>
-          <a:lstStyle/>
-          <a:p>
-            <a:pPr indent="0" marL="0">
-              <a:lnSpc>
-                <a:spcPct val="115000"/>
-              </a:lnSpc>
-              <a:buNone/>
-            </a:pPr>
-            <a:r>
-              <a:rPr lang="en-US" sz="1300" dirty="0">
-                <a:solidFill>
-                  <a:srgbClr val="5B6B73"/>
-                </a:solidFill>
-                <a:latin typeface="맑은 고딕" pitchFamily="34" charset="0"/>
-                <a:ea typeface="맑은 고딕" pitchFamily="34" charset="-122"/>
-                <a:cs typeface="맑은 고딕" pitchFamily="34" charset="-120"/>
-              </a:rPr>
-              <a:t>용적률</a:t>
-            </a:r>
-            <a:endParaRPr lang="en-US" sz="1300" dirty="0"/>
-          </a:p>
-        </p:txBody>
-      </p:sp>
-      <p:sp>
-        <p:nvSpPr>
-          <p:cNvPr id="18" name="Text 15"/>
-          <p:cNvSpPr/>
-          <p:nvPr/>
-        </p:nvSpPr>
-        <p:spPr>
-          <a:xfrm>
-            <a:off x="7549323" y="3282696"/>
-            <a:ext cx="4011436" cy="493776"/>
-          </a:xfrm>
-          <a:prstGeom prst="rect">
-            <a:avLst/>
-          </a:prstGeom>
-          <a:noFill/>
-          <a:ln/>
-        </p:spPr>
-        <p:txBody>
-          <a:bodyPr wrap="square" lIns="0" tIns="0" rIns="0" bIns="0" rtlCol="0" anchor="ctr"/>
-          <a:lstStyle/>
-          <a:p>
-            <a:pPr indent="0" marL="0">
-              <a:lnSpc>
-                <a:spcPct val="115000"/>
-              </a:lnSpc>
-              <a:buNone/>
-            </a:pPr>
-            <a:r>
-              <a:rPr lang="en-US" sz="1300" b="1" dirty="0">
-                <a:solidFill>
-                  <a:srgbClr val="132A3A"/>
-                </a:solidFill>
-                <a:latin typeface="맑은 고딕" pitchFamily="34" charset="0"/>
-                <a:ea typeface="맑은 고딕" pitchFamily="34" charset="-122"/>
-                <a:cs typeface="맑은 고딕" pitchFamily="34" charset="-120"/>
-              </a:rPr>
-              <a:t>현행 237.2% (법정 상한 250%)</a:t>
-            </a:r>
-            <a:endParaRPr lang="en-US" sz="1300" dirty="0"/>
-          </a:p>
-        </p:txBody>
-      </p:sp>
-      <p:sp>
-        <p:nvSpPr>
-          <p:cNvPr id="19" name="Text 16"/>
-          <p:cNvSpPr/>
-          <p:nvPr/>
-        </p:nvSpPr>
-        <p:spPr>
-          <a:xfrm>
-            <a:off x="5989320" y="5715000"/>
-            <a:ext cx="5571439" cy="384048"/>
-          </a:xfrm>
-          <a:prstGeom prst="rect">
-            <a:avLst/>
-          </a:prstGeom>
-          <a:noFill/>
-          <a:ln/>
-        </p:spPr>
-        <p:txBody>
-          <a:bodyPr wrap="square" lIns="0" tIns="0" rIns="0" bIns="0" rtlCol="0" anchor="ctr"/>
-          <a:lstStyle/>
-          <a:p>
-            <a:pPr indent="0" marL="0">
-              <a:lnSpc>
-                <a:spcPct val="125000"/>
-              </a:lnSpc>
-              <a:buNone/>
-            </a:pPr>
-            <a:r>
-              <a:rPr lang="en-US" sz="1100" dirty="0">
-                <a:solidFill>
-                  <a:srgbClr val="8A9AA3"/>
-                </a:solidFill>
-                <a:latin typeface="맑은 고딕" pitchFamily="34" charset="0"/>
-                <a:ea typeface="맑은 고딕" pitchFamily="34" charset="-122"/>
-                <a:cs typeface="맑은 고딕" pitchFamily="34" charset="-120"/>
-              </a:rPr>
-              <a:t>© V-World 국토교통부 | 2026</a:t>
-            </a:r>
-            <a:endParaRPr lang="en-US" sz="1100" dirty="0"/>
-          </a:p>
-        </p:txBody>
-      </p:sp>
-      <p:sp>
-        <p:nvSpPr>
-          <p:cNvPr id="20" name="Text 17"/>
+      <p:pic>
+        <p:nvPicPr>
+          <p:cNvPr id="25" name="Image 3" descr="preencoded.png">    </p:cNvPr>
+          <p:cNvPicPr>
+            <a:picLocks noChangeAspect="1"/>
+          </p:cNvPicPr>
+          <p:nvPr/>
+        </p:nvPicPr>
+        <p:blipFill>
+          <a:blip r:embed="rId4"/>
+          <a:srcRect l="0" r="0" t="0" b="0"/>
+          <a:stretch/>
+        </p:blipFill>
+        <p:spPr>
+          <a:xfrm>
+            <a:off x="502920" y="3653028"/>
+            <a:ext cx="3600602" cy="2290572"/>
+          </a:xfrm>
+          <a:prstGeom prst="rect">
+            <a:avLst/>
+          </a:prstGeom>
+        </p:spPr>
+      </p:pic>
+      <p:sp>
+        <p:nvSpPr>
+          <p:cNvPr id="26" name="Shape 20"/>
+          <p:cNvSpPr/>
+          <p:nvPr/>
+        </p:nvSpPr>
+        <p:spPr>
+          <a:xfrm>
+            <a:off x="576072" y="3726180"/>
+            <a:ext cx="822960" cy="237744"/>
+          </a:xfrm>
+          <a:prstGeom prst="rect">
+            <a:avLst/>
+          </a:prstGeom>
+          <a:solidFill>
+            <a:srgbClr val="10161F">
+              <a:alpha val="80000"/>
+            </a:srgbClr>
+          </a:solidFill>
+          <a:ln/>
+        </p:spPr>
+      </p:sp>
+      <p:sp>
+        <p:nvSpPr>
+          <p:cNvPr id="27" name="Text 21"/>
+          <p:cNvSpPr/>
+          <p:nvPr/>
+        </p:nvSpPr>
+        <p:spPr>
+          <a:xfrm>
+            <a:off x="576072" y="3726180"/>
+            <a:ext cx="822960" cy="237744"/>
+          </a:xfrm>
+          <a:prstGeom prst="rect">
+            <a:avLst/>
+          </a:prstGeom>
+          <a:noFill/>
+          <a:ln/>
+        </p:spPr>
+        <p:txBody>
+          <a:bodyPr wrap="square" lIns="0" tIns="0" rIns="0" bIns="0" rtlCol="0" anchor="ctr"/>
+          <a:lstStyle/>
+          <a:p>
+            <a:pPr algn="ctr" indent="0" marL="0">
+              <a:buNone/>
+            </a:pPr>
+            <a:r>
+              <a:rPr lang="en-US" sz="900" b="1" dirty="0">
+                <a:solidFill>
+                  <a:srgbClr val="FFFFFF"/>
+                </a:solidFill>
+                <a:latin typeface="맑은 고딕" pitchFamily="34" charset="0"/>
+                <a:ea typeface="맑은 고딕" pitchFamily="34" charset="-122"/>
+                <a:cs typeface="맑은 고딕" pitchFamily="34" charset="-120"/>
+              </a:rPr>
+              <a:t>주차장</a:t>
+            </a:r>
+            <a:endParaRPr lang="en-US" sz="900" dirty="0"/>
+          </a:p>
+        </p:txBody>
+      </p:sp>
+      <p:sp>
+        <p:nvSpPr>
+          <p:cNvPr id="28" name="Shape 22"/>
+          <p:cNvSpPr/>
+          <p:nvPr/>
+        </p:nvSpPr>
+        <p:spPr>
+          <a:xfrm>
+            <a:off x="502920" y="5650992"/>
+            <a:ext cx="3600602" cy="292608"/>
+          </a:xfrm>
+          <a:prstGeom prst="rect">
+            <a:avLst/>
+          </a:prstGeom>
+          <a:solidFill>
+            <a:srgbClr val="000000">
+              <a:alpha val="60000"/>
+            </a:srgbClr>
+          </a:solidFill>
+          <a:ln/>
+        </p:spPr>
+      </p:sp>
+      <p:sp>
+        <p:nvSpPr>
+          <p:cNvPr id="29" name="Text 23"/>
+          <p:cNvSpPr/>
+          <p:nvPr/>
+        </p:nvSpPr>
+        <p:spPr>
+          <a:xfrm>
+            <a:off x="612648" y="5650992"/>
+            <a:ext cx="3381146" cy="292608"/>
+          </a:xfrm>
+          <a:prstGeom prst="rect">
+            <a:avLst/>
+          </a:prstGeom>
+          <a:noFill/>
+          <a:ln/>
+        </p:spPr>
+        <p:txBody>
+          <a:bodyPr wrap="square" lIns="0" tIns="0" rIns="0" bIns="0" rtlCol="0" anchor="ctr"/>
+          <a:lstStyle/>
+          <a:p>
+            <a:pPr indent="0" marL="0">
+              <a:buNone/>
+            </a:pPr>
+            <a:r>
+              <a:rPr lang="en-US" sz="900" dirty="0">
+                <a:solidFill>
+                  <a:srgbClr val="FFFFFF"/>
+                </a:solidFill>
+                <a:latin typeface="맑은 고딕" pitchFamily="34" charset="0"/>
+                <a:ea typeface="맑은 고딕" pitchFamily="34" charset="-122"/>
+                <a:cs typeface="맑은 고딕" pitchFamily="34" charset="-120"/>
+              </a:rPr>
+              <a:t>자주식/기계식 주차장 진입로 (총 26대)</a:t>
+            </a:r>
+            <a:endParaRPr lang="en-US" sz="900" dirty="0"/>
+          </a:p>
+        </p:txBody>
+      </p:sp>
+      <p:sp>
+        <p:nvSpPr>
+          <p:cNvPr id="30" name="Shape 24"/>
+          <p:cNvSpPr/>
+          <p:nvPr/>
+        </p:nvSpPr>
+        <p:spPr>
+          <a:xfrm>
+            <a:off x="4231538" y="3653028"/>
+            <a:ext cx="3600602" cy="2290572"/>
+          </a:xfrm>
+          <a:prstGeom prst="roundRect">
+            <a:avLst>
+              <a:gd name="adj" fmla="val 2395"/>
+            </a:avLst>
+          </a:prstGeom>
+          <a:solidFill>
+            <a:srgbClr val="F0F0F0"/>
+          </a:solidFill>
+          <a:ln w="6350">
+            <a:solidFill>
+              <a:srgbClr val="E0E0E0"/>
+            </a:solidFill>
+            <a:prstDash val="solid"/>
+          </a:ln>
+        </p:spPr>
+      </p:sp>
+      <p:pic>
+        <p:nvPicPr>
+          <p:cNvPr id="31" name="Image 4" descr="preencoded.png">    </p:cNvPr>
+          <p:cNvPicPr>
+            <a:picLocks noChangeAspect="1"/>
+          </p:cNvPicPr>
+          <p:nvPr/>
+        </p:nvPicPr>
+        <p:blipFill>
+          <a:blip r:embed="rId5"/>
+          <a:srcRect l="0" r="0" t="0" b="0"/>
+          <a:stretch/>
+        </p:blipFill>
+        <p:spPr>
+          <a:xfrm>
+            <a:off x="4231538" y="3653028"/>
+            <a:ext cx="3600602" cy="2290572"/>
+          </a:xfrm>
+          <a:prstGeom prst="rect">
+            <a:avLst/>
+          </a:prstGeom>
+        </p:spPr>
+      </p:pic>
+      <p:sp>
+        <p:nvSpPr>
+          <p:cNvPr id="32" name="Shape 25"/>
+          <p:cNvSpPr/>
+          <p:nvPr/>
+        </p:nvSpPr>
+        <p:spPr>
+          <a:xfrm>
+            <a:off x="4304690" y="3726180"/>
+            <a:ext cx="996696" cy="237744"/>
+          </a:xfrm>
+          <a:prstGeom prst="rect">
+            <a:avLst/>
+          </a:prstGeom>
+          <a:solidFill>
+            <a:srgbClr val="10161F">
+              <a:alpha val="80000"/>
+            </a:srgbClr>
+          </a:solidFill>
+          <a:ln/>
+        </p:spPr>
+      </p:sp>
+      <p:sp>
+        <p:nvSpPr>
+          <p:cNvPr id="33" name="Text 26"/>
+          <p:cNvSpPr/>
+          <p:nvPr/>
+        </p:nvSpPr>
+        <p:spPr>
+          <a:xfrm>
+            <a:off x="4304690" y="3726180"/>
+            <a:ext cx="996696" cy="237744"/>
+          </a:xfrm>
+          <a:prstGeom prst="rect">
+            <a:avLst/>
+          </a:prstGeom>
+          <a:noFill/>
+          <a:ln/>
+        </p:spPr>
+        <p:txBody>
+          <a:bodyPr wrap="square" lIns="0" tIns="0" rIns="0" bIns="0" rtlCol="0" anchor="ctr"/>
+          <a:lstStyle/>
+          <a:p>
+            <a:pPr algn="ctr" indent="0" marL="0">
+              <a:buNone/>
+            </a:pPr>
+            <a:r>
+              <a:rPr lang="en-US" sz="900" b="1" dirty="0">
+                <a:solidFill>
+                  <a:srgbClr val="FFFFFF"/>
+                </a:solidFill>
+                <a:latin typeface="맑은 고딕" pitchFamily="34" charset="0"/>
+                <a:ea typeface="맑은 고딕" pitchFamily="34" charset="-122"/>
+                <a:cs typeface="맑은 고딕" pitchFamily="34" charset="-120"/>
+              </a:rPr>
+              <a:t>옥상/테라스</a:t>
+            </a:r>
+            <a:endParaRPr lang="en-US" sz="900" dirty="0"/>
+          </a:p>
+        </p:txBody>
+      </p:sp>
+      <p:sp>
+        <p:nvSpPr>
+          <p:cNvPr id="34" name="Shape 27"/>
+          <p:cNvSpPr/>
+          <p:nvPr/>
+        </p:nvSpPr>
+        <p:spPr>
+          <a:xfrm>
+            <a:off x="4231538" y="5650992"/>
+            <a:ext cx="3600602" cy="292608"/>
+          </a:xfrm>
+          <a:prstGeom prst="rect">
+            <a:avLst/>
+          </a:prstGeom>
+          <a:solidFill>
+            <a:srgbClr val="000000">
+              <a:alpha val="60000"/>
+            </a:srgbClr>
+          </a:solidFill>
+          <a:ln/>
+        </p:spPr>
+      </p:sp>
+      <p:sp>
+        <p:nvSpPr>
+          <p:cNvPr id="35" name="Text 28"/>
+          <p:cNvSpPr/>
+          <p:nvPr/>
+        </p:nvSpPr>
+        <p:spPr>
+          <a:xfrm>
+            <a:off x="4341266" y="5650992"/>
+            <a:ext cx="3381146" cy="292608"/>
+          </a:xfrm>
+          <a:prstGeom prst="rect">
+            <a:avLst/>
+          </a:prstGeom>
+          <a:noFill/>
+          <a:ln/>
+        </p:spPr>
+        <p:txBody>
+          <a:bodyPr wrap="square" lIns="0" tIns="0" rIns="0" bIns="0" rtlCol="0" anchor="ctr"/>
+          <a:lstStyle/>
+          <a:p>
+            <a:pPr indent="0" marL="0">
+              <a:buNone/>
+            </a:pPr>
+            <a:r>
+              <a:rPr lang="en-US" sz="900" dirty="0">
+                <a:solidFill>
+                  <a:srgbClr val="FFFFFF"/>
+                </a:solidFill>
+                <a:latin typeface="맑은 고딕" pitchFamily="34" charset="0"/>
+                <a:ea typeface="맑은 고딕" pitchFamily="34" charset="-122"/>
+                <a:cs typeface="맑은 고딕" pitchFamily="34" charset="-120"/>
+              </a:rPr>
+              <a:t>상층부 외관 및 옥상 공간</a:t>
+            </a:r>
+            <a:endParaRPr lang="en-US" sz="900" dirty="0"/>
+          </a:p>
+        </p:txBody>
+      </p:sp>
+      <p:sp>
+        <p:nvSpPr>
+          <p:cNvPr id="36" name="Text 29"/>
           <p:cNvSpPr/>
           <p:nvPr/>
         </p:nvSpPr>
@@ -8255,7 +8584,7 @@
       </p:sp>
       <p:sp>
         <p:nvSpPr>
-          <p:cNvPr id="21" name="Text 18"/>
+          <p:cNvPr id="37" name="Text 30"/>
           <p:cNvSpPr/>
           <p:nvPr/>
         </p:nvSpPr>
@@ -8303,1113 +8632,6 @@
 <file path=ppt/slides/slide7.xml><?xml version="1.0" encoding="utf-8"?>
 <p:sld xmlns:a="http://schemas.openxmlformats.org/drawingml/2006/main" xmlns:r="http://schemas.openxmlformats.org/officeDocument/2006/relationships" xmlns:p="http://schemas.openxmlformats.org/presentationml/2006/main">
   <p:cSld name="Slide 7">
-    <p:bg>
-      <p:bgPr>
-        <a:solidFill>
-          <a:srgbClr val="FFFFFF"/>
-        </a:solidFill>
-      </p:bgPr>
-    </p:bg>
-    <p:spTree>
-      <p:nvGrpSpPr>
-        <p:cNvPr id="1" name=""/>
-        <p:cNvGrpSpPr/>
-        <p:nvPr/>
-      </p:nvGrpSpPr>
-      <p:grpSpPr>
-        <a:xfrm>
-          <a:off x="0" y="0"/>
-          <a:ext cx="0" cy="0"/>
-          <a:chOff x="0" y="0"/>
-          <a:chExt cx="0" cy="0"/>
-        </a:xfrm>
-      </p:grpSpPr>
-      <p:sp>
-        <p:nvSpPr>
-          <p:cNvPr id="2" name="Shape 0"/>
-          <p:cNvSpPr/>
-          <p:nvPr/>
-        </p:nvSpPr>
-        <p:spPr>
-          <a:xfrm>
-            <a:off x="502920" y="457200"/>
-            <a:ext cx="384048" cy="384048"/>
-          </a:xfrm>
-          <a:prstGeom prst="ellipse">
-            <a:avLst/>
-          </a:prstGeom>
-          <a:solidFill>
-            <a:srgbClr val="B8860B"/>
-          </a:solidFill>
-          <a:ln/>
-        </p:spPr>
-      </p:sp>
-      <p:sp>
-        <p:nvSpPr>
-          <p:cNvPr id="3" name="Text 1"/>
-          <p:cNvSpPr/>
-          <p:nvPr/>
-        </p:nvSpPr>
-        <p:spPr>
-          <a:xfrm>
-            <a:off x="502920" y="457200"/>
-            <a:ext cx="384048" cy="384048"/>
-          </a:xfrm>
-          <a:prstGeom prst="rect">
-            <a:avLst/>
-          </a:prstGeom>
-          <a:noFill/>
-          <a:ln/>
-        </p:spPr>
-        <p:txBody>
-          <a:bodyPr wrap="square" lIns="0" tIns="0" rIns="0" bIns="0" rtlCol="0" anchor="ctr"/>
-          <a:lstStyle/>
-          <a:p>
-            <a:pPr algn="ctr" indent="0" marL="0">
-              <a:buNone/>
-            </a:pPr>
-            <a:r>
-              <a:rPr lang="en-US" sz="1300" b="1" dirty="0">
-                <a:solidFill>
-                  <a:srgbClr val="FFFFFF"/>
-                </a:solidFill>
-                <a:latin typeface="Arial" pitchFamily="34" charset="0"/>
-                <a:ea typeface="Arial" pitchFamily="34" charset="-122"/>
-                <a:cs typeface="Arial" pitchFamily="34" charset="-120"/>
-              </a:rPr>
-              <a:t>07</a:t>
-            </a:r>
-            <a:endParaRPr lang="en-US" sz="1300" dirty="0"/>
-          </a:p>
-        </p:txBody>
-      </p:sp>
-      <p:sp>
-        <p:nvSpPr>
-          <p:cNvPr id="4" name="Text 2"/>
-          <p:cNvSpPr/>
-          <p:nvPr/>
-        </p:nvSpPr>
-        <p:spPr>
-          <a:xfrm>
-            <a:off x="1069848" y="457200"/>
-            <a:ext cx="10490911" cy="182880"/>
-          </a:xfrm>
-          <a:prstGeom prst="rect">
-            <a:avLst/>
-          </a:prstGeom>
-          <a:noFill/>
-          <a:ln/>
-        </p:spPr>
-        <p:txBody>
-          <a:bodyPr wrap="square" lIns="0" tIns="0" rIns="0" bIns="0" rtlCol="0" anchor="ctr"/>
-          <a:lstStyle/>
-          <a:p>
-            <a:pPr indent="0" marL="0">
-              <a:buNone/>
-            </a:pPr>
-            <a:r>
-              <a:rPr lang="en-US" sz="950" b="1" spc="200" kern="0" dirty="0">
-                <a:solidFill>
-                  <a:srgbClr val="B8860B"/>
-                </a:solidFill>
-                <a:latin typeface="Arial" pitchFamily="34" charset="0"/>
-                <a:ea typeface="Arial" pitchFamily="34" charset="-122"/>
-                <a:cs typeface="Arial" pitchFamily="34" charset="-120"/>
-              </a:rPr>
-              <a:t>Gallery</a:t>
-            </a:r>
-            <a:endParaRPr lang="en-US" sz="950" dirty="0"/>
-          </a:p>
-        </p:txBody>
-      </p:sp>
-      <p:sp>
-        <p:nvSpPr>
-          <p:cNvPr id="5" name="Text 3"/>
-          <p:cNvSpPr/>
-          <p:nvPr/>
-        </p:nvSpPr>
-        <p:spPr>
-          <a:xfrm>
-            <a:off x="1069848" y="640080"/>
-            <a:ext cx="10490911" cy="365760"/>
-          </a:xfrm>
-          <a:prstGeom prst="rect">
-            <a:avLst/>
-          </a:prstGeom>
-          <a:noFill/>
-          <a:ln/>
-        </p:spPr>
-        <p:txBody>
-          <a:bodyPr wrap="square" lIns="0" tIns="0" rIns="0" bIns="0" rtlCol="0" anchor="ctr"/>
-          <a:lstStyle/>
-          <a:p>
-            <a:pPr indent="0" marL="0">
-              <a:buNone/>
-            </a:pPr>
-            <a:r>
-              <a:rPr lang="en-US" sz="2300" b="1" dirty="0">
-                <a:solidFill>
-                  <a:srgbClr val="132A3A"/>
-                </a:solidFill>
-                <a:latin typeface="맑은 고딕" pitchFamily="34" charset="0"/>
-                <a:ea typeface="맑은 고딕" pitchFamily="34" charset="-122"/>
-                <a:cs typeface="맑은 고딕" pitchFamily="34" charset="-120"/>
-              </a:rPr>
-              <a:t>현장 사진</a:t>
-            </a:r>
-            <a:endParaRPr lang="en-US" sz="2300" dirty="0"/>
-          </a:p>
-        </p:txBody>
-      </p:sp>
-      <p:sp>
-        <p:nvSpPr>
-          <p:cNvPr id="6" name="Shape 4"/>
-          <p:cNvSpPr/>
-          <p:nvPr/>
-        </p:nvSpPr>
-        <p:spPr>
-          <a:xfrm>
-            <a:off x="502920" y="1234440"/>
-            <a:ext cx="3600602" cy="2290572"/>
-          </a:xfrm>
-          <a:prstGeom prst="roundRect">
-            <a:avLst>
-              <a:gd name="adj" fmla="val 2395"/>
-            </a:avLst>
-          </a:prstGeom>
-          <a:solidFill>
-            <a:srgbClr val="F0F0F0"/>
-          </a:solidFill>
-          <a:ln w="6350">
-            <a:solidFill>
-              <a:srgbClr val="E0E0E0"/>
-            </a:solidFill>
-            <a:prstDash val="solid"/>
-          </a:ln>
-        </p:spPr>
-      </p:sp>
-      <p:pic>
-        <p:nvPicPr>
-          <p:cNvPr id="7" name="Image 0" descr="preencoded.png">    </p:cNvPr>
-          <p:cNvPicPr>
-            <a:picLocks noChangeAspect="1"/>
-          </p:cNvPicPr>
-          <p:nvPr/>
-        </p:nvPicPr>
-        <p:blipFill>
-          <a:blip r:embed="rId1"/>
-          <a:srcRect l="0" r="0" t="0" b="0"/>
-          <a:stretch/>
-        </p:blipFill>
-        <p:spPr>
-          <a:xfrm>
-            <a:off x="502920" y="1234440"/>
-            <a:ext cx="3600602" cy="2290572"/>
-          </a:xfrm>
-          <a:prstGeom prst="rect">
-            <a:avLst/>
-          </a:prstGeom>
-        </p:spPr>
-      </p:pic>
-      <p:sp>
-        <p:nvSpPr>
-          <p:cNvPr id="8" name="Shape 5"/>
-          <p:cNvSpPr/>
-          <p:nvPr/>
-        </p:nvSpPr>
-        <p:spPr>
-          <a:xfrm>
-            <a:off x="576072" y="1307592"/>
-            <a:ext cx="868680" cy="237744"/>
-          </a:xfrm>
-          <a:prstGeom prst="rect">
-            <a:avLst/>
-          </a:prstGeom>
-          <a:solidFill>
-            <a:srgbClr val="10161F">
-              <a:alpha val="80000"/>
-            </a:srgbClr>
-          </a:solidFill>
-          <a:ln/>
-        </p:spPr>
-      </p:sp>
-      <p:sp>
-        <p:nvSpPr>
-          <p:cNvPr id="9" name="Text 6"/>
-          <p:cNvSpPr/>
-          <p:nvPr/>
-        </p:nvSpPr>
-        <p:spPr>
-          <a:xfrm>
-            <a:off x="576072" y="1307592"/>
-            <a:ext cx="868680" cy="237744"/>
-          </a:xfrm>
-          <a:prstGeom prst="rect">
-            <a:avLst/>
-          </a:prstGeom>
-          <a:noFill/>
-          <a:ln/>
-        </p:spPr>
-        <p:txBody>
-          <a:bodyPr wrap="square" lIns="0" tIns="0" rIns="0" bIns="0" rtlCol="0" anchor="ctr"/>
-          <a:lstStyle/>
-          <a:p>
-            <a:pPr algn="ctr" indent="0" marL="0">
-              <a:buNone/>
-            </a:pPr>
-            <a:r>
-              <a:rPr lang="en-US" sz="900" b="1" dirty="0">
-                <a:solidFill>
-                  <a:srgbClr val="FFFFFF"/>
-                </a:solidFill>
-                <a:latin typeface="맑은 고딕" pitchFamily="34" charset="0"/>
-                <a:ea typeface="맑은 고딕" pitchFamily="34" charset="-122"/>
-                <a:cs typeface="맑은 고딕" pitchFamily="34" charset="-120"/>
-              </a:rPr>
-              <a:t>건물 외관</a:t>
-            </a:r>
-            <a:endParaRPr lang="en-US" sz="900" dirty="0"/>
-          </a:p>
-        </p:txBody>
-      </p:sp>
-      <p:sp>
-        <p:nvSpPr>
-          <p:cNvPr id="10" name="Shape 7"/>
-          <p:cNvSpPr/>
-          <p:nvPr/>
-        </p:nvSpPr>
-        <p:spPr>
-          <a:xfrm>
-            <a:off x="502920" y="3232404"/>
-            <a:ext cx="3600602" cy="292608"/>
-          </a:xfrm>
-          <a:prstGeom prst="rect">
-            <a:avLst/>
-          </a:prstGeom>
-          <a:solidFill>
-            <a:srgbClr val="000000">
-              <a:alpha val="60000"/>
-            </a:srgbClr>
-          </a:solidFill>
-          <a:ln/>
-        </p:spPr>
-      </p:sp>
-      <p:sp>
-        <p:nvSpPr>
-          <p:cNvPr id="11" name="Text 8"/>
-          <p:cNvSpPr/>
-          <p:nvPr/>
-        </p:nvSpPr>
-        <p:spPr>
-          <a:xfrm>
-            <a:off x="612648" y="3232404"/>
-            <a:ext cx="3381146" cy="292608"/>
-          </a:xfrm>
-          <a:prstGeom prst="rect">
-            <a:avLst/>
-          </a:prstGeom>
-          <a:noFill/>
-          <a:ln/>
-        </p:spPr>
-        <p:txBody>
-          <a:bodyPr wrap="square" lIns="0" tIns="0" rIns="0" bIns="0" rtlCol="0" anchor="ctr"/>
-          <a:lstStyle/>
-          <a:p>
-            <a:pPr indent="0" marL="0">
-              <a:buNone/>
-            </a:pPr>
-            <a:r>
-              <a:rPr lang="en-US" sz="900" dirty="0">
-                <a:solidFill>
-                  <a:srgbClr val="FFFFFF"/>
-                </a:solidFill>
-                <a:latin typeface="맑은 고딕" pitchFamily="34" charset="0"/>
-                <a:ea typeface="맑은 고딕" pitchFamily="34" charset="-122"/>
-                <a:cs typeface="맑은 고딕" pitchFamily="34" charset="-120"/>
-              </a:rPr>
-              <a:t>신사동 590 ICL 빌딩 전경 및 대로변 코너 입지</a:t>
-            </a:r>
-            <a:endParaRPr lang="en-US" sz="900" dirty="0"/>
-          </a:p>
-        </p:txBody>
-      </p:sp>
-      <p:sp>
-        <p:nvSpPr>
-          <p:cNvPr id="12" name="Shape 9"/>
-          <p:cNvSpPr/>
-          <p:nvPr/>
-        </p:nvSpPr>
-        <p:spPr>
-          <a:xfrm>
-            <a:off x="4231538" y="1234440"/>
-            <a:ext cx="3600602" cy="2290572"/>
-          </a:xfrm>
-          <a:prstGeom prst="roundRect">
-            <a:avLst>
-              <a:gd name="adj" fmla="val 2395"/>
-            </a:avLst>
-          </a:prstGeom>
-          <a:solidFill>
-            <a:srgbClr val="F0F0F0"/>
-          </a:solidFill>
-          <a:ln w="6350">
-            <a:solidFill>
-              <a:srgbClr val="E0E0E0"/>
-            </a:solidFill>
-            <a:prstDash val="solid"/>
-          </a:ln>
-        </p:spPr>
-      </p:sp>
-      <p:pic>
-        <p:nvPicPr>
-          <p:cNvPr id="13" name="Image 1" descr="preencoded.png">    </p:cNvPr>
-          <p:cNvPicPr>
-            <a:picLocks noChangeAspect="1"/>
-          </p:cNvPicPr>
-          <p:nvPr/>
-        </p:nvPicPr>
-        <p:blipFill>
-          <a:blip r:embed="rId2"/>
-          <a:srcRect l="0" r="0" t="0" b="0"/>
-          <a:stretch/>
-        </p:blipFill>
-        <p:spPr>
-          <a:xfrm>
-            <a:off x="4231538" y="1234440"/>
-            <a:ext cx="3600602" cy="2290572"/>
-          </a:xfrm>
-          <a:prstGeom prst="rect">
-            <a:avLst/>
-          </a:prstGeom>
-        </p:spPr>
-      </p:pic>
-      <p:sp>
-        <p:nvSpPr>
-          <p:cNvPr id="14" name="Shape 10"/>
-          <p:cNvSpPr/>
-          <p:nvPr/>
-        </p:nvSpPr>
-        <p:spPr>
-          <a:xfrm>
-            <a:off x="4304690" y="1307592"/>
-            <a:ext cx="868680" cy="237744"/>
-          </a:xfrm>
-          <a:prstGeom prst="rect">
-            <a:avLst/>
-          </a:prstGeom>
-          <a:solidFill>
-            <a:srgbClr val="10161F">
-              <a:alpha val="80000"/>
-            </a:srgbClr>
-          </a:solidFill>
-          <a:ln/>
-        </p:spPr>
-      </p:sp>
-      <p:sp>
-        <p:nvSpPr>
-          <p:cNvPr id="15" name="Text 11"/>
-          <p:cNvSpPr/>
-          <p:nvPr/>
-        </p:nvSpPr>
-        <p:spPr>
-          <a:xfrm>
-            <a:off x="4304690" y="1307592"/>
-            <a:ext cx="868680" cy="237744"/>
-          </a:xfrm>
-          <a:prstGeom prst="rect">
-            <a:avLst/>
-          </a:prstGeom>
-          <a:noFill/>
-          <a:ln/>
-        </p:spPr>
-        <p:txBody>
-          <a:bodyPr wrap="square" lIns="0" tIns="0" rIns="0" bIns="0" rtlCol="0" anchor="ctr"/>
-          <a:lstStyle/>
-          <a:p>
-            <a:pPr algn="ctr" indent="0" marL="0">
-              <a:buNone/>
-            </a:pPr>
-            <a:r>
-              <a:rPr lang="en-US" sz="900" b="1" dirty="0">
-                <a:solidFill>
-                  <a:srgbClr val="FFFFFF"/>
-                </a:solidFill>
-                <a:latin typeface="맑은 고딕" pitchFamily="34" charset="0"/>
-                <a:ea typeface="맑은 고딕" pitchFamily="34" charset="-122"/>
-                <a:cs typeface="맑은 고딕" pitchFamily="34" charset="-120"/>
-              </a:rPr>
-              <a:t>주 출입구</a:t>
-            </a:r>
-            <a:endParaRPr lang="en-US" sz="900" dirty="0"/>
-          </a:p>
-        </p:txBody>
-      </p:sp>
-      <p:sp>
-        <p:nvSpPr>
-          <p:cNvPr id="16" name="Shape 12"/>
-          <p:cNvSpPr/>
-          <p:nvPr/>
-        </p:nvSpPr>
-        <p:spPr>
-          <a:xfrm>
-            <a:off x="4231538" y="3232404"/>
-            <a:ext cx="3600602" cy="292608"/>
-          </a:xfrm>
-          <a:prstGeom prst="rect">
-            <a:avLst/>
-          </a:prstGeom>
-          <a:solidFill>
-            <a:srgbClr val="000000">
-              <a:alpha val="60000"/>
-            </a:srgbClr>
-          </a:solidFill>
-          <a:ln/>
-        </p:spPr>
-      </p:sp>
-      <p:sp>
-        <p:nvSpPr>
-          <p:cNvPr id="17" name="Text 13"/>
-          <p:cNvSpPr/>
-          <p:nvPr/>
-        </p:nvSpPr>
-        <p:spPr>
-          <a:xfrm>
-            <a:off x="4341266" y="3232404"/>
-            <a:ext cx="3381146" cy="292608"/>
-          </a:xfrm>
-          <a:prstGeom prst="rect">
-            <a:avLst/>
-          </a:prstGeom>
-          <a:noFill/>
-          <a:ln/>
-        </p:spPr>
-        <p:txBody>
-          <a:bodyPr wrap="square" lIns="0" tIns="0" rIns="0" bIns="0" rtlCol="0" anchor="ctr"/>
-          <a:lstStyle/>
-          <a:p>
-            <a:pPr indent="0" marL="0">
-              <a:buNone/>
-            </a:pPr>
-            <a:r>
-              <a:rPr lang="en-US" sz="900" dirty="0">
-                <a:solidFill>
-                  <a:srgbClr val="FFFFFF"/>
-                </a:solidFill>
-                <a:latin typeface="맑은 고딕" pitchFamily="34" charset="0"/>
-                <a:ea typeface="맑은 고딕" pitchFamily="34" charset="-122"/>
-                <a:cs typeface="맑은 고딕" pitchFamily="34" charset="-120"/>
-              </a:rPr>
-              <a:t>지상 진입로 및 1층 전면 상가부</a:t>
-            </a:r>
-            <a:endParaRPr lang="en-US" sz="900" dirty="0"/>
-          </a:p>
-        </p:txBody>
-      </p:sp>
-      <p:sp>
-        <p:nvSpPr>
-          <p:cNvPr id="18" name="Shape 14"/>
-          <p:cNvSpPr/>
-          <p:nvPr/>
-        </p:nvSpPr>
-        <p:spPr>
-          <a:xfrm>
-            <a:off x="7960157" y="1234440"/>
-            <a:ext cx="3600602" cy="2290572"/>
-          </a:xfrm>
-          <a:prstGeom prst="roundRect">
-            <a:avLst>
-              <a:gd name="adj" fmla="val 2395"/>
-            </a:avLst>
-          </a:prstGeom>
-          <a:solidFill>
-            <a:srgbClr val="F0F0F0"/>
-          </a:solidFill>
-          <a:ln w="6350">
-            <a:solidFill>
-              <a:srgbClr val="E0E0E0"/>
-            </a:solidFill>
-            <a:prstDash val="solid"/>
-          </a:ln>
-        </p:spPr>
-      </p:sp>
-      <p:pic>
-        <p:nvPicPr>
-          <p:cNvPr id="19" name="Image 2" descr="preencoded.png">    </p:cNvPr>
-          <p:cNvPicPr>
-            <a:picLocks noChangeAspect="1"/>
-          </p:cNvPicPr>
-          <p:nvPr/>
-        </p:nvPicPr>
-        <p:blipFill>
-          <a:blip r:embed="rId3"/>
-          <a:srcRect l="0" r="0" t="0" b="0"/>
-          <a:stretch/>
-        </p:blipFill>
-        <p:spPr>
-          <a:xfrm>
-            <a:off x="7960157" y="1234440"/>
-            <a:ext cx="3600602" cy="2290572"/>
-          </a:xfrm>
-          <a:prstGeom prst="rect">
-            <a:avLst/>
-          </a:prstGeom>
-        </p:spPr>
-      </p:pic>
-      <p:sp>
-        <p:nvSpPr>
-          <p:cNvPr id="20" name="Shape 15"/>
-          <p:cNvSpPr/>
-          <p:nvPr/>
-        </p:nvSpPr>
-        <p:spPr>
-          <a:xfrm>
-            <a:off x="8033309" y="1307592"/>
-            <a:ext cx="868680" cy="237744"/>
-          </a:xfrm>
-          <a:prstGeom prst="rect">
-            <a:avLst/>
-          </a:prstGeom>
-          <a:solidFill>
-            <a:srgbClr val="10161F">
-              <a:alpha val="80000"/>
-            </a:srgbClr>
-          </a:solidFill>
-          <a:ln/>
-        </p:spPr>
-      </p:sp>
-      <p:sp>
-        <p:nvSpPr>
-          <p:cNvPr id="21" name="Text 16"/>
-          <p:cNvSpPr/>
-          <p:nvPr/>
-        </p:nvSpPr>
-        <p:spPr>
-          <a:xfrm>
-            <a:off x="8033309" y="1307592"/>
-            <a:ext cx="868680" cy="237744"/>
-          </a:xfrm>
-          <a:prstGeom prst="rect">
-            <a:avLst/>
-          </a:prstGeom>
-          <a:noFill/>
-          <a:ln/>
-        </p:spPr>
-        <p:txBody>
-          <a:bodyPr wrap="square" lIns="0" tIns="0" rIns="0" bIns="0" rtlCol="0" anchor="ctr"/>
-          <a:lstStyle/>
-          <a:p>
-            <a:pPr algn="ctr" indent="0" marL="0">
-              <a:buNone/>
-            </a:pPr>
-            <a:r>
-              <a:rPr lang="en-US" sz="900" b="1" dirty="0">
-                <a:solidFill>
-                  <a:srgbClr val="FFFFFF"/>
-                </a:solidFill>
-                <a:latin typeface="맑은 고딕" pitchFamily="34" charset="0"/>
-                <a:ea typeface="맑은 고딕" pitchFamily="34" charset="-122"/>
-                <a:cs typeface="맑은 고딕" pitchFamily="34" charset="-120"/>
-              </a:rPr>
-              <a:t>실내 공간</a:t>
-            </a:r>
-            <a:endParaRPr lang="en-US" sz="900" dirty="0"/>
-          </a:p>
-        </p:txBody>
-      </p:sp>
-      <p:sp>
-        <p:nvSpPr>
-          <p:cNvPr id="22" name="Shape 17"/>
-          <p:cNvSpPr/>
-          <p:nvPr/>
-        </p:nvSpPr>
-        <p:spPr>
-          <a:xfrm>
-            <a:off x="7960157" y="3232404"/>
-            <a:ext cx="3600602" cy="292608"/>
-          </a:xfrm>
-          <a:prstGeom prst="rect">
-            <a:avLst/>
-          </a:prstGeom>
-          <a:solidFill>
-            <a:srgbClr val="000000">
-              <a:alpha val="60000"/>
-            </a:srgbClr>
-          </a:solidFill>
-          <a:ln/>
-        </p:spPr>
-      </p:sp>
-      <p:sp>
-        <p:nvSpPr>
-          <p:cNvPr id="23" name="Text 18"/>
-          <p:cNvSpPr/>
-          <p:nvPr/>
-        </p:nvSpPr>
-        <p:spPr>
-          <a:xfrm>
-            <a:off x="8069885" y="3232404"/>
-            <a:ext cx="3381146" cy="292608"/>
-          </a:xfrm>
-          <a:prstGeom prst="rect">
-            <a:avLst/>
-          </a:prstGeom>
-          <a:noFill/>
-          <a:ln/>
-        </p:spPr>
-        <p:txBody>
-          <a:bodyPr wrap="square" lIns="0" tIns="0" rIns="0" bIns="0" rtlCol="0" anchor="ctr"/>
-          <a:lstStyle/>
-          <a:p>
-            <a:pPr indent="0" marL="0">
-              <a:buNone/>
-            </a:pPr>
-            <a:r>
-              <a:rPr lang="en-US" sz="900" dirty="0">
-                <a:solidFill>
-                  <a:srgbClr val="FFFFFF"/>
-                </a:solidFill>
-                <a:latin typeface="맑은 고딕" pitchFamily="34" charset="0"/>
-                <a:ea typeface="맑은 고딕" pitchFamily="34" charset="-122"/>
-                <a:cs typeface="맑은 고딕" pitchFamily="34" charset="-120"/>
-              </a:rPr>
-              <a:t>건물 측면부 및 도로 접면</a:t>
-            </a:r>
-            <a:endParaRPr lang="en-US" sz="900" dirty="0"/>
-          </a:p>
-        </p:txBody>
-      </p:sp>
-      <p:sp>
-        <p:nvSpPr>
-          <p:cNvPr id="24" name="Shape 19"/>
-          <p:cNvSpPr/>
-          <p:nvPr/>
-        </p:nvSpPr>
-        <p:spPr>
-          <a:xfrm>
-            <a:off x="502920" y="3653028"/>
-            <a:ext cx="3600602" cy="2290572"/>
-          </a:xfrm>
-          <a:prstGeom prst="roundRect">
-            <a:avLst>
-              <a:gd name="adj" fmla="val 2395"/>
-            </a:avLst>
-          </a:prstGeom>
-          <a:solidFill>
-            <a:srgbClr val="F0F0F0"/>
-          </a:solidFill>
-          <a:ln w="6350">
-            <a:solidFill>
-              <a:srgbClr val="E0E0E0"/>
-            </a:solidFill>
-            <a:prstDash val="solid"/>
-          </a:ln>
-        </p:spPr>
-      </p:sp>
-      <p:pic>
-        <p:nvPicPr>
-          <p:cNvPr id="25" name="Image 3" descr="preencoded.png">    </p:cNvPr>
-          <p:cNvPicPr>
-            <a:picLocks noChangeAspect="1"/>
-          </p:cNvPicPr>
-          <p:nvPr/>
-        </p:nvPicPr>
-        <p:blipFill>
-          <a:blip r:embed="rId4"/>
-          <a:srcRect l="0" r="0" t="0" b="0"/>
-          <a:stretch/>
-        </p:blipFill>
-        <p:spPr>
-          <a:xfrm>
-            <a:off x="502920" y="3653028"/>
-            <a:ext cx="3600602" cy="2290572"/>
-          </a:xfrm>
-          <a:prstGeom prst="rect">
-            <a:avLst/>
-          </a:prstGeom>
-        </p:spPr>
-      </p:pic>
-      <p:sp>
-        <p:nvSpPr>
-          <p:cNvPr id="26" name="Shape 20"/>
-          <p:cNvSpPr/>
-          <p:nvPr/>
-        </p:nvSpPr>
-        <p:spPr>
-          <a:xfrm>
-            <a:off x="576072" y="3726180"/>
-            <a:ext cx="822960" cy="237744"/>
-          </a:xfrm>
-          <a:prstGeom prst="rect">
-            <a:avLst/>
-          </a:prstGeom>
-          <a:solidFill>
-            <a:srgbClr val="10161F">
-              <a:alpha val="80000"/>
-            </a:srgbClr>
-          </a:solidFill>
-          <a:ln/>
-        </p:spPr>
-      </p:sp>
-      <p:sp>
-        <p:nvSpPr>
-          <p:cNvPr id="27" name="Text 21"/>
-          <p:cNvSpPr/>
-          <p:nvPr/>
-        </p:nvSpPr>
-        <p:spPr>
-          <a:xfrm>
-            <a:off x="576072" y="3726180"/>
-            <a:ext cx="822960" cy="237744"/>
-          </a:xfrm>
-          <a:prstGeom prst="rect">
-            <a:avLst/>
-          </a:prstGeom>
-          <a:noFill/>
-          <a:ln/>
-        </p:spPr>
-        <p:txBody>
-          <a:bodyPr wrap="square" lIns="0" tIns="0" rIns="0" bIns="0" rtlCol="0" anchor="ctr"/>
-          <a:lstStyle/>
-          <a:p>
-            <a:pPr algn="ctr" indent="0" marL="0">
-              <a:buNone/>
-            </a:pPr>
-            <a:r>
-              <a:rPr lang="en-US" sz="900" b="1" dirty="0">
-                <a:solidFill>
-                  <a:srgbClr val="FFFFFF"/>
-                </a:solidFill>
-                <a:latin typeface="맑은 고딕" pitchFamily="34" charset="0"/>
-                <a:ea typeface="맑은 고딕" pitchFamily="34" charset="-122"/>
-                <a:cs typeface="맑은 고딕" pitchFamily="34" charset="-120"/>
-              </a:rPr>
-              <a:t>주차장</a:t>
-            </a:r>
-            <a:endParaRPr lang="en-US" sz="900" dirty="0"/>
-          </a:p>
-        </p:txBody>
-      </p:sp>
-      <p:sp>
-        <p:nvSpPr>
-          <p:cNvPr id="28" name="Shape 22"/>
-          <p:cNvSpPr/>
-          <p:nvPr/>
-        </p:nvSpPr>
-        <p:spPr>
-          <a:xfrm>
-            <a:off x="502920" y="5650992"/>
-            <a:ext cx="3600602" cy="292608"/>
-          </a:xfrm>
-          <a:prstGeom prst="rect">
-            <a:avLst/>
-          </a:prstGeom>
-          <a:solidFill>
-            <a:srgbClr val="000000">
-              <a:alpha val="60000"/>
-            </a:srgbClr>
-          </a:solidFill>
-          <a:ln/>
-        </p:spPr>
-      </p:sp>
-      <p:sp>
-        <p:nvSpPr>
-          <p:cNvPr id="29" name="Text 23"/>
-          <p:cNvSpPr/>
-          <p:nvPr/>
-        </p:nvSpPr>
-        <p:spPr>
-          <a:xfrm>
-            <a:off x="612648" y="5650992"/>
-            <a:ext cx="3381146" cy="292608"/>
-          </a:xfrm>
-          <a:prstGeom prst="rect">
-            <a:avLst/>
-          </a:prstGeom>
-          <a:noFill/>
-          <a:ln/>
-        </p:spPr>
-        <p:txBody>
-          <a:bodyPr wrap="square" lIns="0" tIns="0" rIns="0" bIns="0" rtlCol="0" anchor="ctr"/>
-          <a:lstStyle/>
-          <a:p>
-            <a:pPr indent="0" marL="0">
-              <a:buNone/>
-            </a:pPr>
-            <a:r>
-              <a:rPr lang="en-US" sz="900" dirty="0">
-                <a:solidFill>
-                  <a:srgbClr val="FFFFFF"/>
-                </a:solidFill>
-                <a:latin typeface="맑은 고딕" pitchFamily="34" charset="0"/>
-                <a:ea typeface="맑은 고딕" pitchFamily="34" charset="-122"/>
-                <a:cs typeface="맑은 고딕" pitchFamily="34" charset="-120"/>
-              </a:rPr>
-              <a:t>자주식/기계식 주차장 진입로 (총 26대)</a:t>
-            </a:r>
-            <a:endParaRPr lang="en-US" sz="900" dirty="0"/>
-          </a:p>
-        </p:txBody>
-      </p:sp>
-      <p:sp>
-        <p:nvSpPr>
-          <p:cNvPr id="30" name="Shape 24"/>
-          <p:cNvSpPr/>
-          <p:nvPr/>
-        </p:nvSpPr>
-        <p:spPr>
-          <a:xfrm>
-            <a:off x="4231538" y="3653028"/>
-            <a:ext cx="3600602" cy="2290572"/>
-          </a:xfrm>
-          <a:prstGeom prst="roundRect">
-            <a:avLst>
-              <a:gd name="adj" fmla="val 2395"/>
-            </a:avLst>
-          </a:prstGeom>
-          <a:solidFill>
-            <a:srgbClr val="F0F0F0"/>
-          </a:solidFill>
-          <a:ln w="6350">
-            <a:solidFill>
-              <a:srgbClr val="E0E0E0"/>
-            </a:solidFill>
-            <a:prstDash val="solid"/>
-          </a:ln>
-        </p:spPr>
-      </p:sp>
-      <p:pic>
-        <p:nvPicPr>
-          <p:cNvPr id="31" name="Image 4" descr="preencoded.png">    </p:cNvPr>
-          <p:cNvPicPr>
-            <a:picLocks noChangeAspect="1"/>
-          </p:cNvPicPr>
-          <p:nvPr/>
-        </p:nvPicPr>
-        <p:blipFill>
-          <a:blip r:embed="rId5"/>
-          <a:srcRect l="0" r="0" t="0" b="0"/>
-          <a:stretch/>
-        </p:blipFill>
-        <p:spPr>
-          <a:xfrm>
-            <a:off x="4231538" y="3653028"/>
-            <a:ext cx="3600602" cy="2290572"/>
-          </a:xfrm>
-          <a:prstGeom prst="rect">
-            <a:avLst/>
-          </a:prstGeom>
-        </p:spPr>
-      </p:pic>
-      <p:sp>
-        <p:nvSpPr>
-          <p:cNvPr id="32" name="Shape 25"/>
-          <p:cNvSpPr/>
-          <p:nvPr/>
-        </p:nvSpPr>
-        <p:spPr>
-          <a:xfrm>
-            <a:off x="4304690" y="3726180"/>
-            <a:ext cx="996696" cy="237744"/>
-          </a:xfrm>
-          <a:prstGeom prst="rect">
-            <a:avLst/>
-          </a:prstGeom>
-          <a:solidFill>
-            <a:srgbClr val="10161F">
-              <a:alpha val="80000"/>
-            </a:srgbClr>
-          </a:solidFill>
-          <a:ln/>
-        </p:spPr>
-      </p:sp>
-      <p:sp>
-        <p:nvSpPr>
-          <p:cNvPr id="33" name="Text 26"/>
-          <p:cNvSpPr/>
-          <p:nvPr/>
-        </p:nvSpPr>
-        <p:spPr>
-          <a:xfrm>
-            <a:off x="4304690" y="3726180"/>
-            <a:ext cx="996696" cy="237744"/>
-          </a:xfrm>
-          <a:prstGeom prst="rect">
-            <a:avLst/>
-          </a:prstGeom>
-          <a:noFill/>
-          <a:ln/>
-        </p:spPr>
-        <p:txBody>
-          <a:bodyPr wrap="square" lIns="0" tIns="0" rIns="0" bIns="0" rtlCol="0" anchor="ctr"/>
-          <a:lstStyle/>
-          <a:p>
-            <a:pPr algn="ctr" indent="0" marL="0">
-              <a:buNone/>
-            </a:pPr>
-            <a:r>
-              <a:rPr lang="en-US" sz="900" b="1" dirty="0">
-                <a:solidFill>
-                  <a:srgbClr val="FFFFFF"/>
-                </a:solidFill>
-                <a:latin typeface="맑은 고딕" pitchFamily="34" charset="0"/>
-                <a:ea typeface="맑은 고딕" pitchFamily="34" charset="-122"/>
-                <a:cs typeface="맑은 고딕" pitchFamily="34" charset="-120"/>
-              </a:rPr>
-              <a:t>옥상/테라스</a:t>
-            </a:r>
-            <a:endParaRPr lang="en-US" sz="900" dirty="0"/>
-          </a:p>
-        </p:txBody>
-      </p:sp>
-      <p:sp>
-        <p:nvSpPr>
-          <p:cNvPr id="34" name="Shape 27"/>
-          <p:cNvSpPr/>
-          <p:nvPr/>
-        </p:nvSpPr>
-        <p:spPr>
-          <a:xfrm>
-            <a:off x="4231538" y="5650992"/>
-            <a:ext cx="3600602" cy="292608"/>
-          </a:xfrm>
-          <a:prstGeom prst="rect">
-            <a:avLst/>
-          </a:prstGeom>
-          <a:solidFill>
-            <a:srgbClr val="000000">
-              <a:alpha val="60000"/>
-            </a:srgbClr>
-          </a:solidFill>
-          <a:ln/>
-        </p:spPr>
-      </p:sp>
-      <p:sp>
-        <p:nvSpPr>
-          <p:cNvPr id="35" name="Text 28"/>
-          <p:cNvSpPr/>
-          <p:nvPr/>
-        </p:nvSpPr>
-        <p:spPr>
-          <a:xfrm>
-            <a:off x="4341266" y="5650992"/>
-            <a:ext cx="3381146" cy="292608"/>
-          </a:xfrm>
-          <a:prstGeom prst="rect">
-            <a:avLst/>
-          </a:prstGeom>
-          <a:noFill/>
-          <a:ln/>
-        </p:spPr>
-        <p:txBody>
-          <a:bodyPr wrap="square" lIns="0" tIns="0" rIns="0" bIns="0" rtlCol="0" anchor="ctr"/>
-          <a:lstStyle/>
-          <a:p>
-            <a:pPr indent="0" marL="0">
-              <a:buNone/>
-            </a:pPr>
-            <a:r>
-              <a:rPr lang="en-US" sz="900" dirty="0">
-                <a:solidFill>
-                  <a:srgbClr val="FFFFFF"/>
-                </a:solidFill>
-                <a:latin typeface="맑은 고딕" pitchFamily="34" charset="0"/>
-                <a:ea typeface="맑은 고딕" pitchFamily="34" charset="-122"/>
-                <a:cs typeface="맑은 고딕" pitchFamily="34" charset="-120"/>
-              </a:rPr>
-              <a:t>상층부 외관 및 옥상 공간</a:t>
-            </a:r>
-            <a:endParaRPr lang="en-US" sz="900" dirty="0"/>
-          </a:p>
-        </p:txBody>
-      </p:sp>
-      <p:sp>
-        <p:nvSpPr>
-          <p:cNvPr id="36" name="Text 29"/>
-          <p:cNvSpPr/>
-          <p:nvPr/>
-        </p:nvSpPr>
-        <p:spPr>
-          <a:xfrm>
-            <a:off x="502920" y="6382512"/>
-            <a:ext cx="7315200" cy="219456"/>
-          </a:xfrm>
-          <a:prstGeom prst="rect">
-            <a:avLst/>
-          </a:prstGeom>
-          <a:noFill/>
-          <a:ln/>
-        </p:spPr>
-        <p:txBody>
-          <a:bodyPr wrap="square" lIns="0" tIns="0" rIns="0" bIns="0" rtlCol="0" anchor="ctr"/>
-          <a:lstStyle/>
-          <a:p>
-            <a:pPr indent="0" marL="0">
-              <a:buNone/>
-            </a:pPr>
-            <a:r>
-              <a:rPr lang="en-US" sz="800" dirty="0">
-                <a:solidFill>
-                  <a:srgbClr val="5B6B73"/>
-                </a:solidFill>
-                <a:latin typeface="맑은 고딕" pitchFamily="34" charset="0"/>
-                <a:ea typeface="맑은 고딕" pitchFamily="34" charset="-122"/>
-                <a:cs typeface="맑은 고딕" pitchFamily="34" charset="-120"/>
-              </a:rPr>
-              <a:t>CRE DEAL   |   IM-SINSA-590</a:t>
-            </a:r>
-            <a:endParaRPr lang="en-US" sz="800" dirty="0"/>
-          </a:p>
-        </p:txBody>
-      </p:sp>
-      <p:sp>
-        <p:nvSpPr>
-          <p:cNvPr id="37" name="Text 30"/>
-          <p:cNvSpPr/>
-          <p:nvPr/>
-        </p:nvSpPr>
-        <p:spPr>
-          <a:xfrm>
-            <a:off x="10774375" y="6382512"/>
-            <a:ext cx="914400" cy="219456"/>
-          </a:xfrm>
-          <a:prstGeom prst="rect">
-            <a:avLst/>
-          </a:prstGeom>
-          <a:noFill/>
-          <a:ln/>
-        </p:spPr>
-        <p:txBody>
-          <a:bodyPr wrap="square" lIns="0" tIns="0" rIns="0" bIns="0" rtlCol="0" anchor="ctr"/>
-          <a:lstStyle/>
-          <a:p>
-            <a:pPr algn="r" indent="0" marL="0">
-              <a:buNone/>
-            </a:pPr>
-            <a:r>
-              <a:rPr lang="en-US" sz="900" b="1" dirty="0">
-                <a:solidFill>
-                  <a:srgbClr val="B8860B"/>
-                </a:solidFill>
-                <a:latin typeface="Arial" pitchFamily="34" charset="0"/>
-                <a:ea typeface="Arial" pitchFamily="34" charset="-122"/>
-                <a:cs typeface="Arial" pitchFamily="34" charset="-120"/>
-              </a:rPr>
-              <a:t>7</a:t>
-            </a:r>
-            <a:endParaRPr lang="en-US" sz="900" dirty="0"/>
-          </a:p>
-        </p:txBody>
-      </p:sp>
-    </p:spTree>
-  </p:cSld>
-  <p:clrMapOvr>
-    <a:masterClrMapping/>
-  </p:clrMapOvr>
-</p:sld>
-</file>
-
-<file path=ppt/slides/slide8.xml><?xml version="1.0" encoding="utf-8"?>
-<p:sld xmlns:a="http://schemas.openxmlformats.org/drawingml/2006/main" xmlns:r="http://schemas.openxmlformats.org/officeDocument/2006/relationships" xmlns:p="http://schemas.openxmlformats.org/presentationml/2006/main">
-  <p:cSld name="Slide 8">
     <p:bg>
       <p:bgPr>
         <a:solidFill>
@@ -9484,7 +8706,7 @@
                 <a:ea typeface="Arial" pitchFamily="34" charset="-122"/>
                 <a:cs typeface="Arial" pitchFamily="34" charset="-120"/>
               </a:rPr>
-              <a:t>08</a:t>
+              <a:t>07</a:t>
             </a:r>
             <a:endParaRPr lang="en-US" sz="1300" dirty="0"/>
           </a:p>
@@ -11079,7 +10301,7 @@
                 <a:ea typeface="Arial" pitchFamily="34" charset="-122"/>
                 <a:cs typeface="Arial" pitchFamily="34" charset="-120"/>
               </a:rPr>
-              <a:t>8</a:t>
+              <a:t>7</a:t>
             </a:r>
             <a:endParaRPr lang="en-US" sz="900" dirty="0"/>
           </a:p>
